--- a/PRUEBAS DE SOFTWARE/testing_s1_5.pptx
+++ b/PRUEBAS DE SOFTWARE/testing_s1_5.pptx
@@ -4,6 +4,9 @@
   <p:sldMasterIdLst>
     <p:sldMasterId id="2147483648" r:id="rId1"/>
   </p:sldMasterIdLst>
+  <p:notesMasterIdLst>
+    <p:notesMasterId r:id="rId55"/>
+  </p:notesMasterIdLst>
   <p:sldIdLst>
     <p:sldId id="256" r:id="rId2"/>
     <p:sldId id="257" r:id="rId3"/>
@@ -59,10 +62,7 @@
     <p:sldId id="307" r:id="rId53"/>
     <p:sldId id="308" r:id="rId54"/>
   </p:sldIdLst>
-  <p:notesMasterIdLst>
-    <p:notesMasterId r:id="rId55"/>
-  </p:notesMasterIdLst>
-  <p:sldSz cx="9144000" cy="5143500"/>
+  <p:sldSz cx="9144000" cy="5143500" type="screen16x9"/>
   <p:notesSz cx="5143500" cy="9144000"/>
   <p:defaultTextStyle>
     <a:lvl1pPr marL="0" algn="l" defTabSz="914400" rtl="0" eaLnBrk="1" latinLnBrk="0" hangingPunct="1">
@@ -156,13 +156,20 @@
       </a:defRPr>
     </a:lvl9pPr>
   </p:defaultTextStyle>
+  <p:extLst>
+    <p:ext uri="{EFAFB233-063F-42B5-8137-9DF3F51BA10A}">
+      <p15:sldGuideLst xmlns:p15="http://schemas.microsoft.com/office/powerpoint/2012/main"/>
+    </p:ext>
+  </p:extLst>
 </p:presentation>
 </file>
 
 <file path=ppt/charts/chart1.xml><?xml version="1.0" encoding="utf-8"?>
-<c:chartSpace xmlns:c="http://schemas.openxmlformats.org/drawingml/2006/chart" xmlns:a="http://schemas.openxmlformats.org/drawingml/2006/main" xmlns:r="http://schemas.openxmlformats.org/officeDocument/2006/relationships">
+<c:chartSpace xmlns:c="http://schemas.openxmlformats.org/drawingml/2006/chart" xmlns:a="http://schemas.openxmlformats.org/drawingml/2006/main" xmlns:r="http://schemas.openxmlformats.org/officeDocument/2006/relationships" xmlns:c16r2="http://schemas.microsoft.com/office/drawing/2015/06/chart">
   <c:date1904 val="0"/>
+  <c:lang val="es-ES"/>
   <c:roundedCorners val="0"/>
+  <c:style val="2"/>
   <c:chart>
     <c:autoTitleDeleted val="1"/>
     <c:plotArea>
@@ -192,40 +199,15 @@
             <a:effectLst/>
           </c:spPr>
           <c:invertIfNegative val="0"/>
-          <c:dLbls>
-            <c:numFmt formatCode="#,##0" sourceLinked="0"/>
-            <c:txPr>
-              <a:bodyPr/>
-              <a:lstStyle/>
-              <a:p>
-                <a:pPr>
-                  <a:defRPr b="0" i="0" strike="noStrike" sz="1200" u="none">
-                    <a:solidFill>
-                      <a:srgbClr val="000000"/>
-                    </a:solidFill>
-                    <a:latin typeface="Arial"/>
-                  </a:defRPr>
-                </a:pPr>
-              </a:p>
-            </c:txPr>
-            <c:showLegendKey val="0"/>
-            <c:showVal val="1"/>
-            <c:showCatName val="0"/>
-            <c:showSerName val="0"/>
-            <c:showPercent val="0"/>
-            <c:showBubbleSize val="0"/>
-            <c:showLeaderLines val="0"/>
-          </c:dLbls>
           <c:dPt>
             <c:idx val="0"/>
             <c:invertIfNegative val="0"/>
             <c:bubble3D val="0"/>
-            <c:spPr>
-              <a:solidFill>
-                <a:srgbClr val="1565C0"/>
-              </a:solidFill>
-              <a:effectLst/>
-            </c:spPr>
+            <c:extLst>
+              <c:ext xmlns:c16="http://schemas.microsoft.com/office/drawing/2014/chart" uri="{C3380CC4-5D6E-409C-BE32-E72D297353CC}">
+                <c16:uniqueId val="{00000001-A6E5-4959-9255-407E0BEF4550}"/>
+              </c:ext>
+            </c:extLst>
           </c:dPt>
           <c:dPt>
             <c:idx val="1"/>
@@ -237,6 +219,11 @@
               </a:solidFill>
               <a:effectLst/>
             </c:spPr>
+            <c:extLst>
+              <c:ext xmlns:c16="http://schemas.microsoft.com/office/drawing/2014/chart" uri="{C3380CC4-5D6E-409C-BE32-E72D297353CC}">
+                <c16:uniqueId val="{00000003-A6E5-4959-9255-407E0BEF4550}"/>
+              </c:ext>
+            </c:extLst>
           </c:dPt>
           <c:dPt>
             <c:idx val="2"/>
@@ -248,25 +235,65 @@
               </a:solidFill>
               <a:effectLst/>
             </c:spPr>
+            <c:extLst>
+              <c:ext xmlns:c16="http://schemas.microsoft.com/office/drawing/2014/chart" uri="{C3380CC4-5D6E-409C-BE32-E72D297353CC}">
+                <c16:uniqueId val="{00000005-A6E5-4959-9255-407E0BEF4550}"/>
+              </c:ext>
+            </c:extLst>
           </c:dPt>
+          <c:dLbls>
+            <c:numFmt formatCode="#,##0" sourceLinked="0"/>
+            <c:spPr>
+              <a:noFill/>
+              <a:ln>
+                <a:noFill/>
+              </a:ln>
+              <a:effectLst/>
+            </c:spPr>
+            <c:txPr>
+              <a:bodyPr/>
+              <a:lstStyle/>
+              <a:p>
+                <a:pPr>
+                  <a:defRPr sz="1200" b="0" i="0" u="none" strike="noStrike">
+                    <a:solidFill>
+                      <a:srgbClr val="000000"/>
+                    </a:solidFill>
+                    <a:latin typeface="Arial"/>
+                  </a:defRPr>
+                </a:pPr>
+                <a:endParaRPr lang="es-CO"/>
+              </a:p>
+            </c:txPr>
+            <c:showLegendKey val="0"/>
+            <c:showVal val="1"/>
+            <c:showCatName val="0"/>
+            <c:showSerName val="0"/>
+            <c:showPercent val="0"/>
+            <c:showBubbleSize val="0"/>
+            <c:showLeaderLines val="0"/>
+            <c:extLst>
+              <c:ext xmlns:c15="http://schemas.microsoft.com/office/drawing/2012/chart" uri="{CE6537A1-D6FC-4f65-9D91-7224C49458BB}">
+                <c15:showLeaderLines val="0"/>
+              </c:ext>
+            </c:extLst>
+          </c:dLbls>
           <c:cat>
-            <c:multiLvlStrRef>
+            <c:strRef>
               <c:f>Sheet1!$A$2:$A$4</c:f>
-              <c:multiLvlStrCache>
+              <c:strCache>
                 <c:ptCount val="3"/>
-                <c:lvl>
-                  <c:pt idx="0">
-                    <c:v>Unit Tests</c:v>
-                  </c:pt>
-                  <c:pt idx="1">
-                    <c:v>Integration Tests</c:v>
-                  </c:pt>
-                  <c:pt idx="2">
-                    <c:v>E2E Tests</c:v>
-                  </c:pt>
-                </c:lvl>
-              </c:multiLvlStrCache>
-            </c:multiLvlStrRef>
+                <c:pt idx="0">
+                  <c:v>Unit Tests</c:v>
+                </c:pt>
+                <c:pt idx="1">
+                  <c:v>Integration Tests</c:v>
+                </c:pt>
+                <c:pt idx="2">
+                  <c:v>E2E Tests</c:v>
+                </c:pt>
+              </c:strCache>
+            </c:strRef>
           </c:cat>
           <c:val>
             <c:numRef>
@@ -286,36 +313,23 @@
               </c:numCache>
             </c:numRef>
           </c:val>
+          <c:extLst>
+            <c:ext xmlns:c16="http://schemas.microsoft.com/office/drawing/2014/chart" uri="{C3380CC4-5D6E-409C-BE32-E72D297353CC}">
+              <c16:uniqueId val="{00000006-A6E5-4959-9255-407E0BEF4550}"/>
+            </c:ext>
+          </c:extLst>
         </c:ser>
         <c:dLbls>
-          <c:numFmt formatCode="#,##0" sourceLinked="0"/>
-          <c:txPr>
-            <a:bodyPr/>
-            <a:lstStyle/>
-            <a:p>
-              <a:pPr>
-                <a:defRPr b="0" i="0" strike="noStrike" sz="1200" u="none">
-                  <a:solidFill>
-                    <a:srgbClr val="000000"/>
-                  </a:solidFill>
-                  <a:latin typeface="Arial"/>
-                </a:defRPr>
-              </a:pPr>
-            </a:p>
-          </c:txPr>
           <c:showLegendKey val="0"/>
           <c:showVal val="1"/>
           <c:showCatName val="0"/>
           <c:showSerName val="0"/>
           <c:showPercent val="0"/>
           <c:showBubbleSize val="0"/>
-          <c:showLeaderLines val="0"/>
         </c:dLbls>
         <c:gapWidth val="150"/>
-        <c:overlap val="0"/>
         <c:axId val="2094734554"/>
         <c:axId val="2094734552"/>
-        <c:axId val="2094734556"/>
       </c:barChart>
       <c:catAx>
         <c:axId val="2094734554"/>
@@ -356,6 +370,7 @@
         <c:crosses val="autoZero"/>
         <c:auto val="1"/>
         <c:lblAlgn val="ctr"/>
+        <c:lblOffset val="100"/>
         <c:noMultiLvlLbl val="1"/>
       </c:catAx>
       <c:valAx>
@@ -422,6 +437,7 @@
     </c:legend>
     <c:plotVisOnly val="1"/>
     <c:dispBlanksAs val="span"/>
+    <c:showDLblsOverMax val="1"/>
   </c:chart>
   <c:spPr>
     <a:solidFill>
@@ -439,9 +455,11 @@
 </file>
 
 <file path=ppt/charts/chart2.xml><?xml version="1.0" encoding="utf-8"?>
-<c:chartSpace xmlns:c="http://schemas.openxmlformats.org/drawingml/2006/chart" xmlns:a="http://schemas.openxmlformats.org/drawingml/2006/main" xmlns:r="http://schemas.openxmlformats.org/officeDocument/2006/relationships">
+<c:chartSpace xmlns:c="http://schemas.openxmlformats.org/drawingml/2006/chart" xmlns:a="http://schemas.openxmlformats.org/drawingml/2006/main" xmlns:r="http://schemas.openxmlformats.org/officeDocument/2006/relationships" xmlns:c16r2="http://schemas.microsoft.com/office/drawing/2015/06/chart">
   <c:date1904 val="0"/>
+  <c:lang val="es-ES"/>
   <c:roundedCorners val="0"/>
+  <c:style val="2"/>
   <c:chart>
     <c:autoTitleDeleted val="1"/>
     <c:plotArea>
@@ -471,40 +489,15 @@
             <a:effectLst/>
           </c:spPr>
           <c:invertIfNegative val="0"/>
-          <c:dLbls>
-            <c:numFmt formatCode="#,##0" sourceLinked="0"/>
-            <c:txPr>
-              <a:bodyPr/>
-              <a:lstStyle/>
-              <a:p>
-                <a:pPr>
-                  <a:defRPr b="0" i="0" strike="noStrike" sz="1200" u="none">
-                    <a:solidFill>
-                      <a:srgbClr val="000000"/>
-                    </a:solidFill>
-                    <a:latin typeface="Arial"/>
-                  </a:defRPr>
-                </a:pPr>
-              </a:p>
-            </c:txPr>
-            <c:showLegendKey val="0"/>
-            <c:showVal val="1"/>
-            <c:showCatName val="0"/>
-            <c:showSerName val="0"/>
-            <c:showPercent val="0"/>
-            <c:showBubbleSize val="0"/>
-            <c:showLeaderLines val="0"/>
-          </c:dLbls>
           <c:dPt>
             <c:idx val="0"/>
             <c:invertIfNegative val="0"/>
             <c:bubble3D val="0"/>
-            <c:spPr>
-              <a:solidFill>
-                <a:srgbClr val="1565C0"/>
-              </a:solidFill>
-              <a:effectLst/>
-            </c:spPr>
+            <c:extLst>
+              <c:ext xmlns:c16="http://schemas.microsoft.com/office/drawing/2014/chart" uri="{C3380CC4-5D6E-409C-BE32-E72D297353CC}">
+                <c16:uniqueId val="{00000001-7B61-41DF-A169-82C69EBB5154}"/>
+              </c:ext>
+            </c:extLst>
           </c:dPt>
           <c:dPt>
             <c:idx val="1"/>
@@ -516,6 +509,11 @@
               </a:solidFill>
               <a:effectLst/>
             </c:spPr>
+            <c:extLst>
+              <c:ext xmlns:c16="http://schemas.microsoft.com/office/drawing/2014/chart" uri="{C3380CC4-5D6E-409C-BE32-E72D297353CC}">
+                <c16:uniqueId val="{00000003-7B61-41DF-A169-82C69EBB5154}"/>
+              </c:ext>
+            </c:extLst>
           </c:dPt>
           <c:dPt>
             <c:idx val="2"/>
@@ -527,6 +525,11 @@
               </a:solidFill>
               <a:effectLst/>
             </c:spPr>
+            <c:extLst>
+              <c:ext xmlns:c16="http://schemas.microsoft.com/office/drawing/2014/chart" uri="{C3380CC4-5D6E-409C-BE32-E72D297353CC}">
+                <c16:uniqueId val="{00000005-7B61-41DF-A169-82C69EBB5154}"/>
+              </c:ext>
+            </c:extLst>
           </c:dPt>
           <c:dPt>
             <c:idx val="3"/>
@@ -538,6 +541,11 @@
               </a:solidFill>
               <a:effectLst/>
             </c:spPr>
+            <c:extLst>
+              <c:ext xmlns:c16="http://schemas.microsoft.com/office/drawing/2014/chart" uri="{C3380CC4-5D6E-409C-BE32-E72D297353CC}">
+                <c16:uniqueId val="{00000007-7B61-41DF-A169-82C69EBB5154}"/>
+              </c:ext>
+            </c:extLst>
           </c:dPt>
           <c:dPt>
             <c:idx val="4"/>
@@ -549,31 +557,71 @@
               </a:solidFill>
               <a:effectLst/>
             </c:spPr>
+            <c:extLst>
+              <c:ext xmlns:c16="http://schemas.microsoft.com/office/drawing/2014/chart" uri="{C3380CC4-5D6E-409C-BE32-E72D297353CC}">
+                <c16:uniqueId val="{00000009-7B61-41DF-A169-82C69EBB5154}"/>
+              </c:ext>
+            </c:extLst>
           </c:dPt>
+          <c:dLbls>
+            <c:numFmt formatCode="#,##0" sourceLinked="0"/>
+            <c:spPr>
+              <a:noFill/>
+              <a:ln>
+                <a:noFill/>
+              </a:ln>
+              <a:effectLst/>
+            </c:spPr>
+            <c:txPr>
+              <a:bodyPr/>
+              <a:lstStyle/>
+              <a:p>
+                <a:pPr>
+                  <a:defRPr sz="1200" b="0" i="0" u="none" strike="noStrike">
+                    <a:solidFill>
+                      <a:srgbClr val="000000"/>
+                    </a:solidFill>
+                    <a:latin typeface="Arial"/>
+                  </a:defRPr>
+                </a:pPr>
+                <a:endParaRPr lang="es-CO"/>
+              </a:p>
+            </c:txPr>
+            <c:showLegendKey val="0"/>
+            <c:showVal val="1"/>
+            <c:showCatName val="0"/>
+            <c:showSerName val="0"/>
+            <c:showPercent val="0"/>
+            <c:showBubbleSize val="0"/>
+            <c:showLeaderLines val="0"/>
+            <c:extLst>
+              <c:ext xmlns:c15="http://schemas.microsoft.com/office/drawing/2012/chart" uri="{CE6537A1-D6FC-4f65-9D91-7224C49458BB}">
+                <c15:showLeaderLines val="0"/>
+              </c:ext>
+            </c:extLst>
+          </c:dLbls>
           <c:cat>
-            <c:multiLvlStrRef>
+            <c:strRef>
               <c:f>Sheet1!$A$2:$A$6</c:f>
-              <c:multiLvlStrCache>
+              <c:strCache>
                 <c:ptCount val="5"/>
-                <c:lvl>
-                  <c:pt idx="0">
-                    <c:v>Open Source básico</c:v>
-                  </c:pt>
-                  <c:pt idx="1">
-                    <c:v>SaaS / Startups</c:v>
-                  </c:pt>
-                  <c:pt idx="2">
-                    <c:v>Fintech / Banking</c:v>
-                  </c:pt>
-                  <c:pt idx="3">
-                    <c:v>Sistemas críticos</c:v>
-                  </c:pt>
-                  <c:pt idx="4">
-                    <c:v>Industria aeroespacial</c:v>
-                  </c:pt>
-                </c:lvl>
-              </c:multiLvlStrCache>
-            </c:multiLvlStrRef>
+                <c:pt idx="0">
+                  <c:v>Open Source básico</c:v>
+                </c:pt>
+                <c:pt idx="1">
+                  <c:v>SaaS / Startups</c:v>
+                </c:pt>
+                <c:pt idx="2">
+                  <c:v>Fintech / Banking</c:v>
+                </c:pt>
+                <c:pt idx="3">
+                  <c:v>Sistemas críticos</c:v>
+                </c:pt>
+                <c:pt idx="4">
+                  <c:v>Industria aeroespacial</c:v>
+                </c:pt>
+              </c:strCache>
+            </c:strRef>
           </c:cat>
           <c:val>
             <c:numRef>
@@ -599,36 +647,23 @@
               </c:numCache>
             </c:numRef>
           </c:val>
+          <c:extLst>
+            <c:ext xmlns:c16="http://schemas.microsoft.com/office/drawing/2014/chart" uri="{C3380CC4-5D6E-409C-BE32-E72D297353CC}">
+              <c16:uniqueId val="{0000000A-7B61-41DF-A169-82C69EBB5154}"/>
+            </c:ext>
+          </c:extLst>
         </c:ser>
         <c:dLbls>
-          <c:numFmt formatCode="#,##0" sourceLinked="0"/>
-          <c:txPr>
-            <a:bodyPr/>
-            <a:lstStyle/>
-            <a:p>
-              <a:pPr>
-                <a:defRPr b="0" i="0" strike="noStrike" sz="1200" u="none">
-                  <a:solidFill>
-                    <a:srgbClr val="000000"/>
-                  </a:solidFill>
-                  <a:latin typeface="Arial"/>
-                </a:defRPr>
-              </a:pPr>
-            </a:p>
-          </c:txPr>
           <c:showLegendKey val="0"/>
           <c:showVal val="1"/>
           <c:showCatName val="0"/>
           <c:showSerName val="0"/>
           <c:showPercent val="0"/>
           <c:showBubbleSize val="0"/>
-          <c:showLeaderLines val="0"/>
         </c:dLbls>
         <c:gapWidth val="150"/>
-        <c:overlap val="0"/>
         <c:axId val="2094734554"/>
         <c:axId val="2094734552"/>
-        <c:axId val="2094734556"/>
       </c:barChart>
       <c:catAx>
         <c:axId val="2094734554"/>
@@ -669,6 +704,7 @@
         <c:crosses val="autoZero"/>
         <c:auto val="1"/>
         <c:lblAlgn val="ctr"/>
+        <c:lblOffset val="100"/>
         <c:noMultiLvlLbl val="1"/>
       </c:catAx>
       <c:valAx>
@@ -735,6 +771,7 @@
     </c:legend>
     <c:plotVisOnly val="1"/>
     <c:dispBlanksAs val="span"/>
+    <c:showDLblsOverMax val="1"/>
   </c:chart>
   <c:spPr>
     <a:solidFill>
@@ -773,234 +810,10 @@
           <a:chExt cx="0" cy="0"/>
         </a:xfrm>
       </p:grpSpPr>
-      <p:sp>
-        <p:nvSpPr>
-          <p:cNvPr id="2" name="Header Placeholder 1"/>
-          <p:cNvSpPr>
-            <a:spLocks noGrp="1"/>
-          </p:cNvSpPr>
-          <p:nvPr>
-            <p:ph type="hdr" sz="quarter"/>
-          </p:nvPr>
-        </p:nvSpPr>
-        <p:spPr>
-          <a:xfrm>
-            <a:off x="0" y="0"/>
-            <a:ext cx="2971800" cy="458788"/>
-          </a:xfrm>
-          <a:prstGeom prst="rect">
-            <a:avLst/>
-          </a:prstGeom>
-        </p:spPr>
-        <p:txBody>
-          <a:bodyPr vert="horz" lIns="91440" tIns="45720" rIns="91440" bIns="45720" rtlCol="0"/>
-          <a:lstStyle>
-            <a:lvl1pPr algn="l">
-              <a:defRPr sz="1200"/>
-            </a:lvl1pPr>
-          </a:lstStyle>
-          <a:p>
-            <a:endParaRPr lang="en-US"/>
-          </a:p>
-        </p:txBody>
-      </p:sp>
-      <p:sp>
-        <p:nvSpPr>
-          <p:cNvPr id="3" name="Date Placeholder 2"/>
-          <p:cNvSpPr>
-            <a:spLocks noGrp="1"/>
-          </p:cNvSpPr>
-          <p:nvPr>
-            <p:ph type="dt" idx="1"/>
-          </p:nvPr>
-        </p:nvSpPr>
-        <p:spPr>
-          <a:xfrm>
-            <a:off x="3884613" y="0"/>
-            <a:ext cx="2971800" cy="458788"/>
-          </a:xfrm>
-          <a:prstGeom prst="rect">
-            <a:avLst/>
-          </a:prstGeom>
-        </p:spPr>
-        <p:txBody>
-          <a:bodyPr vert="horz" lIns="91440" tIns="45720" rIns="91440" bIns="45720" rtlCol="0"/>
-          <a:lstStyle>
-            <a:lvl1pPr algn="r">
-              <a:defRPr sz="1200"/>
-            </a:lvl1pPr>
-          </a:lstStyle>
-          <a:p>
-            <a:fld id="{5282F153-3F37-0F45-9E97-73ACFA13230C}" type="datetimeFigureOut">
-              <a:rPr lang="en-US"/>
-              <a:t>7/23/19</a:t>
-            </a:fld>
-            <a:endParaRPr lang="en-US"/>
-          </a:p>
-        </p:txBody>
-      </p:sp>
-      <p:sp>
-        <p:nvSpPr>
-          <p:cNvPr id="4" name="Slide Image Placeholder 3"/>
-          <p:cNvSpPr>
-            <a:spLocks noGrp="1" noRot="1" noChangeAspect="1"/>
-          </p:cNvSpPr>
-          <p:nvPr>
-            <p:ph type="sldImg" idx="2"/>
-          </p:nvPr>
-        </p:nvSpPr>
-        <p:spPr>
-          <a:xfrm>
-            <a:off x="685800" y="1143000"/>
-            <a:ext cx="5486400" cy="3086100"/>
-          </a:xfrm>
-          <a:prstGeom prst="rect">
-            <a:avLst/>
-          </a:prstGeom>
-          <a:noFill/>
-          <a:ln w="12700">
-            <a:solidFill>
-              <a:prstClr val="black"/>
-            </a:solidFill>
-          </a:ln>
-        </p:spPr>
-        <p:txBody>
-          <a:bodyPr vert="horz" lIns="91440" tIns="45720" rIns="91440" bIns="45720" rtlCol="0" anchor="ctr"/>
-          <a:lstStyle/>
-          <a:p>
-            <a:endParaRPr lang="en-US"/>
-          </a:p>
-        </p:txBody>
-      </p:sp>
-      <p:sp>
-        <p:nvSpPr>
-          <p:cNvPr id="5" name="Notes Placeholder 4"/>
-          <p:cNvSpPr>
-            <a:spLocks noGrp="1"/>
-          </p:cNvSpPr>
-          <p:nvPr>
-            <p:ph type="body" sz="quarter" idx="3"/>
-          </p:nvPr>
-        </p:nvSpPr>
-        <p:spPr>
-          <a:xfrm>
-            <a:off x="685800" y="4400550"/>
-            <a:ext cx="5486400" cy="3600450"/>
-          </a:xfrm>
-          <a:prstGeom prst="rect">
-            <a:avLst/>
-          </a:prstGeom>
-        </p:spPr>
-        <p:txBody>
-          <a:bodyPr vert="horz" lIns="91440" tIns="45720" rIns="91440" bIns="45720" rtlCol="0"/>
-          <a:lstStyle/>
-          <a:p>
-            <a:pPr lvl="0"/>
-            <a:r>
-              <a:rPr lang="en-US"/>
-              <a:t>Click to edit Master text styles</a:t>
-            </a:r>
-          </a:p>
-          <a:p>
-            <a:pPr lvl="1"/>
-            <a:r>
-              <a:rPr lang="en-US"/>
-              <a:t>Second level</a:t>
-            </a:r>
-          </a:p>
-          <a:p>
-            <a:pPr lvl="2"/>
-            <a:r>
-              <a:rPr lang="en-US"/>
-              <a:t>Third level</a:t>
-            </a:r>
-          </a:p>
-          <a:p>
-            <a:pPr lvl="3"/>
-            <a:r>
-              <a:rPr lang="en-US"/>
-              <a:t>Fourth level</a:t>
-            </a:r>
-          </a:p>
-          <a:p>
-            <a:pPr lvl="4"/>
-            <a:r>
-              <a:rPr lang="en-US"/>
-              <a:t>Fifth level</a:t>
-            </a:r>
-          </a:p>
-        </p:txBody>
-      </p:sp>
-      <p:sp>
-        <p:nvSpPr>
-          <p:cNvPr id="6" name="Footer Placeholder 5"/>
-          <p:cNvSpPr>
-            <a:spLocks noGrp="1"/>
-          </p:cNvSpPr>
-          <p:nvPr>
-            <p:ph type="ftr" sz="quarter" idx="4"/>
-          </p:nvPr>
-        </p:nvSpPr>
-        <p:spPr>
-          <a:xfrm>
-            <a:off x="0" y="8685213"/>
-            <a:ext cx="2971800" cy="458787"/>
-          </a:xfrm>
-          <a:prstGeom prst="rect">
-            <a:avLst/>
-          </a:prstGeom>
-        </p:spPr>
-        <p:txBody>
-          <a:bodyPr vert="horz" lIns="91440" tIns="45720" rIns="91440" bIns="45720" rtlCol="0" anchor="b"/>
-          <a:lstStyle>
-            <a:lvl1pPr algn="l">
-              <a:defRPr sz="1200"/>
-            </a:lvl1pPr>
-          </a:lstStyle>
-          <a:p>
-            <a:endParaRPr lang="en-US"/>
-          </a:p>
-        </p:txBody>
-      </p:sp>
-      <p:sp>
-        <p:nvSpPr>
-          <p:cNvPr id="7" name="Slide Number Placeholder 6"/>
-          <p:cNvSpPr>
-            <a:spLocks noGrp="1"/>
-          </p:cNvSpPr>
-          <p:nvPr>
-            <p:ph type="sldNum" sz="quarter" idx="5"/>
-          </p:nvPr>
-        </p:nvSpPr>
-        <p:spPr>
-          <a:xfrm>
-            <a:off x="3884613" y="8685213"/>
-            <a:ext cx="2971800" cy="458787"/>
-          </a:xfrm>
-          <a:prstGeom prst="rect">
-            <a:avLst/>
-          </a:prstGeom>
-        </p:spPr>
-        <p:txBody>
-          <a:bodyPr vert="horz" lIns="91440" tIns="45720" rIns="91440" bIns="45720" rtlCol="0" anchor="b"/>
-          <a:lstStyle>
-            <a:lvl1pPr algn="r">
-              <a:defRPr sz="1200"/>
-            </a:lvl1pPr>
-          </a:lstStyle>
-          <a:p>
-            <a:fld id="{CE5E9CC1-C706-0F49-92D6-E571CC5EEA8F}" type="slidenum">
-              <a:rPr lang="en-US"/>
-              <a:t>‹#›</a:t>
-            </a:fld>
-            <a:endParaRPr lang="en-US"/>
-          </a:p>
-        </p:txBody>
-      </p:sp>
     </p:spTree>
     <p:extLst>
       <p:ext uri="{BB962C8B-B14F-4D97-AF65-F5344CB8AC3E}">
-        <p14:creationId xmlns:p14="http://schemas.microsoft.com/office/powerpoint/2010/main" val="1024086991"/>
+        <p14:creationId xmlns:p14="http://schemas.microsoft.com/office/powerpoint/2010/main" val="3126178744"/>
       </p:ext>
     </p:extLst>
   </p:cSld>
@@ -1144,10 +957,6 @@
           <a:bodyPr/>
           <a:lstStyle/>
           <a:p>
-            <a:r>
-              <a:rPr lang="en-US" dirty="0"/>
-              <a:t/>
-            </a:r>
             <a:endParaRPr lang="en-US" dirty="0"/>
           </a:p>
         </p:txBody>
@@ -1232,10 +1041,6 @@
           <a:bodyPr/>
           <a:lstStyle/>
           <a:p>
-            <a:r>
-              <a:rPr lang="en-US" dirty="0"/>
-              <a:t/>
-            </a:r>
             <a:endParaRPr lang="en-US" dirty="0"/>
           </a:p>
         </p:txBody>
@@ -1320,10 +1125,6 @@
           <a:bodyPr/>
           <a:lstStyle/>
           <a:p>
-            <a:r>
-              <a:rPr lang="en-US" dirty="0"/>
-              <a:t/>
-            </a:r>
             <a:endParaRPr lang="en-US" dirty="0"/>
           </a:p>
         </p:txBody>
@@ -1408,10 +1209,6 @@
           <a:bodyPr/>
           <a:lstStyle/>
           <a:p>
-            <a:r>
-              <a:rPr lang="en-US" dirty="0"/>
-              <a:t/>
-            </a:r>
             <a:endParaRPr lang="en-US" dirty="0"/>
           </a:p>
         </p:txBody>
@@ -1496,10 +1293,6 @@
           <a:bodyPr/>
           <a:lstStyle/>
           <a:p>
-            <a:r>
-              <a:rPr lang="en-US" dirty="0"/>
-              <a:t/>
-            </a:r>
             <a:endParaRPr lang="en-US" dirty="0"/>
           </a:p>
         </p:txBody>
@@ -1584,10 +1377,6 @@
           <a:bodyPr/>
           <a:lstStyle/>
           <a:p>
-            <a:r>
-              <a:rPr lang="en-US" dirty="0"/>
-              <a:t/>
-            </a:r>
             <a:endParaRPr lang="en-US" dirty="0"/>
           </a:p>
         </p:txBody>
@@ -1672,10 +1461,6 @@
           <a:bodyPr/>
           <a:lstStyle/>
           <a:p>
-            <a:r>
-              <a:rPr lang="en-US" dirty="0"/>
-              <a:t/>
-            </a:r>
             <a:endParaRPr lang="en-US" dirty="0"/>
           </a:p>
         </p:txBody>
@@ -1760,10 +1545,6 @@
           <a:bodyPr/>
           <a:lstStyle/>
           <a:p>
-            <a:r>
-              <a:rPr lang="en-US" dirty="0"/>
-              <a:t/>
-            </a:r>
             <a:endParaRPr lang="en-US" dirty="0"/>
           </a:p>
         </p:txBody>
@@ -1848,10 +1629,6 @@
           <a:bodyPr/>
           <a:lstStyle/>
           <a:p>
-            <a:r>
-              <a:rPr lang="en-US" dirty="0"/>
-              <a:t/>
-            </a:r>
             <a:endParaRPr lang="en-US" dirty="0"/>
           </a:p>
         </p:txBody>
@@ -1936,10 +1713,6 @@
           <a:bodyPr/>
           <a:lstStyle/>
           <a:p>
-            <a:r>
-              <a:rPr lang="en-US" dirty="0"/>
-              <a:t/>
-            </a:r>
             <a:endParaRPr lang="en-US" dirty="0"/>
           </a:p>
         </p:txBody>
@@ -2024,10 +1797,6 @@
           <a:bodyPr/>
           <a:lstStyle/>
           <a:p>
-            <a:r>
-              <a:rPr lang="en-US" dirty="0"/>
-              <a:t/>
-            </a:r>
             <a:endParaRPr lang="en-US" dirty="0"/>
           </a:p>
         </p:txBody>
@@ -2112,10 +1881,6 @@
           <a:bodyPr/>
           <a:lstStyle/>
           <a:p>
-            <a:r>
-              <a:rPr lang="en-US" dirty="0"/>
-              <a:t/>
-            </a:r>
             <a:endParaRPr lang="en-US" dirty="0"/>
           </a:p>
         </p:txBody>
@@ -2200,10 +1965,6 @@
           <a:bodyPr/>
           <a:lstStyle/>
           <a:p>
-            <a:r>
-              <a:rPr lang="en-US" dirty="0"/>
-              <a:t/>
-            </a:r>
             <a:endParaRPr lang="en-US" dirty="0"/>
           </a:p>
         </p:txBody>
@@ -2288,10 +2049,6 @@
           <a:bodyPr/>
           <a:lstStyle/>
           <a:p>
-            <a:r>
-              <a:rPr lang="en-US" dirty="0"/>
-              <a:t/>
-            </a:r>
             <a:endParaRPr lang="en-US" dirty="0"/>
           </a:p>
         </p:txBody>
@@ -2376,10 +2133,6 @@
           <a:bodyPr/>
           <a:lstStyle/>
           <a:p>
-            <a:r>
-              <a:rPr lang="en-US" dirty="0"/>
-              <a:t/>
-            </a:r>
             <a:endParaRPr lang="en-US" dirty="0"/>
           </a:p>
         </p:txBody>
@@ -2464,10 +2217,6 @@
           <a:bodyPr/>
           <a:lstStyle/>
           <a:p>
-            <a:r>
-              <a:rPr lang="en-US" dirty="0"/>
-              <a:t/>
-            </a:r>
             <a:endParaRPr lang="en-US" dirty="0"/>
           </a:p>
         </p:txBody>
@@ -2552,10 +2301,6 @@
           <a:bodyPr/>
           <a:lstStyle/>
           <a:p>
-            <a:r>
-              <a:rPr lang="en-US" dirty="0"/>
-              <a:t/>
-            </a:r>
             <a:endParaRPr lang="en-US" dirty="0"/>
           </a:p>
         </p:txBody>
@@ -2640,10 +2385,6 @@
           <a:bodyPr/>
           <a:lstStyle/>
           <a:p>
-            <a:r>
-              <a:rPr lang="en-US" dirty="0"/>
-              <a:t/>
-            </a:r>
             <a:endParaRPr lang="en-US" dirty="0"/>
           </a:p>
         </p:txBody>
@@ -2728,10 +2469,6 @@
           <a:bodyPr/>
           <a:lstStyle/>
           <a:p>
-            <a:r>
-              <a:rPr lang="en-US" dirty="0"/>
-              <a:t/>
-            </a:r>
             <a:endParaRPr lang="en-US" dirty="0"/>
           </a:p>
         </p:txBody>
@@ -2816,10 +2553,6 @@
           <a:bodyPr/>
           <a:lstStyle/>
           <a:p>
-            <a:r>
-              <a:rPr lang="en-US" dirty="0"/>
-              <a:t/>
-            </a:r>
             <a:endParaRPr lang="en-US" dirty="0"/>
           </a:p>
         </p:txBody>
@@ -2904,10 +2637,6 @@
           <a:bodyPr/>
           <a:lstStyle/>
           <a:p>
-            <a:r>
-              <a:rPr lang="en-US" dirty="0"/>
-              <a:t/>
-            </a:r>
             <a:endParaRPr lang="en-US" dirty="0"/>
           </a:p>
         </p:txBody>
@@ -2992,10 +2721,6 @@
           <a:bodyPr/>
           <a:lstStyle/>
           <a:p>
-            <a:r>
-              <a:rPr lang="en-US" dirty="0"/>
-              <a:t/>
-            </a:r>
             <a:endParaRPr lang="en-US" dirty="0"/>
           </a:p>
         </p:txBody>
@@ -3080,10 +2805,6 @@
           <a:bodyPr/>
           <a:lstStyle/>
           <a:p>
-            <a:r>
-              <a:rPr lang="en-US" dirty="0"/>
-              <a:t/>
-            </a:r>
             <a:endParaRPr lang="en-US" dirty="0"/>
           </a:p>
         </p:txBody>
@@ -3168,10 +2889,6 @@
           <a:bodyPr/>
           <a:lstStyle/>
           <a:p>
-            <a:r>
-              <a:rPr lang="en-US" dirty="0"/>
-              <a:t/>
-            </a:r>
             <a:endParaRPr lang="en-US" dirty="0"/>
           </a:p>
         </p:txBody>
@@ -3256,10 +2973,6 @@
           <a:bodyPr/>
           <a:lstStyle/>
           <a:p>
-            <a:r>
-              <a:rPr lang="en-US" dirty="0"/>
-              <a:t/>
-            </a:r>
             <a:endParaRPr lang="en-US" dirty="0"/>
           </a:p>
         </p:txBody>
@@ -3344,10 +3057,6 @@
           <a:bodyPr/>
           <a:lstStyle/>
           <a:p>
-            <a:r>
-              <a:rPr lang="en-US" dirty="0"/>
-              <a:t/>
-            </a:r>
             <a:endParaRPr lang="en-US" dirty="0"/>
           </a:p>
         </p:txBody>
@@ -3432,10 +3141,6 @@
           <a:bodyPr/>
           <a:lstStyle/>
           <a:p>
-            <a:r>
-              <a:rPr lang="en-US" dirty="0"/>
-              <a:t/>
-            </a:r>
             <a:endParaRPr lang="en-US" dirty="0"/>
           </a:p>
         </p:txBody>
@@ -3520,10 +3225,6 @@
           <a:bodyPr/>
           <a:lstStyle/>
           <a:p>
-            <a:r>
-              <a:rPr lang="en-US" dirty="0"/>
-              <a:t/>
-            </a:r>
             <a:endParaRPr lang="en-US" dirty="0"/>
           </a:p>
         </p:txBody>
@@ -3608,10 +3309,6 @@
           <a:bodyPr/>
           <a:lstStyle/>
           <a:p>
-            <a:r>
-              <a:rPr lang="en-US" dirty="0"/>
-              <a:t/>
-            </a:r>
             <a:endParaRPr lang="en-US" dirty="0"/>
           </a:p>
         </p:txBody>
@@ -3696,10 +3393,6 @@
           <a:bodyPr/>
           <a:lstStyle/>
           <a:p>
-            <a:r>
-              <a:rPr lang="en-US" dirty="0"/>
-              <a:t/>
-            </a:r>
             <a:endParaRPr lang="en-US" dirty="0"/>
           </a:p>
         </p:txBody>
@@ -3784,10 +3477,6 @@
           <a:bodyPr/>
           <a:lstStyle/>
           <a:p>
-            <a:r>
-              <a:rPr lang="en-US" dirty="0"/>
-              <a:t/>
-            </a:r>
             <a:endParaRPr lang="en-US" dirty="0"/>
           </a:p>
         </p:txBody>
@@ -3872,10 +3561,6 @@
           <a:bodyPr/>
           <a:lstStyle/>
           <a:p>
-            <a:r>
-              <a:rPr lang="en-US" dirty="0"/>
-              <a:t/>
-            </a:r>
             <a:endParaRPr lang="en-US" dirty="0"/>
           </a:p>
         </p:txBody>
@@ -3960,10 +3645,6 @@
           <a:bodyPr/>
           <a:lstStyle/>
           <a:p>
-            <a:r>
-              <a:rPr lang="en-US" dirty="0"/>
-              <a:t/>
-            </a:r>
             <a:endParaRPr lang="en-US" dirty="0"/>
           </a:p>
         </p:txBody>
@@ -4048,10 +3729,6 @@
           <a:bodyPr/>
           <a:lstStyle/>
           <a:p>
-            <a:r>
-              <a:rPr lang="en-US" dirty="0"/>
-              <a:t/>
-            </a:r>
             <a:endParaRPr lang="en-US" dirty="0"/>
           </a:p>
         </p:txBody>
@@ -4136,10 +3813,6 @@
           <a:bodyPr/>
           <a:lstStyle/>
           <a:p>
-            <a:r>
-              <a:rPr lang="en-US" dirty="0"/>
-              <a:t/>
-            </a:r>
             <a:endParaRPr lang="en-US" dirty="0"/>
           </a:p>
         </p:txBody>
@@ -4224,10 +3897,6 @@
           <a:bodyPr/>
           <a:lstStyle/>
           <a:p>
-            <a:r>
-              <a:rPr lang="en-US" dirty="0"/>
-              <a:t/>
-            </a:r>
             <a:endParaRPr lang="en-US" dirty="0"/>
           </a:p>
         </p:txBody>
@@ -4312,10 +3981,6 @@
           <a:bodyPr/>
           <a:lstStyle/>
           <a:p>
-            <a:r>
-              <a:rPr lang="en-US" dirty="0"/>
-              <a:t/>
-            </a:r>
             <a:endParaRPr lang="en-US" dirty="0"/>
           </a:p>
         </p:txBody>
@@ -4400,10 +4065,6 @@
           <a:bodyPr/>
           <a:lstStyle/>
           <a:p>
-            <a:r>
-              <a:rPr lang="en-US" dirty="0"/>
-              <a:t/>
-            </a:r>
             <a:endParaRPr lang="en-US" dirty="0"/>
           </a:p>
         </p:txBody>
@@ -4488,10 +4149,6 @@
           <a:bodyPr/>
           <a:lstStyle/>
           <a:p>
-            <a:r>
-              <a:rPr lang="en-US" dirty="0"/>
-              <a:t/>
-            </a:r>
             <a:endParaRPr lang="en-US" dirty="0"/>
           </a:p>
         </p:txBody>
@@ -4576,10 +4233,6 @@
           <a:bodyPr/>
           <a:lstStyle/>
           <a:p>
-            <a:r>
-              <a:rPr lang="en-US" dirty="0"/>
-              <a:t/>
-            </a:r>
             <a:endParaRPr lang="en-US" dirty="0"/>
           </a:p>
         </p:txBody>
@@ -4664,10 +4317,6 @@
           <a:bodyPr/>
           <a:lstStyle/>
           <a:p>
-            <a:r>
-              <a:rPr lang="en-US" dirty="0"/>
-              <a:t/>
-            </a:r>
             <a:endParaRPr lang="en-US" dirty="0"/>
           </a:p>
         </p:txBody>
@@ -4752,10 +4401,6 @@
           <a:bodyPr/>
           <a:lstStyle/>
           <a:p>
-            <a:r>
-              <a:rPr lang="en-US" dirty="0"/>
-              <a:t/>
-            </a:r>
             <a:endParaRPr lang="en-US" dirty="0"/>
           </a:p>
         </p:txBody>
@@ -4840,10 +4485,6 @@
           <a:bodyPr/>
           <a:lstStyle/>
           <a:p>
-            <a:r>
-              <a:rPr lang="en-US" dirty="0"/>
-              <a:t/>
-            </a:r>
             <a:endParaRPr lang="en-US" dirty="0"/>
           </a:p>
         </p:txBody>
@@ -4928,10 +4569,6 @@
           <a:bodyPr/>
           <a:lstStyle/>
           <a:p>
-            <a:r>
-              <a:rPr lang="en-US" dirty="0"/>
-              <a:t/>
-            </a:r>
             <a:endParaRPr lang="en-US" dirty="0"/>
           </a:p>
         </p:txBody>
@@ -5016,10 +4653,6 @@
           <a:bodyPr/>
           <a:lstStyle/>
           <a:p>
-            <a:r>
-              <a:rPr lang="en-US" dirty="0"/>
-              <a:t/>
-            </a:r>
             <a:endParaRPr lang="en-US" dirty="0"/>
           </a:p>
         </p:txBody>
@@ -5104,10 +4737,6 @@
           <a:bodyPr/>
           <a:lstStyle/>
           <a:p>
-            <a:r>
-              <a:rPr lang="en-US" dirty="0"/>
-              <a:t/>
-            </a:r>
             <a:endParaRPr lang="en-US" dirty="0"/>
           </a:p>
         </p:txBody>
@@ -5192,10 +4821,6 @@
           <a:bodyPr/>
           <a:lstStyle/>
           <a:p>
-            <a:r>
-              <a:rPr lang="en-US" dirty="0"/>
-              <a:t/>
-            </a:r>
             <a:endParaRPr lang="en-US" dirty="0"/>
           </a:p>
         </p:txBody>
@@ -5280,10 +4905,6 @@
           <a:bodyPr/>
           <a:lstStyle/>
           <a:p>
-            <a:r>
-              <a:rPr lang="en-US" dirty="0"/>
-              <a:t/>
-            </a:r>
             <a:endParaRPr lang="en-US" dirty="0"/>
           </a:p>
         </p:txBody>
@@ -5368,10 +4989,6 @@
           <a:bodyPr/>
           <a:lstStyle/>
           <a:p>
-            <a:r>
-              <a:rPr lang="en-US" dirty="0"/>
-              <a:t/>
-            </a:r>
             <a:endParaRPr lang="en-US" dirty="0"/>
           </a:p>
         </p:txBody>
@@ -5456,10 +5073,6 @@
           <a:bodyPr/>
           <a:lstStyle/>
           <a:p>
-            <a:r>
-              <a:rPr lang="en-US" dirty="0"/>
-              <a:t/>
-            </a:r>
             <a:endParaRPr lang="en-US" dirty="0"/>
           </a:p>
         </p:txBody>
@@ -5544,10 +5157,6 @@
           <a:bodyPr/>
           <a:lstStyle/>
           <a:p>
-            <a:r>
-              <a:rPr lang="en-US" dirty="0"/>
-              <a:t/>
-            </a:r>
             <a:endParaRPr lang="en-US" dirty="0"/>
           </a:p>
         </p:txBody>
@@ -5632,10 +5241,6 @@
           <a:bodyPr/>
           <a:lstStyle/>
           <a:p>
-            <a:r>
-              <a:rPr lang="en-US" dirty="0"/>
-              <a:t/>
-            </a:r>
             <a:endParaRPr lang="en-US" dirty="0"/>
           </a:p>
         </p:txBody>
@@ -5720,10 +5325,6 @@
           <a:bodyPr/>
           <a:lstStyle/>
           <a:p>
-            <a:r>
-              <a:rPr lang="en-US" dirty="0"/>
-              <a:t/>
-            </a:r>
             <a:endParaRPr lang="en-US" dirty="0"/>
           </a:p>
         </p:txBody>
@@ -5797,6 +5398,11 @@
 <file path=ppt/slideMasters/slideMaster1.xml><?xml version="1.0" encoding="utf-8"?>
 <p:sldMaster xmlns:a="http://schemas.openxmlformats.org/drawingml/2006/main" xmlns:r="http://schemas.openxmlformats.org/officeDocument/2006/relationships" xmlns:p="http://schemas.openxmlformats.org/presentationml/2006/main">
   <p:cSld>
+    <p:bg>
+      <p:bgRef idx="1001">
+        <a:schemeClr val="bg1"/>
+      </p:bgRef>
+    </p:bg>
     <p:spTree>
       <p:nvGrpSpPr>
         <p:cNvPr id="1" name=""/>
@@ -6079,6 +5685,7 @@
         <a:solidFill>
           <a:srgbClr val="0D1B2A"/>
         </a:solidFill>
+        <a:effectLst/>
       </p:bgPr>
     </p:bg>
     <p:spTree>
@@ -6119,6 +5726,13 @@
             <a:prstDash val="solid"/>
           </a:ln>
         </p:spPr>
+        <p:txBody>
+          <a:bodyPr/>
+          <a:lstStyle/>
+          <a:p>
+            <a:endParaRPr lang="es-CO"/>
+          </a:p>
+        </p:txBody>
       </p:sp>
       <p:sp>
         <p:nvSpPr>
@@ -6144,6 +5758,13 @@
             <a:prstDash val="solid"/>
           </a:ln>
         </p:spPr>
+        <p:txBody>
+          <a:bodyPr/>
+          <a:lstStyle/>
+          <a:p>
+            <a:endParaRPr lang="es-CO"/>
+          </a:p>
+        </p:txBody>
       </p:sp>
       <p:sp>
         <p:nvSpPr>
@@ -6166,7 +5787,7 @@
           <a:bodyPr wrap="square" lIns="0" tIns="0" rIns="0" bIns="0" rtlCol="0" anchor="ctr"/>
           <a:lstStyle/>
           <a:p>
-            <a:pPr algn="ctr" indent="0" marL="0">
+            <a:pPr marL="0" indent="0" algn="ctr">
               <a:buNone/>
             </a:pPr>
             <a:r>
@@ -6205,7 +5826,7 @@
           <a:bodyPr wrap="square" rtlCol="0" anchor="ctr"/>
           <a:lstStyle/>
           <a:p>
-            <a:pPr algn="l" indent="0" marL="0">
+            <a:pPr marL="0" indent="0" algn="l">
               <a:buNone/>
             </a:pPr>
             <a:r>
@@ -6244,7 +5865,7 @@
           <a:bodyPr wrap="square" rtlCol="0" anchor="ctr"/>
           <a:lstStyle/>
           <a:p>
-            <a:pPr algn="l" indent="0" marL="0">
+            <a:pPr marL="0" indent="0" algn="l">
               <a:buNone/>
             </a:pPr>
             <a:r>
@@ -6283,7 +5904,7 @@
           <a:bodyPr wrap="square" rtlCol="0" anchor="ctr"/>
           <a:lstStyle/>
           <a:p>
-            <a:pPr algn="l" indent="0" marL="0">
+            <a:pPr marL="0" indent="0" algn="l">
               <a:buNone/>
             </a:pPr>
             <a:r>
@@ -6325,6 +5946,13 @@
             <a:prstDash val="solid"/>
           </a:ln>
         </p:spPr>
+        <p:txBody>
+          <a:bodyPr/>
+          <a:lstStyle/>
+          <a:p>
+            <a:endParaRPr lang="es-CO"/>
+          </a:p>
+        </p:txBody>
       </p:sp>
     </p:spTree>
   </p:cSld>
@@ -6342,6 +5970,7 @@
         <a:solidFill>
           <a:srgbClr val="FFFFFF"/>
         </a:solidFill>
+        <a:effectLst/>
       </p:bgPr>
     </p:bg>
     <p:spTree>
@@ -6382,6 +6011,13 @@
             <a:prstDash val="solid"/>
           </a:ln>
         </p:spPr>
+        <p:txBody>
+          <a:bodyPr/>
+          <a:lstStyle/>
+          <a:p>
+            <a:endParaRPr lang="es-CO"/>
+          </a:p>
+        </p:txBody>
       </p:sp>
       <p:sp>
         <p:nvSpPr>
@@ -6404,7 +6040,7 @@
           <a:bodyPr wrap="square" rtlCol="0" anchor="ctr"/>
           <a:lstStyle/>
           <a:p>
-            <a:pPr indent="0" marL="0">
+            <a:pPr marL="0" indent="0">
               <a:buNone/>
             </a:pPr>
             <a:r>
@@ -6443,7 +6079,7 @@
           <a:bodyPr wrap="square" rtlCol="0" anchor="ctr"/>
           <a:lstStyle/>
           <a:p>
-            <a:pPr indent="0" marL="0">
+            <a:pPr marL="0" indent="0">
               <a:buNone/>
             </a:pPr>
             <a:r>
@@ -6485,6 +6121,13 @@
             <a:prstDash val="solid"/>
           </a:ln>
         </p:spPr>
+        <p:txBody>
+          <a:bodyPr/>
+          <a:lstStyle/>
+          <a:p>
+            <a:endParaRPr lang="es-CO"/>
+          </a:p>
+        </p:txBody>
       </p:sp>
       <p:sp>
         <p:nvSpPr>
@@ -6507,7 +6150,7 @@
           <a:bodyPr wrap="square" lIns="0" tIns="0" rIns="0" bIns="0" rtlCol="0" anchor="ctr"/>
           <a:lstStyle/>
           <a:p>
-            <a:pPr algn="ctr" indent="0" marL="0">
+            <a:pPr marL="0" indent="0" algn="ctr">
               <a:buNone/>
             </a:pPr>
             <a:r>
@@ -6546,7 +6189,7 @@
           <a:bodyPr wrap="square" rtlCol="0" anchor="ctr"/>
           <a:lstStyle/>
           <a:p>
-            <a:pPr indent="0" marL="0">
+            <a:pPr marL="0" indent="0">
               <a:buNone/>
             </a:pPr>
             <a:r>
@@ -6736,6 +6379,13 @@
             <a:prstDash val="solid"/>
           </a:ln>
         </p:spPr>
+        <p:txBody>
+          <a:bodyPr/>
+          <a:lstStyle/>
+          <a:p>
+            <a:endParaRPr lang="es-CO"/>
+          </a:p>
+        </p:txBody>
       </p:sp>
       <p:sp>
         <p:nvSpPr>
@@ -6758,7 +6408,7 @@
           <a:bodyPr wrap="square" rtlCol="0" anchor="ctr"/>
           <a:lstStyle/>
           <a:p>
-            <a:pPr indent="0" marL="0">
+            <a:pPr marL="0" indent="0">
               <a:buNone/>
             </a:pPr>
             <a:r>
@@ -6797,7 +6447,7 @@
           <a:bodyPr wrap="square" rtlCol="0" anchor="ctr"/>
           <a:lstStyle/>
           <a:p>
-            <a:pPr algn="r" indent="0" marL="0">
+            <a:pPr marL="0" indent="0" algn="r">
               <a:buNone/>
             </a:pPr>
             <a:r>
@@ -6831,6 +6481,7 @@
         <a:solidFill>
           <a:srgbClr val="1A237E"/>
         </a:solidFill>
+        <a:effectLst/>
       </p:bgPr>
     </p:bg>
     <p:spTree>
@@ -6871,6 +6522,13 @@
             <a:prstDash val="solid"/>
           </a:ln>
         </p:spPr>
+        <p:txBody>
+          <a:bodyPr/>
+          <a:lstStyle/>
+          <a:p>
+            <a:endParaRPr lang="es-CO"/>
+          </a:p>
+        </p:txBody>
       </p:sp>
       <p:sp>
         <p:nvSpPr>
@@ -6893,7 +6551,7 @@
           <a:bodyPr wrap="square" rtlCol="0" anchor="ctr"/>
           <a:lstStyle/>
           <a:p>
-            <a:pPr indent="0" marL="0">
+            <a:pPr marL="0" indent="0">
               <a:buNone/>
             </a:pPr>
             <a:r>
@@ -6935,6 +6593,13 @@
             <a:prstDash val="solid"/>
           </a:ln>
         </p:spPr>
+        <p:txBody>
+          <a:bodyPr/>
+          <a:lstStyle/>
+          <a:p>
+            <a:endParaRPr lang="es-CO"/>
+          </a:p>
+        </p:txBody>
       </p:sp>
       <p:sp>
         <p:nvSpPr>
@@ -6960,6 +6625,13 @@
             <a:prstDash val="solid"/>
           </a:ln>
         </p:spPr>
+        <p:txBody>
+          <a:bodyPr/>
+          <a:lstStyle/>
+          <a:p>
+            <a:endParaRPr lang="es-CO"/>
+          </a:p>
+        </p:txBody>
       </p:sp>
       <p:sp>
         <p:nvSpPr>
@@ -6982,7 +6654,7 @@
           <a:bodyPr wrap="square" lIns="0" tIns="0" rIns="0" bIns="0" rtlCol="0" anchor="ctr"/>
           <a:lstStyle/>
           <a:p>
-            <a:pPr algn="ctr" indent="0" marL="0">
+            <a:pPr marL="0" indent="0" algn="ctr">
               <a:buNone/>
             </a:pPr>
             <a:r>
@@ -7021,7 +6693,7 @@
           <a:bodyPr wrap="square" rtlCol="0" anchor="ctr"/>
           <a:lstStyle/>
           <a:p>
-            <a:pPr indent="0" marL="0">
+            <a:pPr marL="0" indent="0">
               <a:buNone/>
             </a:pPr>
             <a:r>
@@ -7063,6 +6735,13 @@
             <a:prstDash val="solid"/>
           </a:ln>
         </p:spPr>
+        <p:txBody>
+          <a:bodyPr/>
+          <a:lstStyle/>
+          <a:p>
+            <a:endParaRPr lang="es-CO"/>
+          </a:p>
+        </p:txBody>
       </p:sp>
       <p:sp>
         <p:nvSpPr>
@@ -7085,7 +6764,7 @@
           <a:bodyPr wrap="square" lIns="0" tIns="0" rIns="0" bIns="0" rtlCol="0" anchor="ctr"/>
           <a:lstStyle/>
           <a:p>
-            <a:pPr algn="ctr" indent="0" marL="0">
+            <a:pPr marL="0" indent="0" algn="ctr">
               <a:buNone/>
             </a:pPr>
             <a:r>
@@ -7124,7 +6803,7 @@
           <a:bodyPr wrap="square" rtlCol="0" anchor="ctr"/>
           <a:lstStyle/>
           <a:p>
-            <a:pPr indent="0" marL="0">
+            <a:pPr marL="0" indent="0">
               <a:buNone/>
             </a:pPr>
             <a:r>
@@ -7166,6 +6845,13 @@
             <a:prstDash val="solid"/>
           </a:ln>
         </p:spPr>
+        <p:txBody>
+          <a:bodyPr/>
+          <a:lstStyle/>
+          <a:p>
+            <a:endParaRPr lang="es-CO"/>
+          </a:p>
+        </p:txBody>
       </p:sp>
       <p:sp>
         <p:nvSpPr>
@@ -7188,7 +6874,7 @@
           <a:bodyPr wrap="square" lIns="0" tIns="0" rIns="0" bIns="0" rtlCol="0" anchor="ctr"/>
           <a:lstStyle/>
           <a:p>
-            <a:pPr algn="ctr" indent="0" marL="0">
+            <a:pPr marL="0" indent="0" algn="ctr">
               <a:buNone/>
             </a:pPr>
             <a:r>
@@ -7227,7 +6913,7 @@
           <a:bodyPr wrap="square" rtlCol="0" anchor="ctr"/>
           <a:lstStyle/>
           <a:p>
-            <a:pPr indent="0" marL="0">
+            <a:pPr marL="0" indent="0">
               <a:buNone/>
             </a:pPr>
             <a:r>
@@ -7269,6 +6955,13 @@
             <a:prstDash val="solid"/>
           </a:ln>
         </p:spPr>
+        <p:txBody>
+          <a:bodyPr/>
+          <a:lstStyle/>
+          <a:p>
+            <a:endParaRPr lang="es-CO"/>
+          </a:p>
+        </p:txBody>
       </p:sp>
       <p:sp>
         <p:nvSpPr>
@@ -7291,7 +6984,7 @@
           <a:bodyPr wrap="square" lIns="0" tIns="0" rIns="0" bIns="0" rtlCol="0" anchor="ctr"/>
           <a:lstStyle/>
           <a:p>
-            <a:pPr algn="ctr" indent="0" marL="0">
+            <a:pPr marL="0" indent="0" algn="ctr">
               <a:buNone/>
             </a:pPr>
             <a:r>
@@ -7330,7 +7023,7 @@
           <a:bodyPr wrap="square" rtlCol="0" anchor="ctr"/>
           <a:lstStyle/>
           <a:p>
-            <a:pPr indent="0" marL="0">
+            <a:pPr marL="0" indent="0">
               <a:buNone/>
             </a:pPr>
             <a:r>
@@ -7369,7 +7062,7 @@
           <a:bodyPr wrap="square" rtlCol="0" anchor="ctr"/>
           <a:lstStyle/>
           <a:p>
-            <a:pPr algn="r" indent="0" marL="0">
+            <a:pPr marL="0" indent="0" algn="r">
               <a:buNone/>
             </a:pPr>
             <a:r>
@@ -7403,6 +7096,7 @@
         <a:solidFill>
           <a:srgbClr val="0D1B2A"/>
         </a:solidFill>
+        <a:effectLst/>
       </p:bgPr>
     </p:bg>
     <p:spTree>
@@ -7443,6 +7137,13 @@
             <a:prstDash val="solid"/>
           </a:ln>
         </p:spPr>
+        <p:txBody>
+          <a:bodyPr/>
+          <a:lstStyle/>
+          <a:p>
+            <a:endParaRPr lang="es-CO"/>
+          </a:p>
+        </p:txBody>
       </p:sp>
       <p:sp>
         <p:nvSpPr>
@@ -7465,7 +7166,7 @@
           <a:bodyPr wrap="square" rtlCol="0" anchor="ctr"/>
           <a:lstStyle/>
           <a:p>
-            <a:pPr indent="0" marL="0">
+            <a:pPr marL="0" indent="0">
               <a:buNone/>
             </a:pPr>
             <a:r>
@@ -7507,6 +7208,13 @@
             <a:prstDash val="solid"/>
           </a:ln>
         </p:spPr>
+        <p:txBody>
+          <a:bodyPr/>
+          <a:lstStyle/>
+          <a:p>
+            <a:endParaRPr lang="es-CO"/>
+          </a:p>
+        </p:txBody>
       </p:sp>
       <p:sp>
         <p:nvSpPr>
@@ -7532,6 +7240,13 @@
             <a:prstDash val="solid"/>
           </a:ln>
         </p:spPr>
+        <p:txBody>
+          <a:bodyPr/>
+          <a:lstStyle/>
+          <a:p>
+            <a:endParaRPr lang="es-CO"/>
+          </a:p>
+        </p:txBody>
       </p:sp>
       <p:sp>
         <p:nvSpPr>
@@ -7554,7 +7269,7 @@
           <a:bodyPr wrap="square" rtlCol="0" anchor="ctr"/>
           <a:lstStyle/>
           <a:p>
-            <a:pPr indent="0" marL="0">
+            <a:pPr marL="0" indent="0">
               <a:buNone/>
             </a:pPr>
             <a:r>
@@ -7596,6 +7311,13 @@
             <a:prstDash val="solid"/>
           </a:ln>
         </p:spPr>
+        <p:txBody>
+          <a:bodyPr/>
+          <a:lstStyle/>
+          <a:p>
+            <a:endParaRPr lang="es-CO"/>
+          </a:p>
+        </p:txBody>
       </p:sp>
       <p:sp>
         <p:nvSpPr>
@@ -7621,6 +7343,13 @@
             <a:prstDash val="solid"/>
           </a:ln>
         </p:spPr>
+        <p:txBody>
+          <a:bodyPr/>
+          <a:lstStyle/>
+          <a:p>
+            <a:endParaRPr lang="es-CO"/>
+          </a:p>
+        </p:txBody>
       </p:sp>
       <p:sp>
         <p:nvSpPr>
@@ -7643,7 +7372,7 @@
           <a:bodyPr wrap="square" rtlCol="0" anchor="ctr"/>
           <a:lstStyle/>
           <a:p>
-            <a:pPr indent="0" marL="0">
+            <a:pPr marL="0" indent="0">
               <a:buNone/>
             </a:pPr>
             <a:r>
@@ -7685,6 +7414,13 @@
             <a:prstDash val="solid"/>
           </a:ln>
         </p:spPr>
+        <p:txBody>
+          <a:bodyPr/>
+          <a:lstStyle/>
+          <a:p>
+            <a:endParaRPr lang="es-CO"/>
+          </a:p>
+        </p:txBody>
       </p:sp>
       <p:sp>
         <p:nvSpPr>
@@ -7710,6 +7446,13 @@
             <a:prstDash val="solid"/>
           </a:ln>
         </p:spPr>
+        <p:txBody>
+          <a:bodyPr/>
+          <a:lstStyle/>
+          <a:p>
+            <a:endParaRPr lang="es-CO"/>
+          </a:p>
+        </p:txBody>
       </p:sp>
       <p:sp>
         <p:nvSpPr>
@@ -7732,7 +7475,7 @@
           <a:bodyPr wrap="square" rtlCol="0" anchor="ctr"/>
           <a:lstStyle/>
           <a:p>
-            <a:pPr indent="0" marL="0">
+            <a:pPr marL="0" indent="0">
               <a:buNone/>
             </a:pPr>
             <a:r>
@@ -7774,6 +7517,13 @@
             <a:prstDash val="solid"/>
           </a:ln>
         </p:spPr>
+        <p:txBody>
+          <a:bodyPr/>
+          <a:lstStyle/>
+          <a:p>
+            <a:endParaRPr lang="es-CO"/>
+          </a:p>
+        </p:txBody>
       </p:sp>
       <p:sp>
         <p:nvSpPr>
@@ -7799,6 +7549,13 @@
             <a:prstDash val="solid"/>
           </a:ln>
         </p:spPr>
+        <p:txBody>
+          <a:bodyPr/>
+          <a:lstStyle/>
+          <a:p>
+            <a:endParaRPr lang="es-CO"/>
+          </a:p>
+        </p:txBody>
       </p:sp>
       <p:sp>
         <p:nvSpPr>
@@ -7821,7 +7578,7 @@
           <a:bodyPr wrap="square" rtlCol="0" anchor="ctr"/>
           <a:lstStyle/>
           <a:p>
-            <a:pPr indent="0" marL="0">
+            <a:pPr marL="0" indent="0">
               <a:buNone/>
             </a:pPr>
             <a:r>
@@ -7863,6 +7620,13 @@
             <a:prstDash val="solid"/>
           </a:ln>
         </p:spPr>
+        <p:txBody>
+          <a:bodyPr/>
+          <a:lstStyle/>
+          <a:p>
+            <a:endParaRPr lang="es-CO"/>
+          </a:p>
+        </p:txBody>
       </p:sp>
       <p:sp>
         <p:nvSpPr>
@@ -7888,6 +7652,13 @@
             <a:prstDash val="solid"/>
           </a:ln>
         </p:spPr>
+        <p:txBody>
+          <a:bodyPr/>
+          <a:lstStyle/>
+          <a:p>
+            <a:endParaRPr lang="es-CO"/>
+          </a:p>
+        </p:txBody>
       </p:sp>
       <p:sp>
         <p:nvSpPr>
@@ -7910,7 +7681,7 @@
           <a:bodyPr wrap="square" rtlCol="0" anchor="ctr"/>
           <a:lstStyle/>
           <a:p>
-            <a:pPr indent="0" marL="0">
+            <a:pPr marL="0" indent="0">
               <a:buNone/>
             </a:pPr>
             <a:r>
@@ -7952,6 +7723,13 @@
             <a:prstDash val="solid"/>
           </a:ln>
         </p:spPr>
+        <p:txBody>
+          <a:bodyPr/>
+          <a:lstStyle/>
+          <a:p>
+            <a:endParaRPr lang="es-CO"/>
+          </a:p>
+        </p:txBody>
       </p:sp>
       <p:sp>
         <p:nvSpPr>
@@ -7977,6 +7755,13 @@
             <a:prstDash val="solid"/>
           </a:ln>
         </p:spPr>
+        <p:txBody>
+          <a:bodyPr/>
+          <a:lstStyle/>
+          <a:p>
+            <a:endParaRPr lang="es-CO"/>
+          </a:p>
+        </p:txBody>
       </p:sp>
       <p:sp>
         <p:nvSpPr>
@@ -7999,7 +7784,7 @@
           <a:bodyPr wrap="square" rtlCol="0" anchor="ctr"/>
           <a:lstStyle/>
           <a:p>
-            <a:pPr indent="0" marL="0">
+            <a:pPr marL="0" indent="0">
               <a:buNone/>
             </a:pPr>
             <a:r>
@@ -8038,7 +7823,7 @@
           <a:bodyPr wrap="square" rtlCol="0" anchor="ctr"/>
           <a:lstStyle/>
           <a:p>
-            <a:pPr algn="r" indent="0" marL="0">
+            <a:pPr marL="0" indent="0" algn="r">
               <a:buNone/>
             </a:pPr>
             <a:r>
@@ -8072,6 +7857,7 @@
         <a:solidFill>
           <a:srgbClr val="0D1B2A"/>
         </a:solidFill>
+        <a:effectLst/>
       </p:bgPr>
     </p:bg>
     <p:spTree>
@@ -8112,6 +7898,13 @@
             <a:prstDash val="solid"/>
           </a:ln>
         </p:spPr>
+        <p:txBody>
+          <a:bodyPr/>
+          <a:lstStyle/>
+          <a:p>
+            <a:endParaRPr lang="es-CO"/>
+          </a:p>
+        </p:txBody>
       </p:sp>
       <p:sp>
         <p:nvSpPr>
@@ -8137,6 +7930,13 @@
             <a:prstDash val="solid"/>
           </a:ln>
         </p:spPr>
+        <p:txBody>
+          <a:bodyPr/>
+          <a:lstStyle/>
+          <a:p>
+            <a:endParaRPr lang="es-CO"/>
+          </a:p>
+        </p:txBody>
       </p:sp>
       <p:sp>
         <p:nvSpPr>
@@ -8159,7 +7959,7 @@
           <a:bodyPr wrap="square" lIns="0" tIns="0" rIns="0" bIns="0" rtlCol="0" anchor="ctr"/>
           <a:lstStyle/>
           <a:p>
-            <a:pPr algn="ctr" indent="0" marL="0">
+            <a:pPr marL="0" indent="0" algn="ctr">
               <a:buNone/>
             </a:pPr>
             <a:r>
@@ -8198,7 +7998,7 @@
           <a:bodyPr wrap="square" rtlCol="0" anchor="ctr"/>
           <a:lstStyle/>
           <a:p>
-            <a:pPr algn="l" indent="0" marL="0">
+            <a:pPr marL="0" indent="0" algn="l">
               <a:buNone/>
             </a:pPr>
             <a:r>
@@ -8237,7 +8037,7 @@
           <a:bodyPr wrap="square" rtlCol="0" anchor="ctr"/>
           <a:lstStyle/>
           <a:p>
-            <a:pPr algn="l" indent="0" marL="0">
+            <a:pPr marL="0" indent="0" algn="l">
               <a:buNone/>
             </a:pPr>
             <a:r>
@@ -8276,7 +8076,7 @@
           <a:bodyPr wrap="square" rtlCol="0" anchor="ctr"/>
           <a:lstStyle/>
           <a:p>
-            <a:pPr algn="l" indent="0" marL="0">
+            <a:pPr marL="0" indent="0" algn="l">
               <a:buNone/>
             </a:pPr>
             <a:r>
@@ -8318,6 +8118,13 @@
             <a:prstDash val="solid"/>
           </a:ln>
         </p:spPr>
+        <p:txBody>
+          <a:bodyPr/>
+          <a:lstStyle/>
+          <a:p>
+            <a:endParaRPr lang="es-CO"/>
+          </a:p>
+        </p:txBody>
       </p:sp>
     </p:spTree>
   </p:cSld>
@@ -8335,6 +8142,7 @@
         <a:solidFill>
           <a:srgbClr val="FFFFFF"/>
         </a:solidFill>
+        <a:effectLst/>
       </p:bgPr>
     </p:bg>
     <p:spTree>
@@ -8375,6 +8183,13 @@
             <a:prstDash val="solid"/>
           </a:ln>
         </p:spPr>
+        <p:txBody>
+          <a:bodyPr/>
+          <a:lstStyle/>
+          <a:p>
+            <a:endParaRPr lang="es-CO"/>
+          </a:p>
+        </p:txBody>
       </p:sp>
       <p:sp>
         <p:nvSpPr>
@@ -8397,7 +8212,7 @@
           <a:bodyPr wrap="square" rtlCol="0" anchor="ctr"/>
           <a:lstStyle/>
           <a:p>
-            <a:pPr indent="0" marL="0">
+            <a:pPr marL="0" indent="0">
               <a:buNone/>
             </a:pPr>
             <a:r>
@@ -8439,6 +8254,13 @@
             <a:prstDash val="solid"/>
           </a:ln>
         </p:spPr>
+        <p:txBody>
+          <a:bodyPr/>
+          <a:lstStyle/>
+          <a:p>
+            <a:endParaRPr lang="es-CO"/>
+          </a:p>
+        </p:txBody>
       </p:sp>
       <p:sp>
         <p:nvSpPr>
@@ -8609,7 +8431,7 @@
           <a:bodyPr wrap="square" rtlCol="0" anchor="ctr"/>
           <a:lstStyle/>
           <a:p>
-            <a:pPr algn="r" indent="0" marL="0">
+            <a:pPr marL="0" indent="0" algn="r">
               <a:buNone/>
             </a:pPr>
             <a:r>
@@ -8643,6 +8465,7 @@
         <a:solidFill>
           <a:srgbClr val="FFFFFF"/>
         </a:solidFill>
+        <a:effectLst/>
       </p:bgPr>
     </p:bg>
     <p:spTree>
@@ -8683,6 +8506,13 @@
             <a:prstDash val="solid"/>
           </a:ln>
         </p:spPr>
+        <p:txBody>
+          <a:bodyPr/>
+          <a:lstStyle/>
+          <a:p>
+            <a:endParaRPr lang="es-CO"/>
+          </a:p>
+        </p:txBody>
       </p:sp>
       <p:sp>
         <p:nvSpPr>
@@ -8705,7 +8535,7 @@
           <a:bodyPr wrap="square" rtlCol="0" anchor="ctr"/>
           <a:lstStyle/>
           <a:p>
-            <a:pPr indent="0" marL="0">
+            <a:pPr marL="0" indent="0">
               <a:buNone/>
             </a:pPr>
             <a:r>
@@ -8747,6 +8577,13 @@
             <a:prstDash val="solid"/>
           </a:ln>
         </p:spPr>
+        <p:txBody>
+          <a:bodyPr/>
+          <a:lstStyle/>
+          <a:p>
+            <a:endParaRPr lang="es-CO"/>
+          </a:p>
+        </p:txBody>
       </p:sp>
       <p:sp>
         <p:nvSpPr>
@@ -9001,7 +8838,7 @@
           <a:bodyPr wrap="square" rtlCol="0" anchor="ctr"/>
           <a:lstStyle/>
           <a:p>
-            <a:pPr algn="r" indent="0" marL="0">
+            <a:pPr marL="0" indent="0" algn="r">
               <a:buNone/>
             </a:pPr>
             <a:r>
@@ -9035,6 +8872,7 @@
         <a:solidFill>
           <a:srgbClr val="0D1B2A"/>
         </a:solidFill>
+        <a:effectLst/>
       </p:bgPr>
     </p:bg>
     <p:spTree>
@@ -9075,6 +8913,13 @@
             <a:prstDash val="solid"/>
           </a:ln>
         </p:spPr>
+        <p:txBody>
+          <a:bodyPr/>
+          <a:lstStyle/>
+          <a:p>
+            <a:endParaRPr lang="es-CO"/>
+          </a:p>
+        </p:txBody>
       </p:sp>
       <p:sp>
         <p:nvSpPr>
@@ -9097,7 +8942,7 @@
           <a:bodyPr wrap="square" rtlCol="0" anchor="ctr"/>
           <a:lstStyle/>
           <a:p>
-            <a:pPr indent="0" marL="0">
+            <a:pPr marL="0" indent="0">
               <a:buNone/>
             </a:pPr>
             <a:r>
@@ -9139,6 +8984,13 @@
             <a:prstDash val="solid"/>
           </a:ln>
         </p:spPr>
+        <p:txBody>
+          <a:bodyPr/>
+          <a:lstStyle/>
+          <a:p>
+            <a:endParaRPr lang="es-CO"/>
+          </a:p>
+        </p:txBody>
       </p:sp>
       <p:sp>
         <p:nvSpPr>
@@ -9372,7 +9224,7 @@
           <a:bodyPr wrap="square" rtlCol="0" anchor="ctr"/>
           <a:lstStyle/>
           <a:p>
-            <a:pPr algn="r" indent="0" marL="0">
+            <a:pPr marL="0" indent="0" algn="r">
               <a:buNone/>
             </a:pPr>
             <a:r>
@@ -9406,6 +9258,7 @@
         <a:solidFill>
           <a:srgbClr val="FFFFFF"/>
         </a:solidFill>
+        <a:effectLst/>
       </p:bgPr>
     </p:bg>
     <p:spTree>
@@ -9446,6 +9299,13 @@
             <a:prstDash val="solid"/>
           </a:ln>
         </p:spPr>
+        <p:txBody>
+          <a:bodyPr/>
+          <a:lstStyle/>
+          <a:p>
+            <a:endParaRPr lang="es-CO"/>
+          </a:p>
+        </p:txBody>
       </p:sp>
       <p:sp>
         <p:nvSpPr>
@@ -9468,7 +9328,7 @@
           <a:bodyPr wrap="square" rtlCol="0" anchor="ctr"/>
           <a:lstStyle/>
           <a:p>
-            <a:pPr indent="0" marL="0">
+            <a:pPr marL="0" indent="0">
               <a:buNone/>
             </a:pPr>
             <a:r>
@@ -9510,6 +9370,13 @@
             <a:prstDash val="solid"/>
           </a:ln>
         </p:spPr>
+        <p:txBody>
+          <a:bodyPr/>
+          <a:lstStyle/>
+          <a:p>
+            <a:endParaRPr lang="es-CO"/>
+          </a:p>
+        </p:txBody>
       </p:sp>
       <p:sp>
         <p:nvSpPr>
@@ -9535,6 +9402,13 @@
             <a:prstDash val="solid"/>
           </a:ln>
         </p:spPr>
+        <p:txBody>
+          <a:bodyPr/>
+          <a:lstStyle/>
+          <a:p>
+            <a:endParaRPr lang="es-CO"/>
+          </a:p>
+        </p:txBody>
       </p:sp>
       <p:sp>
         <p:nvSpPr>
@@ -9557,7 +9431,7 @@
           <a:bodyPr wrap="square" rtlCol="0" anchor="ctr"/>
           <a:lstStyle/>
           <a:p>
-            <a:pPr indent="0" marL="0">
+            <a:pPr marL="0" indent="0">
               <a:buNone/>
             </a:pPr>
             <a:r>
@@ -9736,6 +9610,13 @@
             <a:prstDash val="solid"/>
           </a:ln>
         </p:spPr>
+        <p:txBody>
+          <a:bodyPr/>
+          <a:lstStyle/>
+          <a:p>
+            <a:endParaRPr lang="es-CO"/>
+          </a:p>
+        </p:txBody>
       </p:sp>
       <p:sp>
         <p:nvSpPr>
@@ -9758,7 +9639,7 @@
           <a:bodyPr wrap="square" rtlCol="0" anchor="ctr"/>
           <a:lstStyle/>
           <a:p>
-            <a:pPr indent="0" marL="0">
+            <a:pPr marL="0" indent="0">
               <a:buNone/>
             </a:pPr>
             <a:r>
@@ -9934,7 +9815,7 @@
           <a:bodyPr wrap="square" rtlCol="0" anchor="ctr"/>
           <a:lstStyle/>
           <a:p>
-            <a:pPr algn="r" indent="0" marL="0">
+            <a:pPr marL="0" indent="0" algn="r">
               <a:buNone/>
             </a:pPr>
             <a:r>
@@ -9968,6 +9849,7 @@
         <a:solidFill>
           <a:srgbClr val="FFFFFF"/>
         </a:solidFill>
+        <a:effectLst/>
       </p:bgPr>
     </p:bg>
     <p:spTree>
@@ -10008,6 +9890,13 @@
             <a:prstDash val="solid"/>
           </a:ln>
         </p:spPr>
+        <p:txBody>
+          <a:bodyPr/>
+          <a:lstStyle/>
+          <a:p>
+            <a:endParaRPr lang="es-CO"/>
+          </a:p>
+        </p:txBody>
       </p:sp>
       <p:sp>
         <p:nvSpPr>
@@ -10030,7 +9919,7 @@
           <a:bodyPr wrap="square" rtlCol="0" anchor="ctr"/>
           <a:lstStyle/>
           <a:p>
-            <a:pPr indent="0" marL="0">
+            <a:pPr marL="0" indent="0">
               <a:buNone/>
             </a:pPr>
             <a:r>
@@ -10072,6 +9961,13 @@
             <a:prstDash val="solid"/>
           </a:ln>
         </p:spPr>
+        <p:txBody>
+          <a:bodyPr/>
+          <a:lstStyle/>
+          <a:p>
+            <a:endParaRPr lang="es-CO"/>
+          </a:p>
+        </p:txBody>
       </p:sp>
       <p:sp>
         <p:nvSpPr>
@@ -10305,7 +10201,7 @@
           <a:bodyPr wrap="square" rtlCol="0" anchor="ctr"/>
           <a:lstStyle/>
           <a:p>
-            <a:pPr algn="r" indent="0" marL="0">
+            <a:pPr marL="0" indent="0" algn="r">
               <a:buNone/>
             </a:pPr>
             <a:r>
@@ -10339,6 +10235,7 @@
         <a:solidFill>
           <a:srgbClr val="FFFFFF"/>
         </a:solidFill>
+        <a:effectLst/>
       </p:bgPr>
     </p:bg>
     <p:spTree>
@@ -10379,6 +10276,13 @@
             <a:prstDash val="solid"/>
           </a:ln>
         </p:spPr>
+        <p:txBody>
+          <a:bodyPr/>
+          <a:lstStyle/>
+          <a:p>
+            <a:endParaRPr lang="es-CO"/>
+          </a:p>
+        </p:txBody>
       </p:sp>
       <p:sp>
         <p:nvSpPr>
@@ -10401,7 +10305,7 @@
           <a:bodyPr wrap="square" rtlCol="0" anchor="ctr"/>
           <a:lstStyle/>
           <a:p>
-            <a:pPr indent="0" marL="0">
+            <a:pPr marL="0" indent="0">
               <a:buNone/>
             </a:pPr>
             <a:r>
@@ -10443,10 +10347,17 @@
             <a:prstDash val="solid"/>
           </a:ln>
         </p:spPr>
+        <p:txBody>
+          <a:bodyPr/>
+          <a:lstStyle/>
+          <a:p>
+            <a:endParaRPr lang="es-CO"/>
+          </a:p>
+        </p:txBody>
       </p:sp>
       <p:graphicFrame>
         <p:nvGraphicFramePr>
-          <p:cNvPr id="5" name="Chart 0" descr=""/>
+          <p:cNvPr id="5" name="Chart 0"/>
           <p:cNvGraphicFramePr/>
           <p:nvPr/>
         </p:nvGraphicFramePr>
@@ -10454,9 +10365,9 @@
           <a:off x="457200" y="1005840"/>
           <a:ext cx="8229600" cy="3840480"/>
         </p:xfrm>
-        <a:graphic xmlns:a="http://schemas.openxmlformats.org/drawingml/2006/main">
+        <a:graphic>
           <a:graphicData uri="http://schemas.openxmlformats.org/drawingml/2006/chart">
-            <c:chart xmlns:c="http://schemas.openxmlformats.org/drawingml/2006/chart" r:id="rId1"/>
+            <c:chart xmlns:c="http://schemas.openxmlformats.org/drawingml/2006/chart" xmlns:r="http://schemas.openxmlformats.org/officeDocument/2006/relationships" r:id="rId3"/>
           </a:graphicData>
         </a:graphic>
       </p:graphicFrame>
@@ -10481,7 +10392,7 @@
           <a:bodyPr wrap="square" rtlCol="0" anchor="ctr"/>
           <a:lstStyle/>
           <a:p>
-            <a:pPr algn="r" indent="0" marL="0">
+            <a:pPr marL="0" indent="0" algn="r">
               <a:buNone/>
             </a:pPr>
             <a:r>
@@ -10515,6 +10426,7 @@
         <a:solidFill>
           <a:srgbClr val="FFFFFF"/>
         </a:solidFill>
+        <a:effectLst/>
       </p:bgPr>
     </p:bg>
     <p:spTree>
@@ -10555,6 +10467,13 @@
             <a:prstDash val="solid"/>
           </a:ln>
         </p:spPr>
+        <p:txBody>
+          <a:bodyPr/>
+          <a:lstStyle/>
+          <a:p>
+            <a:endParaRPr lang="es-CO"/>
+          </a:p>
+        </p:txBody>
       </p:sp>
       <p:sp>
         <p:nvSpPr>
@@ -10577,7 +10496,7 @@
           <a:bodyPr wrap="square" rtlCol="0" anchor="ctr"/>
           <a:lstStyle/>
           <a:p>
-            <a:pPr indent="0" marL="0">
+            <a:pPr marL="0" indent="0">
               <a:buNone/>
             </a:pPr>
             <a:r>
@@ -10619,6 +10538,13 @@
             <a:prstDash val="solid"/>
           </a:ln>
         </p:spPr>
+        <p:txBody>
+          <a:bodyPr/>
+          <a:lstStyle/>
+          <a:p>
+            <a:endParaRPr lang="es-CO"/>
+          </a:p>
+        </p:txBody>
       </p:sp>
       <p:sp>
         <p:nvSpPr>
@@ -10789,7 +10715,7 @@
           <a:bodyPr wrap="square" rtlCol="0" anchor="ctr"/>
           <a:lstStyle/>
           <a:p>
-            <a:pPr algn="r" indent="0" marL="0">
+            <a:pPr marL="0" indent="0" algn="r">
               <a:buNone/>
             </a:pPr>
             <a:r>
@@ -10823,6 +10749,7 @@
         <a:solidFill>
           <a:srgbClr val="FFFFFF"/>
         </a:solidFill>
+        <a:effectLst/>
       </p:bgPr>
     </p:bg>
     <p:spTree>
@@ -10863,6 +10790,13 @@
             <a:prstDash val="solid"/>
           </a:ln>
         </p:spPr>
+        <p:txBody>
+          <a:bodyPr/>
+          <a:lstStyle/>
+          <a:p>
+            <a:endParaRPr lang="es-CO"/>
+          </a:p>
+        </p:txBody>
       </p:sp>
       <p:sp>
         <p:nvSpPr>
@@ -10885,7 +10819,7 @@
           <a:bodyPr wrap="square" rtlCol="0" anchor="ctr"/>
           <a:lstStyle/>
           <a:p>
-            <a:pPr indent="0" marL="0">
+            <a:pPr marL="0" indent="0">
               <a:buNone/>
             </a:pPr>
             <a:r>
@@ -10927,6 +10861,13 @@
             <a:prstDash val="solid"/>
           </a:ln>
         </p:spPr>
+        <p:txBody>
+          <a:bodyPr/>
+          <a:lstStyle/>
+          <a:p>
+            <a:endParaRPr lang="es-CO"/>
+          </a:p>
+        </p:txBody>
       </p:sp>
       <p:sp>
         <p:nvSpPr>
@@ -11202,7 +11143,7 @@
           <a:bodyPr wrap="square" rtlCol="0" anchor="ctr"/>
           <a:lstStyle/>
           <a:p>
-            <a:pPr algn="r" indent="0" marL="0">
+            <a:pPr marL="0" indent="0" algn="r">
               <a:buNone/>
             </a:pPr>
             <a:r>
@@ -11236,6 +11177,7 @@
         <a:solidFill>
           <a:srgbClr val="FFFFFF"/>
         </a:solidFill>
+        <a:effectLst/>
       </p:bgPr>
     </p:bg>
     <p:spTree>
@@ -11276,6 +11218,13 @@
             <a:prstDash val="solid"/>
           </a:ln>
         </p:spPr>
+        <p:txBody>
+          <a:bodyPr/>
+          <a:lstStyle/>
+          <a:p>
+            <a:endParaRPr lang="es-CO"/>
+          </a:p>
+        </p:txBody>
       </p:sp>
       <p:sp>
         <p:nvSpPr>
@@ -11298,7 +11247,7 @@
           <a:bodyPr wrap="square" rtlCol="0" anchor="ctr"/>
           <a:lstStyle/>
           <a:p>
-            <a:pPr indent="0" marL="0">
+            <a:pPr marL="0" indent="0">
               <a:buNone/>
             </a:pPr>
             <a:r>
@@ -11337,7 +11286,7 @@
           <a:bodyPr wrap="square" rtlCol="0" anchor="ctr"/>
           <a:lstStyle/>
           <a:p>
-            <a:pPr indent="0" marL="0">
+            <a:pPr marL="0" indent="0">
               <a:buNone/>
             </a:pPr>
             <a:r>
@@ -11379,6 +11328,13 @@
             <a:prstDash val="solid"/>
           </a:ln>
         </p:spPr>
+        <p:txBody>
+          <a:bodyPr/>
+          <a:lstStyle/>
+          <a:p>
+            <a:endParaRPr lang="es-CO"/>
+          </a:p>
+        </p:txBody>
       </p:sp>
       <p:sp>
         <p:nvSpPr>
@@ -11401,7 +11357,7 @@
           <a:bodyPr wrap="square" lIns="0" tIns="0" rIns="0" bIns="0" rtlCol="0" anchor="ctr"/>
           <a:lstStyle/>
           <a:p>
-            <a:pPr algn="ctr" indent="0" marL="0">
+            <a:pPr marL="0" indent="0" algn="ctr">
               <a:buNone/>
             </a:pPr>
             <a:r>
@@ -11440,7 +11396,7 @@
           <a:bodyPr wrap="square" rtlCol="0" anchor="ctr"/>
           <a:lstStyle/>
           <a:p>
-            <a:pPr indent="0" marL="0">
+            <a:pPr marL="0" indent="0">
               <a:buNone/>
             </a:pPr>
             <a:r>
@@ -11630,6 +11586,13 @@
             <a:prstDash val="solid"/>
           </a:ln>
         </p:spPr>
+        <p:txBody>
+          <a:bodyPr/>
+          <a:lstStyle/>
+          <a:p>
+            <a:endParaRPr lang="es-CO"/>
+          </a:p>
+        </p:txBody>
       </p:sp>
       <p:sp>
         <p:nvSpPr>
@@ -11652,7 +11615,7 @@
           <a:bodyPr wrap="square" rtlCol="0" anchor="ctr"/>
           <a:lstStyle/>
           <a:p>
-            <a:pPr indent="0" marL="0">
+            <a:pPr marL="0" indent="0">
               <a:buNone/>
             </a:pPr>
             <a:r>
@@ -11691,7 +11654,7 @@
           <a:bodyPr wrap="square" rtlCol="0" anchor="ctr"/>
           <a:lstStyle/>
           <a:p>
-            <a:pPr algn="r" indent="0" marL="0">
+            <a:pPr marL="0" indent="0" algn="r">
               <a:buNone/>
             </a:pPr>
             <a:r>
@@ -11725,6 +11688,7 @@
         <a:solidFill>
           <a:srgbClr val="1A237E"/>
         </a:solidFill>
+        <a:effectLst/>
       </p:bgPr>
     </p:bg>
     <p:spTree>
@@ -11765,6 +11729,13 @@
             <a:prstDash val="solid"/>
           </a:ln>
         </p:spPr>
+        <p:txBody>
+          <a:bodyPr/>
+          <a:lstStyle/>
+          <a:p>
+            <a:endParaRPr lang="es-CO"/>
+          </a:p>
+        </p:txBody>
       </p:sp>
       <p:sp>
         <p:nvSpPr>
@@ -11787,7 +11758,7 @@
           <a:bodyPr wrap="square" rtlCol="0" anchor="ctr"/>
           <a:lstStyle/>
           <a:p>
-            <a:pPr indent="0" marL="0">
+            <a:pPr marL="0" indent="0">
               <a:buNone/>
             </a:pPr>
             <a:r>
@@ -11829,6 +11800,13 @@
             <a:prstDash val="solid"/>
           </a:ln>
         </p:spPr>
+        <p:txBody>
+          <a:bodyPr/>
+          <a:lstStyle/>
+          <a:p>
+            <a:endParaRPr lang="es-CO"/>
+          </a:p>
+        </p:txBody>
       </p:sp>
       <p:sp>
         <p:nvSpPr>
@@ -11854,6 +11832,13 @@
             <a:prstDash val="solid"/>
           </a:ln>
         </p:spPr>
+        <p:txBody>
+          <a:bodyPr/>
+          <a:lstStyle/>
+          <a:p>
+            <a:endParaRPr lang="es-CO"/>
+          </a:p>
+        </p:txBody>
       </p:sp>
       <p:sp>
         <p:nvSpPr>
@@ -11876,7 +11861,7 @@
           <a:bodyPr wrap="square" lIns="0" tIns="0" rIns="0" bIns="0" rtlCol="0" anchor="ctr"/>
           <a:lstStyle/>
           <a:p>
-            <a:pPr algn="ctr" indent="0" marL="0">
+            <a:pPr marL="0" indent="0" algn="ctr">
               <a:buNone/>
             </a:pPr>
             <a:r>
@@ -11915,7 +11900,7 @@
           <a:bodyPr wrap="square" rtlCol="0" anchor="ctr"/>
           <a:lstStyle/>
           <a:p>
-            <a:pPr indent="0" marL="0">
+            <a:pPr marL="0" indent="0">
               <a:buNone/>
             </a:pPr>
             <a:r>
@@ -11957,6 +11942,13 @@
             <a:prstDash val="solid"/>
           </a:ln>
         </p:spPr>
+        <p:txBody>
+          <a:bodyPr/>
+          <a:lstStyle/>
+          <a:p>
+            <a:endParaRPr lang="es-CO"/>
+          </a:p>
+        </p:txBody>
       </p:sp>
       <p:sp>
         <p:nvSpPr>
@@ -11979,7 +11971,7 @@
           <a:bodyPr wrap="square" lIns="0" tIns="0" rIns="0" bIns="0" rtlCol="0" anchor="ctr"/>
           <a:lstStyle/>
           <a:p>
-            <a:pPr algn="ctr" indent="0" marL="0">
+            <a:pPr marL="0" indent="0" algn="ctr">
               <a:buNone/>
             </a:pPr>
             <a:r>
@@ -12018,7 +12010,7 @@
           <a:bodyPr wrap="square" rtlCol="0" anchor="ctr"/>
           <a:lstStyle/>
           <a:p>
-            <a:pPr indent="0" marL="0">
+            <a:pPr marL="0" indent="0">
               <a:buNone/>
             </a:pPr>
             <a:r>
@@ -12060,6 +12052,13 @@
             <a:prstDash val="solid"/>
           </a:ln>
         </p:spPr>
+        <p:txBody>
+          <a:bodyPr/>
+          <a:lstStyle/>
+          <a:p>
+            <a:endParaRPr lang="es-CO"/>
+          </a:p>
+        </p:txBody>
       </p:sp>
       <p:sp>
         <p:nvSpPr>
@@ -12082,7 +12081,7 @@
           <a:bodyPr wrap="square" lIns="0" tIns="0" rIns="0" bIns="0" rtlCol="0" anchor="ctr"/>
           <a:lstStyle/>
           <a:p>
-            <a:pPr algn="ctr" indent="0" marL="0">
+            <a:pPr marL="0" indent="0" algn="ctr">
               <a:buNone/>
             </a:pPr>
             <a:r>
@@ -12121,7 +12120,7 @@
           <a:bodyPr wrap="square" rtlCol="0" anchor="ctr"/>
           <a:lstStyle/>
           <a:p>
-            <a:pPr indent="0" marL="0">
+            <a:pPr marL="0" indent="0">
               <a:buNone/>
             </a:pPr>
             <a:r>
@@ -12163,6 +12162,13 @@
             <a:prstDash val="solid"/>
           </a:ln>
         </p:spPr>
+        <p:txBody>
+          <a:bodyPr/>
+          <a:lstStyle/>
+          <a:p>
+            <a:endParaRPr lang="es-CO"/>
+          </a:p>
+        </p:txBody>
       </p:sp>
       <p:sp>
         <p:nvSpPr>
@@ -12185,7 +12191,7 @@
           <a:bodyPr wrap="square" lIns="0" tIns="0" rIns="0" bIns="0" rtlCol="0" anchor="ctr"/>
           <a:lstStyle/>
           <a:p>
-            <a:pPr algn="ctr" indent="0" marL="0">
+            <a:pPr marL="0" indent="0" algn="ctr">
               <a:buNone/>
             </a:pPr>
             <a:r>
@@ -12224,7 +12230,7 @@
           <a:bodyPr wrap="square" rtlCol="0" anchor="ctr"/>
           <a:lstStyle/>
           <a:p>
-            <a:pPr indent="0" marL="0">
+            <a:pPr marL="0" indent="0">
               <a:buNone/>
             </a:pPr>
             <a:r>
@@ -12263,7 +12269,7 @@
           <a:bodyPr wrap="square" rtlCol="0" anchor="ctr"/>
           <a:lstStyle/>
           <a:p>
-            <a:pPr algn="r" indent="0" marL="0">
+            <a:pPr marL="0" indent="0" algn="r">
               <a:buNone/>
             </a:pPr>
             <a:r>
@@ -12297,6 +12303,7 @@
         <a:solidFill>
           <a:srgbClr val="0D1B2A"/>
         </a:solidFill>
+        <a:effectLst/>
       </p:bgPr>
     </p:bg>
     <p:spTree>
@@ -12337,6 +12344,13 @@
             <a:prstDash val="solid"/>
           </a:ln>
         </p:spPr>
+        <p:txBody>
+          <a:bodyPr/>
+          <a:lstStyle/>
+          <a:p>
+            <a:endParaRPr lang="es-CO"/>
+          </a:p>
+        </p:txBody>
       </p:sp>
       <p:sp>
         <p:nvSpPr>
@@ -12359,7 +12373,7 @@
           <a:bodyPr wrap="square" rtlCol="0" anchor="ctr"/>
           <a:lstStyle/>
           <a:p>
-            <a:pPr indent="0" marL="0">
+            <a:pPr marL="0" indent="0">
               <a:buNone/>
             </a:pPr>
             <a:r>
@@ -12401,6 +12415,13 @@
             <a:prstDash val="solid"/>
           </a:ln>
         </p:spPr>
+        <p:txBody>
+          <a:bodyPr/>
+          <a:lstStyle/>
+          <a:p>
+            <a:endParaRPr lang="es-CO"/>
+          </a:p>
+        </p:txBody>
       </p:sp>
       <p:sp>
         <p:nvSpPr>
@@ -12426,6 +12447,13 @@
             <a:prstDash val="solid"/>
           </a:ln>
         </p:spPr>
+        <p:txBody>
+          <a:bodyPr/>
+          <a:lstStyle/>
+          <a:p>
+            <a:endParaRPr lang="es-CO"/>
+          </a:p>
+        </p:txBody>
       </p:sp>
       <p:sp>
         <p:nvSpPr>
@@ -12448,7 +12476,7 @@
           <a:bodyPr wrap="square" rtlCol="0" anchor="ctr"/>
           <a:lstStyle/>
           <a:p>
-            <a:pPr indent="0" marL="0">
+            <a:pPr marL="0" indent="0">
               <a:buNone/>
             </a:pPr>
             <a:r>
@@ -12490,6 +12518,13 @@
             <a:prstDash val="solid"/>
           </a:ln>
         </p:spPr>
+        <p:txBody>
+          <a:bodyPr/>
+          <a:lstStyle/>
+          <a:p>
+            <a:endParaRPr lang="es-CO"/>
+          </a:p>
+        </p:txBody>
       </p:sp>
       <p:sp>
         <p:nvSpPr>
@@ -12515,6 +12550,13 @@
             <a:prstDash val="solid"/>
           </a:ln>
         </p:spPr>
+        <p:txBody>
+          <a:bodyPr/>
+          <a:lstStyle/>
+          <a:p>
+            <a:endParaRPr lang="es-CO"/>
+          </a:p>
+        </p:txBody>
       </p:sp>
       <p:sp>
         <p:nvSpPr>
@@ -12537,7 +12579,7 @@
           <a:bodyPr wrap="square" rtlCol="0" anchor="ctr"/>
           <a:lstStyle/>
           <a:p>
-            <a:pPr indent="0" marL="0">
+            <a:pPr marL="0" indent="0">
               <a:buNone/>
             </a:pPr>
             <a:r>
@@ -12579,6 +12621,13 @@
             <a:prstDash val="solid"/>
           </a:ln>
         </p:spPr>
+        <p:txBody>
+          <a:bodyPr/>
+          <a:lstStyle/>
+          <a:p>
+            <a:endParaRPr lang="es-CO"/>
+          </a:p>
+        </p:txBody>
       </p:sp>
       <p:sp>
         <p:nvSpPr>
@@ -12604,6 +12653,13 @@
             <a:prstDash val="solid"/>
           </a:ln>
         </p:spPr>
+        <p:txBody>
+          <a:bodyPr/>
+          <a:lstStyle/>
+          <a:p>
+            <a:endParaRPr lang="es-CO"/>
+          </a:p>
+        </p:txBody>
       </p:sp>
       <p:sp>
         <p:nvSpPr>
@@ -12626,7 +12682,7 @@
           <a:bodyPr wrap="square" rtlCol="0" anchor="ctr"/>
           <a:lstStyle/>
           <a:p>
-            <a:pPr indent="0" marL="0">
+            <a:pPr marL="0" indent="0">
               <a:buNone/>
             </a:pPr>
             <a:r>
@@ -12668,6 +12724,13 @@
             <a:prstDash val="solid"/>
           </a:ln>
         </p:spPr>
+        <p:txBody>
+          <a:bodyPr/>
+          <a:lstStyle/>
+          <a:p>
+            <a:endParaRPr lang="es-CO"/>
+          </a:p>
+        </p:txBody>
       </p:sp>
       <p:sp>
         <p:nvSpPr>
@@ -12693,6 +12756,13 @@
             <a:prstDash val="solid"/>
           </a:ln>
         </p:spPr>
+        <p:txBody>
+          <a:bodyPr/>
+          <a:lstStyle/>
+          <a:p>
+            <a:endParaRPr lang="es-CO"/>
+          </a:p>
+        </p:txBody>
       </p:sp>
       <p:sp>
         <p:nvSpPr>
@@ -12715,7 +12785,7 @@
           <a:bodyPr wrap="square" rtlCol="0" anchor="ctr"/>
           <a:lstStyle/>
           <a:p>
-            <a:pPr indent="0" marL="0">
+            <a:pPr marL="0" indent="0">
               <a:buNone/>
             </a:pPr>
             <a:r>
@@ -12757,6 +12827,13 @@
             <a:prstDash val="solid"/>
           </a:ln>
         </p:spPr>
+        <p:txBody>
+          <a:bodyPr/>
+          <a:lstStyle/>
+          <a:p>
+            <a:endParaRPr lang="es-CO"/>
+          </a:p>
+        </p:txBody>
       </p:sp>
       <p:sp>
         <p:nvSpPr>
@@ -12782,6 +12859,13 @@
             <a:prstDash val="solid"/>
           </a:ln>
         </p:spPr>
+        <p:txBody>
+          <a:bodyPr/>
+          <a:lstStyle/>
+          <a:p>
+            <a:endParaRPr lang="es-CO"/>
+          </a:p>
+        </p:txBody>
       </p:sp>
       <p:sp>
         <p:nvSpPr>
@@ -12804,7 +12888,7 @@
           <a:bodyPr wrap="square" rtlCol="0" anchor="ctr"/>
           <a:lstStyle/>
           <a:p>
-            <a:pPr indent="0" marL="0">
+            <a:pPr marL="0" indent="0">
               <a:buNone/>
             </a:pPr>
             <a:r>
@@ -12846,6 +12930,13 @@
             <a:prstDash val="solid"/>
           </a:ln>
         </p:spPr>
+        <p:txBody>
+          <a:bodyPr/>
+          <a:lstStyle/>
+          <a:p>
+            <a:endParaRPr lang="es-CO"/>
+          </a:p>
+        </p:txBody>
       </p:sp>
       <p:sp>
         <p:nvSpPr>
@@ -12871,6 +12962,13 @@
             <a:prstDash val="solid"/>
           </a:ln>
         </p:spPr>
+        <p:txBody>
+          <a:bodyPr/>
+          <a:lstStyle/>
+          <a:p>
+            <a:endParaRPr lang="es-CO"/>
+          </a:p>
+        </p:txBody>
       </p:sp>
       <p:sp>
         <p:nvSpPr>
@@ -12893,7 +12991,7 @@
           <a:bodyPr wrap="square" rtlCol="0" anchor="ctr"/>
           <a:lstStyle/>
           <a:p>
-            <a:pPr indent="0" marL="0">
+            <a:pPr marL="0" indent="0">
               <a:buNone/>
             </a:pPr>
             <a:r>
@@ -12932,7 +13030,7 @@
           <a:bodyPr wrap="square" rtlCol="0" anchor="ctr"/>
           <a:lstStyle/>
           <a:p>
-            <a:pPr algn="r" indent="0" marL="0">
+            <a:pPr marL="0" indent="0" algn="r">
               <a:buNone/>
             </a:pPr>
             <a:r>
@@ -12966,6 +13064,7 @@
         <a:solidFill>
           <a:srgbClr val="0D1B2A"/>
         </a:solidFill>
+        <a:effectLst/>
       </p:bgPr>
     </p:bg>
     <p:spTree>
@@ -13006,6 +13105,13 @@
             <a:prstDash val="solid"/>
           </a:ln>
         </p:spPr>
+        <p:txBody>
+          <a:bodyPr/>
+          <a:lstStyle/>
+          <a:p>
+            <a:endParaRPr lang="es-CO"/>
+          </a:p>
+        </p:txBody>
       </p:sp>
       <p:sp>
         <p:nvSpPr>
@@ -13031,6 +13137,13 @@
             <a:prstDash val="solid"/>
           </a:ln>
         </p:spPr>
+        <p:txBody>
+          <a:bodyPr/>
+          <a:lstStyle/>
+          <a:p>
+            <a:endParaRPr lang="es-CO"/>
+          </a:p>
+        </p:txBody>
       </p:sp>
       <p:sp>
         <p:nvSpPr>
@@ -13053,7 +13166,7 @@
           <a:bodyPr wrap="square" lIns="0" tIns="0" rIns="0" bIns="0" rtlCol="0" anchor="ctr"/>
           <a:lstStyle/>
           <a:p>
-            <a:pPr algn="ctr" indent="0" marL="0">
+            <a:pPr marL="0" indent="0" algn="ctr">
               <a:buNone/>
             </a:pPr>
             <a:r>
@@ -13092,7 +13205,7 @@
           <a:bodyPr wrap="square" rtlCol="0" anchor="ctr"/>
           <a:lstStyle/>
           <a:p>
-            <a:pPr algn="l" indent="0" marL="0">
+            <a:pPr marL="0" indent="0" algn="l">
               <a:buNone/>
             </a:pPr>
             <a:r>
@@ -13131,7 +13244,7 @@
           <a:bodyPr wrap="square" rtlCol="0" anchor="ctr"/>
           <a:lstStyle/>
           <a:p>
-            <a:pPr algn="l" indent="0" marL="0">
+            <a:pPr marL="0" indent="0" algn="l">
               <a:buNone/>
             </a:pPr>
             <a:r>
@@ -13170,7 +13283,7 @@
           <a:bodyPr wrap="square" rtlCol="0" anchor="ctr"/>
           <a:lstStyle/>
           <a:p>
-            <a:pPr algn="l" indent="0" marL="0">
+            <a:pPr marL="0" indent="0" algn="l">
               <a:buNone/>
             </a:pPr>
             <a:r>
@@ -13212,6 +13325,13 @@
             <a:prstDash val="solid"/>
           </a:ln>
         </p:spPr>
+        <p:txBody>
+          <a:bodyPr/>
+          <a:lstStyle/>
+          <a:p>
+            <a:endParaRPr lang="es-CO"/>
+          </a:p>
+        </p:txBody>
       </p:sp>
     </p:spTree>
   </p:cSld>
@@ -13229,6 +13349,7 @@
         <a:solidFill>
           <a:srgbClr val="FFFFFF"/>
         </a:solidFill>
+        <a:effectLst/>
       </p:bgPr>
     </p:bg>
     <p:spTree>
@@ -13269,6 +13390,13 @@
             <a:prstDash val="solid"/>
           </a:ln>
         </p:spPr>
+        <p:txBody>
+          <a:bodyPr/>
+          <a:lstStyle/>
+          <a:p>
+            <a:endParaRPr lang="es-CO"/>
+          </a:p>
+        </p:txBody>
       </p:sp>
       <p:sp>
         <p:nvSpPr>
@@ -13291,7 +13419,7 @@
           <a:bodyPr wrap="square" rtlCol="0" anchor="ctr"/>
           <a:lstStyle/>
           <a:p>
-            <a:pPr indent="0" marL="0">
+            <a:pPr marL="0" indent="0">
               <a:buNone/>
             </a:pPr>
             <a:r>
@@ -13333,6 +13461,13 @@
             <a:prstDash val="solid"/>
           </a:ln>
         </p:spPr>
+        <p:txBody>
+          <a:bodyPr/>
+          <a:lstStyle/>
+          <a:p>
+            <a:endParaRPr lang="es-CO"/>
+          </a:p>
+        </p:txBody>
       </p:sp>
       <p:sp>
         <p:nvSpPr>
@@ -13503,7 +13638,7 @@
           <a:bodyPr wrap="square" rtlCol="0" anchor="ctr"/>
           <a:lstStyle/>
           <a:p>
-            <a:pPr algn="r" indent="0" marL="0">
+            <a:pPr marL="0" indent="0" algn="r">
               <a:buNone/>
             </a:pPr>
             <a:r>
@@ -13537,6 +13672,7 @@
         <a:solidFill>
           <a:srgbClr val="FFFFFF"/>
         </a:solidFill>
+        <a:effectLst/>
       </p:bgPr>
     </p:bg>
     <p:spTree>
@@ -13577,6 +13713,13 @@
             <a:prstDash val="solid"/>
           </a:ln>
         </p:spPr>
+        <p:txBody>
+          <a:bodyPr/>
+          <a:lstStyle/>
+          <a:p>
+            <a:endParaRPr lang="es-CO"/>
+          </a:p>
+        </p:txBody>
       </p:sp>
       <p:sp>
         <p:nvSpPr>
@@ -13599,7 +13742,7 @@
           <a:bodyPr wrap="square" rtlCol="0" anchor="ctr"/>
           <a:lstStyle/>
           <a:p>
-            <a:pPr indent="0" marL="0">
+            <a:pPr marL="0" indent="0">
               <a:buNone/>
             </a:pPr>
             <a:r>
@@ -13641,6 +13784,13 @@
             <a:prstDash val="solid"/>
           </a:ln>
         </p:spPr>
+        <p:txBody>
+          <a:bodyPr/>
+          <a:lstStyle/>
+          <a:p>
+            <a:endParaRPr lang="es-CO"/>
+          </a:p>
+        </p:txBody>
       </p:sp>
       <p:sp>
         <p:nvSpPr>
@@ -13874,7 +14024,7 @@
           <a:bodyPr wrap="square" rtlCol="0" anchor="ctr"/>
           <a:lstStyle/>
           <a:p>
-            <a:pPr algn="r" indent="0" marL="0">
+            <a:pPr marL="0" indent="0" algn="r">
               <a:buNone/>
             </a:pPr>
             <a:r>
@@ -13908,6 +14058,7 @@
         <a:solidFill>
           <a:srgbClr val="FFFFFF"/>
         </a:solidFill>
+        <a:effectLst/>
       </p:bgPr>
     </p:bg>
     <p:spTree>
@@ -13948,6 +14099,13 @@
             <a:prstDash val="solid"/>
           </a:ln>
         </p:spPr>
+        <p:txBody>
+          <a:bodyPr/>
+          <a:lstStyle/>
+          <a:p>
+            <a:endParaRPr lang="es-CO"/>
+          </a:p>
+        </p:txBody>
       </p:sp>
       <p:sp>
         <p:nvSpPr>
@@ -13970,7 +14128,7 @@
           <a:bodyPr wrap="square" rtlCol="0" anchor="ctr"/>
           <a:lstStyle/>
           <a:p>
-            <a:pPr indent="0" marL="0">
+            <a:pPr marL="0" indent="0">
               <a:buNone/>
             </a:pPr>
             <a:r>
@@ -14012,6 +14170,13 @@
             <a:prstDash val="solid"/>
           </a:ln>
         </p:spPr>
+        <p:txBody>
+          <a:bodyPr/>
+          <a:lstStyle/>
+          <a:p>
+            <a:endParaRPr lang="es-CO"/>
+          </a:p>
+        </p:txBody>
       </p:sp>
       <p:sp>
         <p:nvSpPr>
@@ -14037,6 +14202,13 @@
             <a:prstDash val="solid"/>
           </a:ln>
         </p:spPr>
+        <p:txBody>
+          <a:bodyPr/>
+          <a:lstStyle/>
+          <a:p>
+            <a:endParaRPr lang="es-CO"/>
+          </a:p>
+        </p:txBody>
       </p:sp>
       <p:sp>
         <p:nvSpPr>
@@ -14059,7 +14231,7 @@
           <a:bodyPr wrap="square" rtlCol="0" anchor="ctr"/>
           <a:lstStyle/>
           <a:p>
-            <a:pPr indent="0" marL="0">
+            <a:pPr marL="0" indent="0">
               <a:buNone/>
             </a:pPr>
             <a:r>
@@ -14238,6 +14410,13 @@
             <a:prstDash val="solid"/>
           </a:ln>
         </p:spPr>
+        <p:txBody>
+          <a:bodyPr/>
+          <a:lstStyle/>
+          <a:p>
+            <a:endParaRPr lang="es-CO"/>
+          </a:p>
+        </p:txBody>
       </p:sp>
       <p:sp>
         <p:nvSpPr>
@@ -14260,7 +14439,7 @@
           <a:bodyPr wrap="square" rtlCol="0" anchor="ctr"/>
           <a:lstStyle/>
           <a:p>
-            <a:pPr indent="0" marL="0">
+            <a:pPr marL="0" indent="0">
               <a:buNone/>
             </a:pPr>
             <a:r>
@@ -14436,7 +14615,7 @@
           <a:bodyPr wrap="square" rtlCol="0" anchor="ctr"/>
           <a:lstStyle/>
           <a:p>
-            <a:pPr algn="r" indent="0" marL="0">
+            <a:pPr marL="0" indent="0" algn="r">
               <a:buNone/>
             </a:pPr>
             <a:r>
@@ -14470,6 +14649,7 @@
         <a:solidFill>
           <a:srgbClr val="0D1B2A"/>
         </a:solidFill>
+        <a:effectLst/>
       </p:bgPr>
     </p:bg>
     <p:spTree>
@@ -14510,6 +14690,13 @@
             <a:prstDash val="solid"/>
           </a:ln>
         </p:spPr>
+        <p:txBody>
+          <a:bodyPr/>
+          <a:lstStyle/>
+          <a:p>
+            <a:endParaRPr lang="es-CO"/>
+          </a:p>
+        </p:txBody>
       </p:sp>
       <p:sp>
         <p:nvSpPr>
@@ -14532,7 +14719,7 @@
           <a:bodyPr wrap="square" rtlCol="0" anchor="ctr"/>
           <a:lstStyle/>
           <a:p>
-            <a:pPr indent="0" marL="0">
+            <a:pPr marL="0" indent="0">
               <a:buNone/>
             </a:pPr>
             <a:r>
@@ -14574,6 +14761,13 @@
             <a:prstDash val="solid"/>
           </a:ln>
         </p:spPr>
+        <p:txBody>
+          <a:bodyPr/>
+          <a:lstStyle/>
+          <a:p>
+            <a:endParaRPr lang="es-CO"/>
+          </a:p>
+        </p:txBody>
       </p:sp>
       <p:sp>
         <p:nvSpPr>
@@ -14828,7 +15022,7 @@
           <a:bodyPr wrap="square" rtlCol="0" anchor="ctr"/>
           <a:lstStyle/>
           <a:p>
-            <a:pPr algn="r" indent="0" marL="0">
+            <a:pPr marL="0" indent="0" algn="r">
               <a:buNone/>
             </a:pPr>
             <a:r>
@@ -14862,6 +15056,7 @@
         <a:solidFill>
           <a:srgbClr val="FFFFFF"/>
         </a:solidFill>
+        <a:effectLst/>
       </p:bgPr>
     </p:bg>
     <p:spTree>
@@ -14902,6 +15097,13 @@
             <a:prstDash val="solid"/>
           </a:ln>
         </p:spPr>
+        <p:txBody>
+          <a:bodyPr/>
+          <a:lstStyle/>
+          <a:p>
+            <a:endParaRPr lang="es-CO"/>
+          </a:p>
+        </p:txBody>
       </p:sp>
       <p:sp>
         <p:nvSpPr>
@@ -14924,7 +15126,7 @@
           <a:bodyPr wrap="square" rtlCol="0" anchor="ctr"/>
           <a:lstStyle/>
           <a:p>
-            <a:pPr indent="0" marL="0">
+            <a:pPr marL="0" indent="0">
               <a:buNone/>
             </a:pPr>
             <a:r>
@@ -14966,6 +15168,13 @@
             <a:prstDash val="solid"/>
           </a:ln>
         </p:spPr>
+        <p:txBody>
+          <a:bodyPr/>
+          <a:lstStyle/>
+          <a:p>
+            <a:endParaRPr lang="es-CO"/>
+          </a:p>
+        </p:txBody>
       </p:sp>
       <p:sp>
         <p:nvSpPr>
@@ -15220,7 +15429,7 @@
           <a:bodyPr wrap="square" rtlCol="0" anchor="ctr"/>
           <a:lstStyle/>
           <a:p>
-            <a:pPr algn="r" indent="0" marL="0">
+            <a:pPr marL="0" indent="0" algn="r">
               <a:buNone/>
             </a:pPr>
             <a:r>
@@ -15254,6 +15463,7 @@
         <a:solidFill>
           <a:srgbClr val="FFFFFF"/>
         </a:solidFill>
+        <a:effectLst/>
       </p:bgPr>
     </p:bg>
     <p:spTree>
@@ -15294,6 +15504,13 @@
             <a:prstDash val="solid"/>
           </a:ln>
         </p:spPr>
+        <p:txBody>
+          <a:bodyPr/>
+          <a:lstStyle/>
+          <a:p>
+            <a:endParaRPr lang="es-CO"/>
+          </a:p>
+        </p:txBody>
       </p:sp>
       <p:sp>
         <p:nvSpPr>
@@ -15316,7 +15533,7 @@
           <a:bodyPr wrap="square" rtlCol="0" anchor="ctr"/>
           <a:lstStyle/>
           <a:p>
-            <a:pPr indent="0" marL="0">
+            <a:pPr marL="0" indent="0">
               <a:buNone/>
             </a:pPr>
             <a:r>
@@ -15358,6 +15575,13 @@
             <a:prstDash val="solid"/>
           </a:ln>
         </p:spPr>
+        <p:txBody>
+          <a:bodyPr/>
+          <a:lstStyle/>
+          <a:p>
+            <a:endParaRPr lang="es-CO"/>
+          </a:p>
+        </p:txBody>
       </p:sp>
       <p:sp>
         <p:nvSpPr>
@@ -15368,7 +15592,7 @@
         <p:spPr>
           <a:xfrm>
             <a:off x="365760" y="960120"/>
-            <a:ext cx="8503920" cy="3931920"/>
+            <a:ext cx="5303520" cy="3931920"/>
           </a:xfrm>
           <a:prstGeom prst="rect">
             <a:avLst/>
@@ -15573,6 +15797,13 @@
             <a:prstDash val="solid"/>
           </a:ln>
         </p:spPr>
+        <p:txBody>
+          <a:bodyPr/>
+          <a:lstStyle/>
+          <a:p>
+            <a:endParaRPr lang="es-CO"/>
+          </a:p>
+        </p:txBody>
       </p:sp>
       <p:sp>
         <p:nvSpPr>
@@ -15595,7 +15826,7 @@
           <a:bodyPr wrap="square" rtlCol="0" anchor="ctr"/>
           <a:lstStyle/>
           <a:p>
-            <a:pPr indent="0" marL="0">
+            <a:pPr marL="0" indent="0">
               <a:buNone/>
             </a:pPr>
             <a:r>
@@ -15719,7 +15950,7 @@
           <a:bodyPr wrap="square" rtlCol="0" anchor="ctr"/>
           <a:lstStyle/>
           <a:p>
-            <a:pPr algn="r" indent="0" marL="0">
+            <a:pPr marL="0" indent="0" algn="r">
               <a:buNone/>
             </a:pPr>
             <a:r>
@@ -15753,6 +15984,7 @@
         <a:solidFill>
           <a:srgbClr val="FFFFFF"/>
         </a:solidFill>
+        <a:effectLst/>
       </p:bgPr>
     </p:bg>
     <p:spTree>
@@ -15793,6 +16025,13 @@
             <a:prstDash val="solid"/>
           </a:ln>
         </p:spPr>
+        <p:txBody>
+          <a:bodyPr/>
+          <a:lstStyle/>
+          <a:p>
+            <a:endParaRPr lang="es-CO"/>
+          </a:p>
+        </p:txBody>
       </p:sp>
       <p:sp>
         <p:nvSpPr>
@@ -15815,7 +16054,7 @@
           <a:bodyPr wrap="square" rtlCol="0" anchor="ctr"/>
           <a:lstStyle/>
           <a:p>
-            <a:pPr indent="0" marL="0">
+            <a:pPr marL="0" indent="0">
               <a:buNone/>
             </a:pPr>
             <a:r>
@@ -15857,6 +16096,13 @@
             <a:prstDash val="solid"/>
           </a:ln>
         </p:spPr>
+        <p:txBody>
+          <a:bodyPr/>
+          <a:lstStyle/>
+          <a:p>
+            <a:endParaRPr lang="es-CO"/>
+          </a:p>
+        </p:txBody>
       </p:sp>
       <p:sp>
         <p:nvSpPr>
@@ -16111,7 +16357,7 @@
           <a:bodyPr wrap="square" rtlCol="0" anchor="ctr"/>
           <a:lstStyle/>
           <a:p>
-            <a:pPr algn="r" indent="0" marL="0">
+            <a:pPr marL="0" indent="0" algn="r">
               <a:buNone/>
             </a:pPr>
             <a:r>
@@ -16145,6 +16391,7 @@
         <a:solidFill>
           <a:srgbClr val="FFFFFF"/>
         </a:solidFill>
+        <a:effectLst/>
       </p:bgPr>
     </p:bg>
     <p:spTree>
@@ -16185,6 +16432,13 @@
             <a:prstDash val="solid"/>
           </a:ln>
         </p:spPr>
+        <p:txBody>
+          <a:bodyPr/>
+          <a:lstStyle/>
+          <a:p>
+            <a:endParaRPr lang="es-CO"/>
+          </a:p>
+        </p:txBody>
       </p:sp>
       <p:sp>
         <p:nvSpPr>
@@ -16207,7 +16461,7 @@
           <a:bodyPr wrap="square" rtlCol="0" anchor="ctr"/>
           <a:lstStyle/>
           <a:p>
-            <a:pPr indent="0" marL="0">
+            <a:pPr marL="0" indent="0">
               <a:buNone/>
             </a:pPr>
             <a:r>
@@ -16246,7 +16500,7 @@
           <a:bodyPr wrap="square" rtlCol="0" anchor="ctr"/>
           <a:lstStyle/>
           <a:p>
-            <a:pPr indent="0" marL="0">
+            <a:pPr marL="0" indent="0">
               <a:buNone/>
             </a:pPr>
             <a:r>
@@ -16288,6 +16542,13 @@
             <a:prstDash val="solid"/>
           </a:ln>
         </p:spPr>
+        <p:txBody>
+          <a:bodyPr/>
+          <a:lstStyle/>
+          <a:p>
+            <a:endParaRPr lang="es-CO"/>
+          </a:p>
+        </p:txBody>
       </p:sp>
       <p:sp>
         <p:nvSpPr>
@@ -16310,7 +16571,7 @@
           <a:bodyPr wrap="square" lIns="0" tIns="0" rIns="0" bIns="0" rtlCol="0" anchor="ctr"/>
           <a:lstStyle/>
           <a:p>
-            <a:pPr algn="ctr" indent="0" marL="0">
+            <a:pPr marL="0" indent="0" algn="ctr">
               <a:buNone/>
             </a:pPr>
             <a:r>
@@ -16349,7 +16610,7 @@
           <a:bodyPr wrap="square" rtlCol="0" anchor="ctr"/>
           <a:lstStyle/>
           <a:p>
-            <a:pPr indent="0" marL="0">
+            <a:pPr marL="0" indent="0">
               <a:buNone/>
             </a:pPr>
             <a:r>
@@ -16539,6 +16800,13 @@
             <a:prstDash val="solid"/>
           </a:ln>
         </p:spPr>
+        <p:txBody>
+          <a:bodyPr/>
+          <a:lstStyle/>
+          <a:p>
+            <a:endParaRPr lang="es-CO"/>
+          </a:p>
+        </p:txBody>
       </p:sp>
       <p:sp>
         <p:nvSpPr>
@@ -16561,7 +16829,7 @@
           <a:bodyPr wrap="square" rtlCol="0" anchor="ctr"/>
           <a:lstStyle/>
           <a:p>
-            <a:pPr indent="0" marL="0">
+            <a:pPr marL="0" indent="0">
               <a:buNone/>
             </a:pPr>
             <a:r>
@@ -16600,7 +16868,7 @@
           <a:bodyPr wrap="square" rtlCol="0" anchor="ctr"/>
           <a:lstStyle/>
           <a:p>
-            <a:pPr algn="r" indent="0" marL="0">
+            <a:pPr marL="0" indent="0" algn="r">
               <a:buNone/>
             </a:pPr>
             <a:r>
@@ -16634,6 +16902,7 @@
         <a:solidFill>
           <a:srgbClr val="1A237E"/>
         </a:solidFill>
+        <a:effectLst/>
       </p:bgPr>
     </p:bg>
     <p:spTree>
@@ -16674,6 +16943,13 @@
             <a:prstDash val="solid"/>
           </a:ln>
         </p:spPr>
+        <p:txBody>
+          <a:bodyPr/>
+          <a:lstStyle/>
+          <a:p>
+            <a:endParaRPr lang="es-CO"/>
+          </a:p>
+        </p:txBody>
       </p:sp>
       <p:sp>
         <p:nvSpPr>
@@ -16696,7 +16972,7 @@
           <a:bodyPr wrap="square" rtlCol="0" anchor="ctr"/>
           <a:lstStyle/>
           <a:p>
-            <a:pPr indent="0" marL="0">
+            <a:pPr marL="0" indent="0">
               <a:buNone/>
             </a:pPr>
             <a:r>
@@ -16738,6 +17014,13 @@
             <a:prstDash val="solid"/>
           </a:ln>
         </p:spPr>
+        <p:txBody>
+          <a:bodyPr/>
+          <a:lstStyle/>
+          <a:p>
+            <a:endParaRPr lang="es-CO"/>
+          </a:p>
+        </p:txBody>
       </p:sp>
       <p:sp>
         <p:nvSpPr>
@@ -16763,6 +17046,13 @@
             <a:prstDash val="solid"/>
           </a:ln>
         </p:spPr>
+        <p:txBody>
+          <a:bodyPr/>
+          <a:lstStyle/>
+          <a:p>
+            <a:endParaRPr lang="es-CO"/>
+          </a:p>
+        </p:txBody>
       </p:sp>
       <p:sp>
         <p:nvSpPr>
@@ -16785,7 +17075,7 @@
           <a:bodyPr wrap="square" lIns="0" tIns="0" rIns="0" bIns="0" rtlCol="0" anchor="ctr"/>
           <a:lstStyle/>
           <a:p>
-            <a:pPr algn="ctr" indent="0" marL="0">
+            <a:pPr marL="0" indent="0" algn="ctr">
               <a:buNone/>
             </a:pPr>
             <a:r>
@@ -16824,7 +17114,7 @@
           <a:bodyPr wrap="square" rtlCol="0" anchor="ctr"/>
           <a:lstStyle/>
           <a:p>
-            <a:pPr indent="0" marL="0">
+            <a:pPr marL="0" indent="0">
               <a:buNone/>
             </a:pPr>
             <a:r>
@@ -16866,6 +17156,13 @@
             <a:prstDash val="solid"/>
           </a:ln>
         </p:spPr>
+        <p:txBody>
+          <a:bodyPr/>
+          <a:lstStyle/>
+          <a:p>
+            <a:endParaRPr lang="es-CO"/>
+          </a:p>
+        </p:txBody>
       </p:sp>
       <p:sp>
         <p:nvSpPr>
@@ -16888,7 +17185,7 @@
           <a:bodyPr wrap="square" lIns="0" tIns="0" rIns="0" bIns="0" rtlCol="0" anchor="ctr"/>
           <a:lstStyle/>
           <a:p>
-            <a:pPr algn="ctr" indent="0" marL="0">
+            <a:pPr marL="0" indent="0" algn="ctr">
               <a:buNone/>
             </a:pPr>
             <a:r>
@@ -16927,7 +17224,7 @@
           <a:bodyPr wrap="square" rtlCol="0" anchor="ctr"/>
           <a:lstStyle/>
           <a:p>
-            <a:pPr indent="0" marL="0">
+            <a:pPr marL="0" indent="0">
               <a:buNone/>
             </a:pPr>
             <a:r>
@@ -16969,6 +17266,13 @@
             <a:prstDash val="solid"/>
           </a:ln>
         </p:spPr>
+        <p:txBody>
+          <a:bodyPr/>
+          <a:lstStyle/>
+          <a:p>
+            <a:endParaRPr lang="es-CO"/>
+          </a:p>
+        </p:txBody>
       </p:sp>
       <p:sp>
         <p:nvSpPr>
@@ -16991,7 +17295,7 @@
           <a:bodyPr wrap="square" lIns="0" tIns="0" rIns="0" bIns="0" rtlCol="0" anchor="ctr"/>
           <a:lstStyle/>
           <a:p>
-            <a:pPr algn="ctr" indent="0" marL="0">
+            <a:pPr marL="0" indent="0" algn="ctr">
               <a:buNone/>
             </a:pPr>
             <a:r>
@@ -17030,7 +17334,7 @@
           <a:bodyPr wrap="square" rtlCol="0" anchor="ctr"/>
           <a:lstStyle/>
           <a:p>
-            <a:pPr indent="0" marL="0">
+            <a:pPr marL="0" indent="0">
               <a:buNone/>
             </a:pPr>
             <a:r>
@@ -17072,6 +17376,13 @@
             <a:prstDash val="solid"/>
           </a:ln>
         </p:spPr>
+        <p:txBody>
+          <a:bodyPr/>
+          <a:lstStyle/>
+          <a:p>
+            <a:endParaRPr lang="es-CO"/>
+          </a:p>
+        </p:txBody>
       </p:sp>
       <p:sp>
         <p:nvSpPr>
@@ -17094,7 +17405,7 @@
           <a:bodyPr wrap="square" lIns="0" tIns="0" rIns="0" bIns="0" rtlCol="0" anchor="ctr"/>
           <a:lstStyle/>
           <a:p>
-            <a:pPr algn="ctr" indent="0" marL="0">
+            <a:pPr marL="0" indent="0" algn="ctr">
               <a:buNone/>
             </a:pPr>
             <a:r>
@@ -17133,7 +17444,7 @@
           <a:bodyPr wrap="square" rtlCol="0" anchor="ctr"/>
           <a:lstStyle/>
           <a:p>
-            <a:pPr indent="0" marL="0">
+            <a:pPr marL="0" indent="0">
               <a:buNone/>
             </a:pPr>
             <a:r>
@@ -17172,7 +17483,7 @@
           <a:bodyPr wrap="square" rtlCol="0" anchor="ctr"/>
           <a:lstStyle/>
           <a:p>
-            <a:pPr algn="r" indent="0" marL="0">
+            <a:pPr marL="0" indent="0" algn="r">
               <a:buNone/>
             </a:pPr>
             <a:r>
@@ -17206,6 +17517,7 @@
         <a:solidFill>
           <a:srgbClr val="0D1B2A"/>
         </a:solidFill>
+        <a:effectLst/>
       </p:bgPr>
     </p:bg>
     <p:spTree>
@@ -17246,6 +17558,13 @@
             <a:prstDash val="solid"/>
           </a:ln>
         </p:spPr>
+        <p:txBody>
+          <a:bodyPr/>
+          <a:lstStyle/>
+          <a:p>
+            <a:endParaRPr lang="es-CO"/>
+          </a:p>
+        </p:txBody>
       </p:sp>
       <p:sp>
         <p:nvSpPr>
@@ -17268,7 +17587,7 @@
           <a:bodyPr wrap="square" rtlCol="0" anchor="ctr"/>
           <a:lstStyle/>
           <a:p>
-            <a:pPr indent="0" marL="0">
+            <a:pPr marL="0" indent="0">
               <a:buNone/>
             </a:pPr>
             <a:r>
@@ -17310,6 +17629,13 @@
             <a:prstDash val="solid"/>
           </a:ln>
         </p:spPr>
+        <p:txBody>
+          <a:bodyPr/>
+          <a:lstStyle/>
+          <a:p>
+            <a:endParaRPr lang="es-CO"/>
+          </a:p>
+        </p:txBody>
       </p:sp>
       <p:sp>
         <p:nvSpPr>
@@ -17335,6 +17661,13 @@
             <a:prstDash val="solid"/>
           </a:ln>
         </p:spPr>
+        <p:txBody>
+          <a:bodyPr/>
+          <a:lstStyle/>
+          <a:p>
+            <a:endParaRPr lang="es-CO"/>
+          </a:p>
+        </p:txBody>
       </p:sp>
       <p:sp>
         <p:nvSpPr>
@@ -17357,7 +17690,7 @@
           <a:bodyPr wrap="square" rtlCol="0" anchor="ctr"/>
           <a:lstStyle/>
           <a:p>
-            <a:pPr indent="0" marL="0">
+            <a:pPr marL="0" indent="0">
               <a:buNone/>
             </a:pPr>
             <a:r>
@@ -17399,6 +17732,13 @@
             <a:prstDash val="solid"/>
           </a:ln>
         </p:spPr>
+        <p:txBody>
+          <a:bodyPr/>
+          <a:lstStyle/>
+          <a:p>
+            <a:endParaRPr lang="es-CO"/>
+          </a:p>
+        </p:txBody>
       </p:sp>
       <p:sp>
         <p:nvSpPr>
@@ -17424,6 +17764,13 @@
             <a:prstDash val="solid"/>
           </a:ln>
         </p:spPr>
+        <p:txBody>
+          <a:bodyPr/>
+          <a:lstStyle/>
+          <a:p>
+            <a:endParaRPr lang="es-CO"/>
+          </a:p>
+        </p:txBody>
       </p:sp>
       <p:sp>
         <p:nvSpPr>
@@ -17446,7 +17793,7 @@
           <a:bodyPr wrap="square" rtlCol="0" anchor="ctr"/>
           <a:lstStyle/>
           <a:p>
-            <a:pPr indent="0" marL="0">
+            <a:pPr marL="0" indent="0">
               <a:buNone/>
             </a:pPr>
             <a:r>
@@ -17488,6 +17835,13 @@
             <a:prstDash val="solid"/>
           </a:ln>
         </p:spPr>
+        <p:txBody>
+          <a:bodyPr/>
+          <a:lstStyle/>
+          <a:p>
+            <a:endParaRPr lang="es-CO"/>
+          </a:p>
+        </p:txBody>
       </p:sp>
       <p:sp>
         <p:nvSpPr>
@@ -17513,6 +17867,13 @@
             <a:prstDash val="solid"/>
           </a:ln>
         </p:spPr>
+        <p:txBody>
+          <a:bodyPr/>
+          <a:lstStyle/>
+          <a:p>
+            <a:endParaRPr lang="es-CO"/>
+          </a:p>
+        </p:txBody>
       </p:sp>
       <p:sp>
         <p:nvSpPr>
@@ -17535,7 +17896,7 @@
           <a:bodyPr wrap="square" rtlCol="0" anchor="ctr"/>
           <a:lstStyle/>
           <a:p>
-            <a:pPr indent="0" marL="0">
+            <a:pPr marL="0" indent="0">
               <a:buNone/>
             </a:pPr>
             <a:r>
@@ -17577,6 +17938,13 @@
             <a:prstDash val="solid"/>
           </a:ln>
         </p:spPr>
+        <p:txBody>
+          <a:bodyPr/>
+          <a:lstStyle/>
+          <a:p>
+            <a:endParaRPr lang="es-CO"/>
+          </a:p>
+        </p:txBody>
       </p:sp>
       <p:sp>
         <p:nvSpPr>
@@ -17602,6 +17970,13 @@
             <a:prstDash val="solid"/>
           </a:ln>
         </p:spPr>
+        <p:txBody>
+          <a:bodyPr/>
+          <a:lstStyle/>
+          <a:p>
+            <a:endParaRPr lang="es-CO"/>
+          </a:p>
+        </p:txBody>
       </p:sp>
       <p:sp>
         <p:nvSpPr>
@@ -17624,7 +17999,7 @@
           <a:bodyPr wrap="square" rtlCol="0" anchor="ctr"/>
           <a:lstStyle/>
           <a:p>
-            <a:pPr indent="0" marL="0">
+            <a:pPr marL="0" indent="0">
               <a:buNone/>
             </a:pPr>
             <a:r>
@@ -17666,6 +18041,13 @@
             <a:prstDash val="solid"/>
           </a:ln>
         </p:spPr>
+        <p:txBody>
+          <a:bodyPr/>
+          <a:lstStyle/>
+          <a:p>
+            <a:endParaRPr lang="es-CO"/>
+          </a:p>
+        </p:txBody>
       </p:sp>
       <p:sp>
         <p:nvSpPr>
@@ -17691,6 +18073,13 @@
             <a:prstDash val="solid"/>
           </a:ln>
         </p:spPr>
+        <p:txBody>
+          <a:bodyPr/>
+          <a:lstStyle/>
+          <a:p>
+            <a:endParaRPr lang="es-CO"/>
+          </a:p>
+        </p:txBody>
       </p:sp>
       <p:sp>
         <p:nvSpPr>
@@ -17713,7 +18102,7 @@
           <a:bodyPr wrap="square" rtlCol="0" anchor="ctr"/>
           <a:lstStyle/>
           <a:p>
-            <a:pPr indent="0" marL="0">
+            <a:pPr marL="0" indent="0">
               <a:buNone/>
             </a:pPr>
             <a:r>
@@ -17755,6 +18144,13 @@
             <a:prstDash val="solid"/>
           </a:ln>
         </p:spPr>
+        <p:txBody>
+          <a:bodyPr/>
+          <a:lstStyle/>
+          <a:p>
+            <a:endParaRPr lang="es-CO"/>
+          </a:p>
+        </p:txBody>
       </p:sp>
       <p:sp>
         <p:nvSpPr>
@@ -17780,6 +18176,13 @@
             <a:prstDash val="solid"/>
           </a:ln>
         </p:spPr>
+        <p:txBody>
+          <a:bodyPr/>
+          <a:lstStyle/>
+          <a:p>
+            <a:endParaRPr lang="es-CO"/>
+          </a:p>
+        </p:txBody>
       </p:sp>
       <p:sp>
         <p:nvSpPr>
@@ -17802,7 +18205,7 @@
           <a:bodyPr wrap="square" rtlCol="0" anchor="ctr"/>
           <a:lstStyle/>
           <a:p>
-            <a:pPr indent="0" marL="0">
+            <a:pPr marL="0" indent="0">
               <a:buNone/>
             </a:pPr>
             <a:r>
@@ -17841,7 +18244,7 @@
           <a:bodyPr wrap="square" rtlCol="0" anchor="ctr"/>
           <a:lstStyle/>
           <a:p>
-            <a:pPr algn="r" indent="0" marL="0">
+            <a:pPr marL="0" indent="0" algn="r">
               <a:buNone/>
             </a:pPr>
             <a:r>
@@ -17875,6 +18278,7 @@
         <a:solidFill>
           <a:srgbClr val="0D1B2A"/>
         </a:solidFill>
+        <a:effectLst/>
       </p:bgPr>
     </p:bg>
     <p:spTree>
@@ -17915,6 +18319,13 @@
             <a:prstDash val="solid"/>
           </a:ln>
         </p:spPr>
+        <p:txBody>
+          <a:bodyPr/>
+          <a:lstStyle/>
+          <a:p>
+            <a:endParaRPr lang="es-CO"/>
+          </a:p>
+        </p:txBody>
       </p:sp>
       <p:sp>
         <p:nvSpPr>
@@ -17940,6 +18351,13 @@
             <a:prstDash val="solid"/>
           </a:ln>
         </p:spPr>
+        <p:txBody>
+          <a:bodyPr/>
+          <a:lstStyle/>
+          <a:p>
+            <a:endParaRPr lang="es-CO"/>
+          </a:p>
+        </p:txBody>
       </p:sp>
       <p:sp>
         <p:nvSpPr>
@@ -17962,7 +18380,7 @@
           <a:bodyPr wrap="square" lIns="0" tIns="0" rIns="0" bIns="0" rtlCol="0" anchor="ctr"/>
           <a:lstStyle/>
           <a:p>
-            <a:pPr algn="ctr" indent="0" marL="0">
+            <a:pPr marL="0" indent="0" algn="ctr">
               <a:buNone/>
             </a:pPr>
             <a:r>
@@ -18001,7 +18419,7 @@
           <a:bodyPr wrap="square" rtlCol="0" anchor="ctr"/>
           <a:lstStyle/>
           <a:p>
-            <a:pPr algn="l" indent="0" marL="0">
+            <a:pPr marL="0" indent="0" algn="l">
               <a:buNone/>
             </a:pPr>
             <a:r>
@@ -18040,7 +18458,7 @@
           <a:bodyPr wrap="square" rtlCol="0" anchor="ctr"/>
           <a:lstStyle/>
           <a:p>
-            <a:pPr algn="l" indent="0" marL="0">
+            <a:pPr marL="0" indent="0" algn="l">
               <a:buNone/>
             </a:pPr>
             <a:r>
@@ -18079,7 +18497,7 @@
           <a:bodyPr wrap="square" rtlCol="0" anchor="ctr"/>
           <a:lstStyle/>
           <a:p>
-            <a:pPr algn="l" indent="0" marL="0">
+            <a:pPr marL="0" indent="0" algn="l">
               <a:buNone/>
             </a:pPr>
             <a:r>
@@ -18121,6 +18539,13 @@
             <a:prstDash val="solid"/>
           </a:ln>
         </p:spPr>
+        <p:txBody>
+          <a:bodyPr/>
+          <a:lstStyle/>
+          <a:p>
+            <a:endParaRPr lang="es-CO"/>
+          </a:p>
+        </p:txBody>
       </p:sp>
     </p:spTree>
   </p:cSld>
@@ -18138,6 +18563,7 @@
         <a:solidFill>
           <a:srgbClr val="FFFFFF"/>
         </a:solidFill>
+        <a:effectLst/>
       </p:bgPr>
     </p:bg>
     <p:spTree>
@@ -18178,6 +18604,13 @@
             <a:prstDash val="solid"/>
           </a:ln>
         </p:spPr>
+        <p:txBody>
+          <a:bodyPr/>
+          <a:lstStyle/>
+          <a:p>
+            <a:endParaRPr lang="es-CO"/>
+          </a:p>
+        </p:txBody>
       </p:sp>
       <p:sp>
         <p:nvSpPr>
@@ -18200,7 +18633,7 @@
           <a:bodyPr wrap="square" rtlCol="0" anchor="ctr"/>
           <a:lstStyle/>
           <a:p>
-            <a:pPr indent="0" marL="0">
+            <a:pPr marL="0" indent="0">
               <a:buNone/>
             </a:pPr>
             <a:r>
@@ -18242,6 +18675,13 @@
             <a:prstDash val="solid"/>
           </a:ln>
         </p:spPr>
+        <p:txBody>
+          <a:bodyPr/>
+          <a:lstStyle/>
+          <a:p>
+            <a:endParaRPr lang="es-CO"/>
+          </a:p>
+        </p:txBody>
       </p:sp>
       <p:sp>
         <p:nvSpPr>
@@ -18412,7 +18852,7 @@
           <a:bodyPr wrap="square" rtlCol="0" anchor="ctr"/>
           <a:lstStyle/>
           <a:p>
-            <a:pPr algn="r" indent="0" marL="0">
+            <a:pPr marL="0" indent="0" algn="r">
               <a:buNone/>
             </a:pPr>
             <a:r>
@@ -18446,6 +18886,7 @@
         <a:solidFill>
           <a:srgbClr val="FFFFFF"/>
         </a:solidFill>
+        <a:effectLst/>
       </p:bgPr>
     </p:bg>
     <p:spTree>
@@ -18486,6 +18927,13 @@
             <a:prstDash val="solid"/>
           </a:ln>
         </p:spPr>
+        <p:txBody>
+          <a:bodyPr/>
+          <a:lstStyle/>
+          <a:p>
+            <a:endParaRPr lang="es-CO"/>
+          </a:p>
+        </p:txBody>
       </p:sp>
       <p:sp>
         <p:nvSpPr>
@@ -18508,7 +18956,7 @@
           <a:bodyPr wrap="square" rtlCol="0" anchor="ctr"/>
           <a:lstStyle/>
           <a:p>
-            <a:pPr indent="0" marL="0">
+            <a:pPr marL="0" indent="0">
               <a:buNone/>
             </a:pPr>
             <a:r>
@@ -18550,6 +18998,13 @@
             <a:prstDash val="solid"/>
           </a:ln>
         </p:spPr>
+        <p:txBody>
+          <a:bodyPr/>
+          <a:lstStyle/>
+          <a:p>
+            <a:endParaRPr lang="es-CO"/>
+          </a:p>
+        </p:txBody>
       </p:sp>
       <p:sp>
         <p:nvSpPr>
@@ -18804,7 +19259,7 @@
           <a:bodyPr wrap="square" rtlCol="0" anchor="ctr"/>
           <a:lstStyle/>
           <a:p>
-            <a:pPr algn="r" indent="0" marL="0">
+            <a:pPr marL="0" indent="0" algn="r">
               <a:buNone/>
             </a:pPr>
             <a:r>
@@ -18838,6 +19293,7 @@
         <a:solidFill>
           <a:srgbClr val="FFFFFF"/>
         </a:solidFill>
+        <a:effectLst/>
       </p:bgPr>
     </p:bg>
     <p:spTree>
@@ -18878,6 +19334,13 @@
             <a:prstDash val="solid"/>
           </a:ln>
         </p:spPr>
+        <p:txBody>
+          <a:bodyPr/>
+          <a:lstStyle/>
+          <a:p>
+            <a:endParaRPr lang="es-CO"/>
+          </a:p>
+        </p:txBody>
       </p:sp>
       <p:sp>
         <p:nvSpPr>
@@ -18900,7 +19363,7 @@
           <a:bodyPr wrap="square" rtlCol="0" anchor="ctr"/>
           <a:lstStyle/>
           <a:p>
-            <a:pPr indent="0" marL="0">
+            <a:pPr marL="0" indent="0">
               <a:buNone/>
             </a:pPr>
             <a:r>
@@ -18942,6 +19405,13 @@
             <a:prstDash val="solid"/>
           </a:ln>
         </p:spPr>
+        <p:txBody>
+          <a:bodyPr/>
+          <a:lstStyle/>
+          <a:p>
+            <a:endParaRPr lang="es-CO"/>
+          </a:p>
+        </p:txBody>
       </p:sp>
       <p:sp>
         <p:nvSpPr>
@@ -19196,7 +19666,7 @@
           <a:bodyPr wrap="square" rtlCol="0" anchor="ctr"/>
           <a:lstStyle/>
           <a:p>
-            <a:pPr algn="r" indent="0" marL="0">
+            <a:pPr marL="0" indent="0" algn="r">
               <a:buNone/>
             </a:pPr>
             <a:r>
@@ -19230,6 +19700,7 @@
         <a:solidFill>
           <a:srgbClr val="0D1B2A"/>
         </a:solidFill>
+        <a:effectLst/>
       </p:bgPr>
     </p:bg>
     <p:spTree>
@@ -19270,6 +19741,13 @@
             <a:prstDash val="solid"/>
           </a:ln>
         </p:spPr>
+        <p:txBody>
+          <a:bodyPr/>
+          <a:lstStyle/>
+          <a:p>
+            <a:endParaRPr lang="es-CO"/>
+          </a:p>
+        </p:txBody>
       </p:sp>
       <p:sp>
         <p:nvSpPr>
@@ -19292,7 +19770,7 @@
           <a:bodyPr wrap="square" rtlCol="0" anchor="ctr"/>
           <a:lstStyle/>
           <a:p>
-            <a:pPr indent="0" marL="0">
+            <a:pPr marL="0" indent="0">
               <a:buNone/>
             </a:pPr>
             <a:r>
@@ -19334,6 +19812,13 @@
             <a:prstDash val="solid"/>
           </a:ln>
         </p:spPr>
+        <p:txBody>
+          <a:bodyPr/>
+          <a:lstStyle/>
+          <a:p>
+            <a:endParaRPr lang="es-CO"/>
+          </a:p>
+        </p:txBody>
       </p:sp>
       <p:sp>
         <p:nvSpPr>
@@ -19588,7 +20073,7 @@
           <a:bodyPr wrap="square" rtlCol="0" anchor="ctr"/>
           <a:lstStyle/>
           <a:p>
-            <a:pPr algn="r" indent="0" marL="0">
+            <a:pPr marL="0" indent="0" algn="r">
               <a:buNone/>
             </a:pPr>
             <a:r>
@@ -19622,6 +20107,7 @@
         <a:solidFill>
           <a:srgbClr val="FFFFFF"/>
         </a:solidFill>
+        <a:effectLst/>
       </p:bgPr>
     </p:bg>
     <p:spTree>
@@ -19662,6 +20148,13 @@
             <a:prstDash val="solid"/>
           </a:ln>
         </p:spPr>
+        <p:txBody>
+          <a:bodyPr/>
+          <a:lstStyle/>
+          <a:p>
+            <a:endParaRPr lang="es-CO"/>
+          </a:p>
+        </p:txBody>
       </p:sp>
       <p:sp>
         <p:nvSpPr>
@@ -19684,7 +20177,7 @@
           <a:bodyPr wrap="square" rtlCol="0" anchor="ctr"/>
           <a:lstStyle/>
           <a:p>
-            <a:pPr indent="0" marL="0">
+            <a:pPr marL="0" indent="0">
               <a:buNone/>
             </a:pPr>
             <a:r>
@@ -19726,6 +20219,13 @@
             <a:prstDash val="solid"/>
           </a:ln>
         </p:spPr>
+        <p:txBody>
+          <a:bodyPr/>
+          <a:lstStyle/>
+          <a:p>
+            <a:endParaRPr lang="es-CO"/>
+          </a:p>
+        </p:txBody>
       </p:sp>
       <p:sp>
         <p:nvSpPr>
@@ -19959,7 +20459,7 @@
           <a:bodyPr wrap="square" rtlCol="0" anchor="ctr"/>
           <a:lstStyle/>
           <a:p>
-            <a:pPr algn="r" indent="0" marL="0">
+            <a:pPr marL="0" indent="0" algn="r">
               <a:buNone/>
             </a:pPr>
             <a:r>
@@ -19993,6 +20493,7 @@
         <a:solidFill>
           <a:srgbClr val="FFFFFF"/>
         </a:solidFill>
+        <a:effectLst/>
       </p:bgPr>
     </p:bg>
     <p:spTree>
@@ -20033,6 +20534,13 @@
             <a:prstDash val="solid"/>
           </a:ln>
         </p:spPr>
+        <p:txBody>
+          <a:bodyPr/>
+          <a:lstStyle/>
+          <a:p>
+            <a:endParaRPr lang="es-CO"/>
+          </a:p>
+        </p:txBody>
       </p:sp>
       <p:sp>
         <p:nvSpPr>
@@ -20055,7 +20563,7 @@
           <a:bodyPr wrap="square" rtlCol="0" anchor="ctr"/>
           <a:lstStyle/>
           <a:p>
-            <a:pPr indent="0" marL="0">
+            <a:pPr marL="0" indent="0">
               <a:buNone/>
             </a:pPr>
             <a:r>
@@ -20097,6 +20605,13 @@
             <a:prstDash val="solid"/>
           </a:ln>
         </p:spPr>
+        <p:txBody>
+          <a:bodyPr/>
+          <a:lstStyle/>
+          <a:p>
+            <a:endParaRPr lang="es-CO"/>
+          </a:p>
+        </p:txBody>
       </p:sp>
       <p:sp>
         <p:nvSpPr>
@@ -20122,6 +20637,13 @@
             <a:prstDash val="solid"/>
           </a:ln>
         </p:spPr>
+        <p:txBody>
+          <a:bodyPr/>
+          <a:lstStyle/>
+          <a:p>
+            <a:endParaRPr lang="es-CO"/>
+          </a:p>
+        </p:txBody>
       </p:sp>
       <p:sp>
         <p:nvSpPr>
@@ -20144,7 +20666,7 @@
           <a:bodyPr wrap="square" rtlCol="0" anchor="ctr"/>
           <a:lstStyle/>
           <a:p>
-            <a:pPr indent="0" marL="0">
+            <a:pPr marL="0" indent="0">
               <a:buNone/>
             </a:pPr>
             <a:r>
@@ -20355,6 +20877,13 @@
             <a:prstDash val="solid"/>
           </a:ln>
         </p:spPr>
+        <p:txBody>
+          <a:bodyPr/>
+          <a:lstStyle/>
+          <a:p>
+            <a:endParaRPr lang="es-CO"/>
+          </a:p>
+        </p:txBody>
       </p:sp>
       <p:sp>
         <p:nvSpPr>
@@ -20377,7 +20906,7 @@
           <a:bodyPr wrap="square" rtlCol="0" anchor="ctr"/>
           <a:lstStyle/>
           <a:p>
-            <a:pPr indent="0" marL="0">
+            <a:pPr marL="0" indent="0">
               <a:buNone/>
             </a:pPr>
             <a:r>
@@ -20585,7 +21114,7 @@
           <a:bodyPr wrap="square" rtlCol="0" anchor="ctr"/>
           <a:lstStyle/>
           <a:p>
-            <a:pPr algn="r" indent="0" marL="0">
+            <a:pPr marL="0" indent="0" algn="r">
               <a:buNone/>
             </a:pPr>
             <a:r>
@@ -20619,6 +21148,7 @@
         <a:solidFill>
           <a:srgbClr val="FFFFFF"/>
         </a:solidFill>
+        <a:effectLst/>
       </p:bgPr>
     </p:bg>
     <p:spTree>
@@ -20659,6 +21189,13 @@
             <a:prstDash val="solid"/>
           </a:ln>
         </p:spPr>
+        <p:txBody>
+          <a:bodyPr/>
+          <a:lstStyle/>
+          <a:p>
+            <a:endParaRPr lang="es-CO"/>
+          </a:p>
+        </p:txBody>
       </p:sp>
       <p:sp>
         <p:nvSpPr>
@@ -20681,7 +21218,7 @@
           <a:bodyPr wrap="square" rtlCol="0" anchor="ctr"/>
           <a:lstStyle/>
           <a:p>
-            <a:pPr indent="0" marL="0">
+            <a:pPr marL="0" indent="0">
               <a:buNone/>
             </a:pPr>
             <a:r>
@@ -20723,6 +21260,13 @@
             <a:prstDash val="solid"/>
           </a:ln>
         </p:spPr>
+        <p:txBody>
+          <a:bodyPr/>
+          <a:lstStyle/>
+          <a:p>
+            <a:endParaRPr lang="es-CO"/>
+          </a:p>
+        </p:txBody>
       </p:sp>
       <p:sp>
         <p:nvSpPr>
@@ -20977,7 +21521,7 @@
           <a:bodyPr wrap="square" rtlCol="0" anchor="ctr"/>
           <a:lstStyle/>
           <a:p>
-            <a:pPr algn="r" indent="0" marL="0">
+            <a:pPr marL="0" indent="0" algn="r">
               <a:buNone/>
             </a:pPr>
             <a:r>
@@ -21011,6 +21555,7 @@
         <a:solidFill>
           <a:srgbClr val="FFFFFF"/>
         </a:solidFill>
+        <a:effectLst/>
       </p:bgPr>
     </p:bg>
     <p:spTree>
@@ -21051,6 +21596,13 @@
             <a:prstDash val="solid"/>
           </a:ln>
         </p:spPr>
+        <p:txBody>
+          <a:bodyPr/>
+          <a:lstStyle/>
+          <a:p>
+            <a:endParaRPr lang="es-CO"/>
+          </a:p>
+        </p:txBody>
       </p:sp>
       <p:sp>
         <p:nvSpPr>
@@ -21073,7 +21625,7 @@
           <a:bodyPr wrap="square" rtlCol="0" anchor="ctr"/>
           <a:lstStyle/>
           <a:p>
-            <a:pPr indent="0" marL="0">
+            <a:pPr marL="0" indent="0">
               <a:buNone/>
             </a:pPr>
             <a:r>
@@ -21112,7 +21664,7 @@
           <a:bodyPr wrap="square" rtlCol="0" anchor="ctr"/>
           <a:lstStyle/>
           <a:p>
-            <a:pPr indent="0" marL="0">
+            <a:pPr marL="0" indent="0">
               <a:buNone/>
             </a:pPr>
             <a:r>
@@ -21154,6 +21706,13 @@
             <a:prstDash val="solid"/>
           </a:ln>
         </p:spPr>
+        <p:txBody>
+          <a:bodyPr/>
+          <a:lstStyle/>
+          <a:p>
+            <a:endParaRPr lang="es-CO"/>
+          </a:p>
+        </p:txBody>
       </p:sp>
       <p:sp>
         <p:nvSpPr>
@@ -21176,7 +21735,7 @@
           <a:bodyPr wrap="square" lIns="0" tIns="0" rIns="0" bIns="0" rtlCol="0" anchor="ctr"/>
           <a:lstStyle/>
           <a:p>
-            <a:pPr algn="ctr" indent="0" marL="0">
+            <a:pPr marL="0" indent="0" algn="ctr">
               <a:buNone/>
             </a:pPr>
             <a:r>
@@ -21215,7 +21774,7 @@
           <a:bodyPr wrap="square" rtlCol="0" anchor="ctr"/>
           <a:lstStyle/>
           <a:p>
-            <a:pPr indent="0" marL="0">
+            <a:pPr marL="0" indent="0">
               <a:buNone/>
             </a:pPr>
             <a:r>
@@ -21405,6 +21964,13 @@
             <a:prstDash val="solid"/>
           </a:ln>
         </p:spPr>
+        <p:txBody>
+          <a:bodyPr/>
+          <a:lstStyle/>
+          <a:p>
+            <a:endParaRPr lang="es-CO"/>
+          </a:p>
+        </p:txBody>
       </p:sp>
       <p:sp>
         <p:nvSpPr>
@@ -21427,7 +21993,7 @@
           <a:bodyPr wrap="square" rtlCol="0" anchor="ctr"/>
           <a:lstStyle/>
           <a:p>
-            <a:pPr indent="0" marL="0">
+            <a:pPr marL="0" indent="0">
               <a:buNone/>
             </a:pPr>
             <a:r>
@@ -21466,7 +22032,7 @@
           <a:bodyPr wrap="square" rtlCol="0" anchor="ctr"/>
           <a:lstStyle/>
           <a:p>
-            <a:pPr algn="r" indent="0" marL="0">
+            <a:pPr marL="0" indent="0" algn="r">
               <a:buNone/>
             </a:pPr>
             <a:r>
@@ -21500,6 +22066,7 @@
         <a:solidFill>
           <a:srgbClr val="1A237E"/>
         </a:solidFill>
+        <a:effectLst/>
       </p:bgPr>
     </p:bg>
     <p:spTree>
@@ -21540,6 +22107,13 @@
             <a:prstDash val="solid"/>
           </a:ln>
         </p:spPr>
+        <p:txBody>
+          <a:bodyPr/>
+          <a:lstStyle/>
+          <a:p>
+            <a:endParaRPr lang="es-CO"/>
+          </a:p>
+        </p:txBody>
       </p:sp>
       <p:sp>
         <p:nvSpPr>
@@ -21562,7 +22136,7 @@
           <a:bodyPr wrap="square" rtlCol="0" anchor="ctr"/>
           <a:lstStyle/>
           <a:p>
-            <a:pPr indent="0" marL="0">
+            <a:pPr marL="0" indent="0">
               <a:buNone/>
             </a:pPr>
             <a:r>
@@ -21604,6 +22178,13 @@
             <a:prstDash val="solid"/>
           </a:ln>
         </p:spPr>
+        <p:txBody>
+          <a:bodyPr/>
+          <a:lstStyle/>
+          <a:p>
+            <a:endParaRPr lang="es-CO"/>
+          </a:p>
+        </p:txBody>
       </p:sp>
       <p:sp>
         <p:nvSpPr>
@@ -21629,6 +22210,13 @@
             <a:prstDash val="solid"/>
           </a:ln>
         </p:spPr>
+        <p:txBody>
+          <a:bodyPr/>
+          <a:lstStyle/>
+          <a:p>
+            <a:endParaRPr lang="es-CO"/>
+          </a:p>
+        </p:txBody>
       </p:sp>
       <p:sp>
         <p:nvSpPr>
@@ -21651,7 +22239,7 @@
           <a:bodyPr wrap="square" lIns="0" tIns="0" rIns="0" bIns="0" rtlCol="0" anchor="ctr"/>
           <a:lstStyle/>
           <a:p>
-            <a:pPr algn="ctr" indent="0" marL="0">
+            <a:pPr marL="0" indent="0" algn="ctr">
               <a:buNone/>
             </a:pPr>
             <a:r>
@@ -21690,7 +22278,7 @@
           <a:bodyPr wrap="square" rtlCol="0" anchor="ctr"/>
           <a:lstStyle/>
           <a:p>
-            <a:pPr indent="0" marL="0">
+            <a:pPr marL="0" indent="0">
               <a:buNone/>
             </a:pPr>
             <a:r>
@@ -21732,6 +22320,13 @@
             <a:prstDash val="solid"/>
           </a:ln>
         </p:spPr>
+        <p:txBody>
+          <a:bodyPr/>
+          <a:lstStyle/>
+          <a:p>
+            <a:endParaRPr lang="es-CO"/>
+          </a:p>
+        </p:txBody>
       </p:sp>
       <p:sp>
         <p:nvSpPr>
@@ -21754,7 +22349,7 @@
           <a:bodyPr wrap="square" lIns="0" tIns="0" rIns="0" bIns="0" rtlCol="0" anchor="ctr"/>
           <a:lstStyle/>
           <a:p>
-            <a:pPr algn="ctr" indent="0" marL="0">
+            <a:pPr marL="0" indent="0" algn="ctr">
               <a:buNone/>
             </a:pPr>
             <a:r>
@@ -21793,7 +22388,7 @@
           <a:bodyPr wrap="square" rtlCol="0" anchor="ctr"/>
           <a:lstStyle/>
           <a:p>
-            <a:pPr indent="0" marL="0">
+            <a:pPr marL="0" indent="0">
               <a:buNone/>
             </a:pPr>
             <a:r>
@@ -21835,6 +22430,13 @@
             <a:prstDash val="solid"/>
           </a:ln>
         </p:spPr>
+        <p:txBody>
+          <a:bodyPr/>
+          <a:lstStyle/>
+          <a:p>
+            <a:endParaRPr lang="es-CO"/>
+          </a:p>
+        </p:txBody>
       </p:sp>
       <p:sp>
         <p:nvSpPr>
@@ -21857,7 +22459,7 @@
           <a:bodyPr wrap="square" lIns="0" tIns="0" rIns="0" bIns="0" rtlCol="0" anchor="ctr"/>
           <a:lstStyle/>
           <a:p>
-            <a:pPr algn="ctr" indent="0" marL="0">
+            <a:pPr marL="0" indent="0" algn="ctr">
               <a:buNone/>
             </a:pPr>
             <a:r>
@@ -21896,7 +22498,7 @@
           <a:bodyPr wrap="square" rtlCol="0" anchor="ctr"/>
           <a:lstStyle/>
           <a:p>
-            <a:pPr indent="0" marL="0">
+            <a:pPr marL="0" indent="0">
               <a:buNone/>
             </a:pPr>
             <a:r>
@@ -21938,6 +22540,13 @@
             <a:prstDash val="solid"/>
           </a:ln>
         </p:spPr>
+        <p:txBody>
+          <a:bodyPr/>
+          <a:lstStyle/>
+          <a:p>
+            <a:endParaRPr lang="es-CO"/>
+          </a:p>
+        </p:txBody>
       </p:sp>
       <p:sp>
         <p:nvSpPr>
@@ -21960,7 +22569,7 @@
           <a:bodyPr wrap="square" lIns="0" tIns="0" rIns="0" bIns="0" rtlCol="0" anchor="ctr"/>
           <a:lstStyle/>
           <a:p>
-            <a:pPr algn="ctr" indent="0" marL="0">
+            <a:pPr marL="0" indent="0" algn="ctr">
               <a:buNone/>
             </a:pPr>
             <a:r>
@@ -21999,7 +22608,7 @@
           <a:bodyPr wrap="square" rtlCol="0" anchor="ctr"/>
           <a:lstStyle/>
           <a:p>
-            <a:pPr indent="0" marL="0">
+            <a:pPr marL="0" indent="0">
               <a:buNone/>
             </a:pPr>
             <a:r>
@@ -22038,7 +22647,7 @@
           <a:bodyPr wrap="square" rtlCol="0" anchor="ctr"/>
           <a:lstStyle/>
           <a:p>
-            <a:pPr algn="r" indent="0" marL="0">
+            <a:pPr marL="0" indent="0" algn="r">
               <a:buNone/>
             </a:pPr>
             <a:r>
@@ -22072,6 +22681,7 @@
         <a:solidFill>
           <a:srgbClr val="0D1B2A"/>
         </a:solidFill>
+        <a:effectLst/>
       </p:bgPr>
     </p:bg>
     <p:spTree>
@@ -22112,6 +22722,13 @@
             <a:prstDash val="solid"/>
           </a:ln>
         </p:spPr>
+        <p:txBody>
+          <a:bodyPr/>
+          <a:lstStyle/>
+          <a:p>
+            <a:endParaRPr lang="es-CO"/>
+          </a:p>
+        </p:txBody>
       </p:sp>
       <p:sp>
         <p:nvSpPr>
@@ -22134,7 +22751,7 @@
           <a:bodyPr wrap="square" rtlCol="0" anchor="ctr"/>
           <a:lstStyle/>
           <a:p>
-            <a:pPr indent="0" marL="0">
+            <a:pPr marL="0" indent="0">
               <a:buNone/>
             </a:pPr>
             <a:r>
@@ -22176,6 +22793,13 @@
             <a:prstDash val="solid"/>
           </a:ln>
         </p:spPr>
+        <p:txBody>
+          <a:bodyPr/>
+          <a:lstStyle/>
+          <a:p>
+            <a:endParaRPr lang="es-CO"/>
+          </a:p>
+        </p:txBody>
       </p:sp>
       <p:sp>
         <p:nvSpPr>
@@ -22201,6 +22825,13 @@
             <a:prstDash val="solid"/>
           </a:ln>
         </p:spPr>
+        <p:txBody>
+          <a:bodyPr/>
+          <a:lstStyle/>
+          <a:p>
+            <a:endParaRPr lang="es-CO"/>
+          </a:p>
+        </p:txBody>
       </p:sp>
       <p:sp>
         <p:nvSpPr>
@@ -22223,7 +22854,7 @@
           <a:bodyPr wrap="square" rtlCol="0" anchor="ctr"/>
           <a:lstStyle/>
           <a:p>
-            <a:pPr indent="0" marL="0">
+            <a:pPr marL="0" indent="0">
               <a:buNone/>
             </a:pPr>
             <a:r>
@@ -22265,6 +22896,13 @@
             <a:prstDash val="solid"/>
           </a:ln>
         </p:spPr>
+        <p:txBody>
+          <a:bodyPr/>
+          <a:lstStyle/>
+          <a:p>
+            <a:endParaRPr lang="es-CO"/>
+          </a:p>
+        </p:txBody>
       </p:sp>
       <p:sp>
         <p:nvSpPr>
@@ -22290,6 +22928,13 @@
             <a:prstDash val="solid"/>
           </a:ln>
         </p:spPr>
+        <p:txBody>
+          <a:bodyPr/>
+          <a:lstStyle/>
+          <a:p>
+            <a:endParaRPr lang="es-CO"/>
+          </a:p>
+        </p:txBody>
       </p:sp>
       <p:sp>
         <p:nvSpPr>
@@ -22312,7 +22957,7 @@
           <a:bodyPr wrap="square" rtlCol="0" anchor="ctr"/>
           <a:lstStyle/>
           <a:p>
-            <a:pPr indent="0" marL="0">
+            <a:pPr marL="0" indent="0">
               <a:buNone/>
             </a:pPr>
             <a:r>
@@ -22354,6 +22999,13 @@
             <a:prstDash val="solid"/>
           </a:ln>
         </p:spPr>
+        <p:txBody>
+          <a:bodyPr/>
+          <a:lstStyle/>
+          <a:p>
+            <a:endParaRPr lang="es-CO"/>
+          </a:p>
+        </p:txBody>
       </p:sp>
       <p:sp>
         <p:nvSpPr>
@@ -22379,6 +23031,13 @@
             <a:prstDash val="solid"/>
           </a:ln>
         </p:spPr>
+        <p:txBody>
+          <a:bodyPr/>
+          <a:lstStyle/>
+          <a:p>
+            <a:endParaRPr lang="es-CO"/>
+          </a:p>
+        </p:txBody>
       </p:sp>
       <p:sp>
         <p:nvSpPr>
@@ -22401,7 +23060,7 @@
           <a:bodyPr wrap="square" rtlCol="0" anchor="ctr"/>
           <a:lstStyle/>
           <a:p>
-            <a:pPr indent="0" marL="0">
+            <a:pPr marL="0" indent="0">
               <a:buNone/>
             </a:pPr>
             <a:r>
@@ -22443,6 +23102,13 @@
             <a:prstDash val="solid"/>
           </a:ln>
         </p:spPr>
+        <p:txBody>
+          <a:bodyPr/>
+          <a:lstStyle/>
+          <a:p>
+            <a:endParaRPr lang="es-CO"/>
+          </a:p>
+        </p:txBody>
       </p:sp>
       <p:sp>
         <p:nvSpPr>
@@ -22468,6 +23134,13 @@
             <a:prstDash val="solid"/>
           </a:ln>
         </p:spPr>
+        <p:txBody>
+          <a:bodyPr/>
+          <a:lstStyle/>
+          <a:p>
+            <a:endParaRPr lang="es-CO"/>
+          </a:p>
+        </p:txBody>
       </p:sp>
       <p:sp>
         <p:nvSpPr>
@@ -22490,7 +23163,7 @@
           <a:bodyPr wrap="square" rtlCol="0" anchor="ctr"/>
           <a:lstStyle/>
           <a:p>
-            <a:pPr indent="0" marL="0">
+            <a:pPr marL="0" indent="0">
               <a:buNone/>
             </a:pPr>
             <a:r>
@@ -22532,6 +23205,13 @@
             <a:prstDash val="solid"/>
           </a:ln>
         </p:spPr>
+        <p:txBody>
+          <a:bodyPr/>
+          <a:lstStyle/>
+          <a:p>
+            <a:endParaRPr lang="es-CO"/>
+          </a:p>
+        </p:txBody>
       </p:sp>
       <p:sp>
         <p:nvSpPr>
@@ -22557,6 +23237,13 @@
             <a:prstDash val="solid"/>
           </a:ln>
         </p:spPr>
+        <p:txBody>
+          <a:bodyPr/>
+          <a:lstStyle/>
+          <a:p>
+            <a:endParaRPr lang="es-CO"/>
+          </a:p>
+        </p:txBody>
       </p:sp>
       <p:sp>
         <p:nvSpPr>
@@ -22579,7 +23266,7 @@
           <a:bodyPr wrap="square" rtlCol="0" anchor="ctr"/>
           <a:lstStyle/>
           <a:p>
-            <a:pPr indent="0" marL="0">
+            <a:pPr marL="0" indent="0">
               <a:buNone/>
             </a:pPr>
             <a:r>
@@ -22621,6 +23308,13 @@
             <a:prstDash val="solid"/>
           </a:ln>
         </p:spPr>
+        <p:txBody>
+          <a:bodyPr/>
+          <a:lstStyle/>
+          <a:p>
+            <a:endParaRPr lang="es-CO"/>
+          </a:p>
+        </p:txBody>
       </p:sp>
       <p:sp>
         <p:nvSpPr>
@@ -22646,6 +23340,13 @@
             <a:prstDash val="solid"/>
           </a:ln>
         </p:spPr>
+        <p:txBody>
+          <a:bodyPr/>
+          <a:lstStyle/>
+          <a:p>
+            <a:endParaRPr lang="es-CO"/>
+          </a:p>
+        </p:txBody>
       </p:sp>
       <p:sp>
         <p:nvSpPr>
@@ -22668,7 +23369,7 @@
           <a:bodyPr wrap="square" rtlCol="0" anchor="ctr"/>
           <a:lstStyle/>
           <a:p>
-            <a:pPr indent="0" marL="0">
+            <a:pPr marL="0" indent="0">
               <a:buNone/>
             </a:pPr>
             <a:r>
@@ -22707,7 +23408,7 @@
           <a:bodyPr wrap="square" rtlCol="0" anchor="ctr"/>
           <a:lstStyle/>
           <a:p>
-            <a:pPr algn="r" indent="0" marL="0">
+            <a:pPr marL="0" indent="0" algn="r">
               <a:buNone/>
             </a:pPr>
             <a:r>
@@ -22741,6 +23442,7 @@
         <a:solidFill>
           <a:srgbClr val="0D1B2A"/>
         </a:solidFill>
+        <a:effectLst/>
       </p:bgPr>
     </p:bg>
     <p:spTree>
@@ -22781,6 +23483,13 @@
             <a:prstDash val="solid"/>
           </a:ln>
         </p:spPr>
+        <p:txBody>
+          <a:bodyPr/>
+          <a:lstStyle/>
+          <a:p>
+            <a:endParaRPr lang="es-CO"/>
+          </a:p>
+        </p:txBody>
       </p:sp>
       <p:sp>
         <p:nvSpPr>
@@ -22806,6 +23515,13 @@
             <a:prstDash val="solid"/>
           </a:ln>
         </p:spPr>
+        <p:txBody>
+          <a:bodyPr/>
+          <a:lstStyle/>
+          <a:p>
+            <a:endParaRPr lang="es-CO"/>
+          </a:p>
+        </p:txBody>
       </p:sp>
       <p:sp>
         <p:nvSpPr>
@@ -22828,7 +23544,7 @@
           <a:bodyPr wrap="square" lIns="0" tIns="0" rIns="0" bIns="0" rtlCol="0" anchor="ctr"/>
           <a:lstStyle/>
           <a:p>
-            <a:pPr algn="ctr" indent="0" marL="0">
+            <a:pPr marL="0" indent="0" algn="ctr">
               <a:buNone/>
             </a:pPr>
             <a:r>
@@ -22867,7 +23583,7 @@
           <a:bodyPr wrap="square" rtlCol="0" anchor="ctr"/>
           <a:lstStyle/>
           <a:p>
-            <a:pPr algn="l" indent="0" marL="0">
+            <a:pPr marL="0" indent="0" algn="l">
               <a:buNone/>
             </a:pPr>
             <a:r>
@@ -22906,7 +23622,7 @@
           <a:bodyPr wrap="square" rtlCol="0" anchor="ctr"/>
           <a:lstStyle/>
           <a:p>
-            <a:pPr algn="l" indent="0" marL="0">
+            <a:pPr marL="0" indent="0" algn="l">
               <a:buNone/>
             </a:pPr>
             <a:r>
@@ -22945,7 +23661,7 @@
           <a:bodyPr wrap="square" rtlCol="0" anchor="ctr"/>
           <a:lstStyle/>
           <a:p>
-            <a:pPr algn="l" indent="0" marL="0">
+            <a:pPr marL="0" indent="0" algn="l">
               <a:buNone/>
             </a:pPr>
             <a:r>
@@ -22987,6 +23703,13 @@
             <a:prstDash val="solid"/>
           </a:ln>
         </p:spPr>
+        <p:txBody>
+          <a:bodyPr/>
+          <a:lstStyle/>
+          <a:p>
+            <a:endParaRPr lang="es-CO"/>
+          </a:p>
+        </p:txBody>
       </p:sp>
     </p:spTree>
   </p:cSld>
@@ -23004,6 +23727,7 @@
         <a:solidFill>
           <a:srgbClr val="FFFFFF"/>
         </a:solidFill>
+        <a:effectLst/>
       </p:bgPr>
     </p:bg>
     <p:spTree>
@@ -23044,6 +23768,13 @@
             <a:prstDash val="solid"/>
           </a:ln>
         </p:spPr>
+        <p:txBody>
+          <a:bodyPr/>
+          <a:lstStyle/>
+          <a:p>
+            <a:endParaRPr lang="es-CO"/>
+          </a:p>
+        </p:txBody>
       </p:sp>
       <p:sp>
         <p:nvSpPr>
@@ -23066,7 +23797,7 @@
           <a:bodyPr wrap="square" rtlCol="0" anchor="ctr"/>
           <a:lstStyle/>
           <a:p>
-            <a:pPr indent="0" marL="0">
+            <a:pPr marL="0" indent="0">
               <a:buNone/>
             </a:pPr>
             <a:r>
@@ -23108,6 +23839,13 @@
             <a:prstDash val="solid"/>
           </a:ln>
         </p:spPr>
+        <p:txBody>
+          <a:bodyPr/>
+          <a:lstStyle/>
+          <a:p>
+            <a:endParaRPr lang="es-CO"/>
+          </a:p>
+        </p:txBody>
       </p:sp>
       <p:sp>
         <p:nvSpPr>
@@ -23278,7 +24016,7 @@
           <a:bodyPr wrap="square" rtlCol="0" anchor="ctr"/>
           <a:lstStyle/>
           <a:p>
-            <a:pPr algn="r" indent="0" marL="0">
+            <a:pPr marL="0" indent="0" algn="r">
               <a:buNone/>
             </a:pPr>
             <a:r>
@@ -23312,6 +24050,7 @@
         <a:solidFill>
           <a:srgbClr val="FFFFFF"/>
         </a:solidFill>
+        <a:effectLst/>
       </p:bgPr>
     </p:bg>
     <p:spTree>
@@ -23352,6 +24091,13 @@
             <a:prstDash val="solid"/>
           </a:ln>
         </p:spPr>
+        <p:txBody>
+          <a:bodyPr/>
+          <a:lstStyle/>
+          <a:p>
+            <a:endParaRPr lang="es-CO"/>
+          </a:p>
+        </p:txBody>
       </p:sp>
       <p:sp>
         <p:nvSpPr>
@@ -23374,7 +24120,7 @@
           <a:bodyPr wrap="square" rtlCol="0" anchor="ctr"/>
           <a:lstStyle/>
           <a:p>
-            <a:pPr indent="0" marL="0">
+            <a:pPr marL="0" indent="0">
               <a:buNone/>
             </a:pPr>
             <a:r>
@@ -23416,6 +24162,13 @@
             <a:prstDash val="solid"/>
           </a:ln>
         </p:spPr>
+        <p:txBody>
+          <a:bodyPr/>
+          <a:lstStyle/>
+          <a:p>
+            <a:endParaRPr lang="es-CO"/>
+          </a:p>
+        </p:txBody>
       </p:sp>
       <p:sp>
         <p:nvSpPr>
@@ -23670,7 +24423,7 @@
           <a:bodyPr wrap="square" rtlCol="0" anchor="ctr"/>
           <a:lstStyle/>
           <a:p>
-            <a:pPr algn="r" indent="0" marL="0">
+            <a:pPr marL="0" indent="0" algn="r">
               <a:buNone/>
             </a:pPr>
             <a:r>
@@ -23704,6 +24457,7 @@
         <a:solidFill>
           <a:srgbClr val="FFFFFF"/>
         </a:solidFill>
+        <a:effectLst/>
       </p:bgPr>
     </p:bg>
     <p:spTree>
@@ -23744,6 +24498,13 @@
             <a:prstDash val="solid"/>
           </a:ln>
         </p:spPr>
+        <p:txBody>
+          <a:bodyPr/>
+          <a:lstStyle/>
+          <a:p>
+            <a:endParaRPr lang="es-CO"/>
+          </a:p>
+        </p:txBody>
       </p:sp>
       <p:sp>
         <p:nvSpPr>
@@ -23766,7 +24527,7 @@
           <a:bodyPr wrap="square" rtlCol="0" anchor="ctr"/>
           <a:lstStyle/>
           <a:p>
-            <a:pPr indent="0" marL="0">
+            <a:pPr marL="0" indent="0">
               <a:buNone/>
             </a:pPr>
             <a:r>
@@ -23808,6 +24569,13 @@
             <a:prstDash val="solid"/>
           </a:ln>
         </p:spPr>
+        <p:txBody>
+          <a:bodyPr/>
+          <a:lstStyle/>
+          <a:p>
+            <a:endParaRPr lang="es-CO"/>
+          </a:p>
+        </p:txBody>
       </p:sp>
       <p:sp>
         <p:nvSpPr>
@@ -23833,6 +24601,13 @@
             <a:prstDash val="solid"/>
           </a:ln>
         </p:spPr>
+        <p:txBody>
+          <a:bodyPr/>
+          <a:lstStyle/>
+          <a:p>
+            <a:endParaRPr lang="es-CO"/>
+          </a:p>
+        </p:txBody>
       </p:sp>
       <p:sp>
         <p:nvSpPr>
@@ -23855,7 +24630,7 @@
           <a:bodyPr wrap="square" rtlCol="0" anchor="ctr"/>
           <a:lstStyle/>
           <a:p>
-            <a:pPr indent="0" marL="0">
+            <a:pPr marL="0" indent="0">
               <a:buNone/>
             </a:pPr>
             <a:r>
@@ -24066,6 +24841,13 @@
             <a:prstDash val="solid"/>
           </a:ln>
         </p:spPr>
+        <p:txBody>
+          <a:bodyPr/>
+          <a:lstStyle/>
+          <a:p>
+            <a:endParaRPr lang="es-CO"/>
+          </a:p>
+        </p:txBody>
       </p:sp>
       <p:sp>
         <p:nvSpPr>
@@ -24088,7 +24870,7 @@
           <a:bodyPr wrap="square" rtlCol="0" anchor="ctr"/>
           <a:lstStyle/>
           <a:p>
-            <a:pPr indent="0" marL="0">
+            <a:pPr marL="0" indent="0">
               <a:buNone/>
             </a:pPr>
             <a:r>
@@ -24296,7 +25078,7 @@
           <a:bodyPr wrap="square" rtlCol="0" anchor="ctr"/>
           <a:lstStyle/>
           <a:p>
-            <a:pPr algn="r" indent="0" marL="0">
+            <a:pPr marL="0" indent="0" algn="r">
               <a:buNone/>
             </a:pPr>
             <a:r>
@@ -24330,6 +25112,7 @@
         <a:solidFill>
           <a:srgbClr val="0D1B2A"/>
         </a:solidFill>
+        <a:effectLst/>
       </p:bgPr>
     </p:bg>
     <p:spTree>
@@ -24370,6 +25153,13 @@
             <a:prstDash val="solid"/>
           </a:ln>
         </p:spPr>
+        <p:txBody>
+          <a:bodyPr/>
+          <a:lstStyle/>
+          <a:p>
+            <a:endParaRPr lang="es-CO"/>
+          </a:p>
+        </p:txBody>
       </p:sp>
       <p:sp>
         <p:nvSpPr>
@@ -24392,7 +25182,7 @@
           <a:bodyPr wrap="square" rtlCol="0" anchor="ctr"/>
           <a:lstStyle/>
           <a:p>
-            <a:pPr indent="0" marL="0">
+            <a:pPr marL="0" indent="0">
               <a:buNone/>
             </a:pPr>
             <a:r>
@@ -24434,6 +25224,13 @@
             <a:prstDash val="solid"/>
           </a:ln>
         </p:spPr>
+        <p:txBody>
+          <a:bodyPr/>
+          <a:lstStyle/>
+          <a:p>
+            <a:endParaRPr lang="es-CO"/>
+          </a:p>
+        </p:txBody>
       </p:sp>
       <p:sp>
         <p:nvSpPr>
@@ -24709,7 +25506,7 @@
           <a:bodyPr wrap="square" rtlCol="0" anchor="ctr"/>
           <a:lstStyle/>
           <a:p>
-            <a:pPr algn="r" indent="0" marL="0">
+            <a:pPr marL="0" indent="0" algn="r">
               <a:buNone/>
             </a:pPr>
             <a:r>
@@ -24743,6 +25540,7 @@
         <a:solidFill>
           <a:srgbClr val="FFFFFF"/>
         </a:solidFill>
+        <a:effectLst/>
       </p:bgPr>
     </p:bg>
     <p:spTree>
@@ -24783,6 +25581,13 @@
             <a:prstDash val="solid"/>
           </a:ln>
         </p:spPr>
+        <p:txBody>
+          <a:bodyPr/>
+          <a:lstStyle/>
+          <a:p>
+            <a:endParaRPr lang="es-CO"/>
+          </a:p>
+        </p:txBody>
       </p:sp>
       <p:sp>
         <p:nvSpPr>
@@ -24805,7 +25610,7 @@
           <a:bodyPr wrap="square" rtlCol="0" anchor="ctr"/>
           <a:lstStyle/>
           <a:p>
-            <a:pPr indent="0" marL="0">
+            <a:pPr marL="0" indent="0">
               <a:buNone/>
             </a:pPr>
             <a:r>
@@ -24847,6 +25652,13 @@
             <a:prstDash val="solid"/>
           </a:ln>
         </p:spPr>
+        <p:txBody>
+          <a:bodyPr/>
+          <a:lstStyle/>
+          <a:p>
+            <a:endParaRPr lang="es-CO"/>
+          </a:p>
+        </p:txBody>
       </p:sp>
       <p:sp>
         <p:nvSpPr>
@@ -25122,7 +25934,7 @@
           <a:bodyPr wrap="square" rtlCol="0" anchor="ctr"/>
           <a:lstStyle/>
           <a:p>
-            <a:pPr algn="r" indent="0" marL="0">
+            <a:pPr marL="0" indent="0" algn="r">
               <a:buNone/>
             </a:pPr>
             <a:r>
@@ -25156,6 +25968,7 @@
         <a:solidFill>
           <a:srgbClr val="FFFFFF"/>
         </a:solidFill>
+        <a:effectLst/>
       </p:bgPr>
     </p:bg>
     <p:spTree>
@@ -25196,6 +26009,13 @@
             <a:prstDash val="solid"/>
           </a:ln>
         </p:spPr>
+        <p:txBody>
+          <a:bodyPr/>
+          <a:lstStyle/>
+          <a:p>
+            <a:endParaRPr lang="es-CO"/>
+          </a:p>
+        </p:txBody>
       </p:sp>
       <p:sp>
         <p:nvSpPr>
@@ -25218,7 +26038,7 @@
           <a:bodyPr wrap="square" rtlCol="0" anchor="ctr"/>
           <a:lstStyle/>
           <a:p>
-            <a:pPr indent="0" marL="0">
+            <a:pPr marL="0" indent="0">
               <a:buNone/>
             </a:pPr>
             <a:r>
@@ -25260,6 +26080,13 @@
             <a:prstDash val="solid"/>
           </a:ln>
         </p:spPr>
+        <p:txBody>
+          <a:bodyPr/>
+          <a:lstStyle/>
+          <a:p>
+            <a:endParaRPr lang="es-CO"/>
+          </a:p>
+        </p:txBody>
       </p:sp>
       <p:sp>
         <p:nvSpPr>
@@ -25472,7 +26299,7 @@
           <a:bodyPr wrap="square" rtlCol="0" anchor="ctr"/>
           <a:lstStyle/>
           <a:p>
-            <a:pPr algn="r" indent="0" marL="0">
+            <a:pPr marL="0" indent="0" algn="r">
               <a:buNone/>
             </a:pPr>
             <a:r>
@@ -25506,6 +26333,7 @@
         <a:solidFill>
           <a:srgbClr val="FFFFFF"/>
         </a:solidFill>
+        <a:effectLst/>
       </p:bgPr>
     </p:bg>
     <p:spTree>
@@ -25546,6 +26374,13 @@
             <a:prstDash val="solid"/>
           </a:ln>
         </p:spPr>
+        <p:txBody>
+          <a:bodyPr/>
+          <a:lstStyle/>
+          <a:p>
+            <a:endParaRPr lang="es-CO"/>
+          </a:p>
+        </p:txBody>
       </p:sp>
       <p:sp>
         <p:nvSpPr>
@@ -25568,7 +26403,7 @@
           <a:bodyPr wrap="square" rtlCol="0" anchor="ctr"/>
           <a:lstStyle/>
           <a:p>
-            <a:pPr indent="0" marL="0">
+            <a:pPr marL="0" indent="0">
               <a:buNone/>
             </a:pPr>
             <a:r>
@@ -25610,6 +26445,13 @@
             <a:prstDash val="solid"/>
           </a:ln>
         </p:spPr>
+        <p:txBody>
+          <a:bodyPr/>
+          <a:lstStyle/>
+          <a:p>
+            <a:endParaRPr lang="es-CO"/>
+          </a:p>
+        </p:txBody>
       </p:sp>
       <p:sp>
         <p:nvSpPr>
@@ -25864,7 +26706,7 @@
           <a:bodyPr wrap="square" rtlCol="0" anchor="ctr"/>
           <a:lstStyle/>
           <a:p>
-            <a:pPr algn="r" indent="0" marL="0">
+            <a:pPr marL="0" indent="0" algn="r">
               <a:buNone/>
             </a:pPr>
             <a:r>
@@ -25898,6 +26740,7 @@
         <a:solidFill>
           <a:srgbClr val="FFFFFF"/>
         </a:solidFill>
+        <a:effectLst/>
       </p:bgPr>
     </p:bg>
     <p:spTree>
@@ -25938,6 +26781,13 @@
             <a:prstDash val="solid"/>
           </a:ln>
         </p:spPr>
+        <p:txBody>
+          <a:bodyPr/>
+          <a:lstStyle/>
+          <a:p>
+            <a:endParaRPr lang="es-CO"/>
+          </a:p>
+        </p:txBody>
       </p:sp>
       <p:sp>
         <p:nvSpPr>
@@ -25960,7 +26810,7 @@
           <a:bodyPr wrap="square" rtlCol="0" anchor="ctr"/>
           <a:lstStyle/>
           <a:p>
-            <a:pPr indent="0" marL="0">
+            <a:pPr marL="0" indent="0">
               <a:buNone/>
             </a:pPr>
             <a:r>
@@ -25999,7 +26849,7 @@
           <a:bodyPr wrap="square" rtlCol="0" anchor="ctr"/>
           <a:lstStyle/>
           <a:p>
-            <a:pPr indent="0" marL="0">
+            <a:pPr marL="0" indent="0">
               <a:buNone/>
             </a:pPr>
             <a:r>
@@ -26041,6 +26891,13 @@
             <a:prstDash val="solid"/>
           </a:ln>
         </p:spPr>
+        <p:txBody>
+          <a:bodyPr/>
+          <a:lstStyle/>
+          <a:p>
+            <a:endParaRPr lang="es-CO"/>
+          </a:p>
+        </p:txBody>
       </p:sp>
       <p:sp>
         <p:nvSpPr>
@@ -26063,7 +26920,7 @@
           <a:bodyPr wrap="square" lIns="0" tIns="0" rIns="0" bIns="0" rtlCol="0" anchor="ctr"/>
           <a:lstStyle/>
           <a:p>
-            <a:pPr algn="ctr" indent="0" marL="0">
+            <a:pPr marL="0" indent="0" algn="ctr">
               <a:buNone/>
             </a:pPr>
             <a:r>
@@ -26102,7 +26959,7 @@
           <a:bodyPr wrap="square" rtlCol="0" anchor="ctr"/>
           <a:lstStyle/>
           <a:p>
-            <a:pPr indent="0" marL="0">
+            <a:pPr marL="0" indent="0">
               <a:buNone/>
             </a:pPr>
             <a:r>
@@ -26292,6 +27149,13 @@
             <a:prstDash val="solid"/>
           </a:ln>
         </p:spPr>
+        <p:txBody>
+          <a:bodyPr/>
+          <a:lstStyle/>
+          <a:p>
+            <a:endParaRPr lang="es-CO"/>
+          </a:p>
+        </p:txBody>
       </p:sp>
       <p:sp>
         <p:nvSpPr>
@@ -26314,7 +27178,7 @@
           <a:bodyPr wrap="square" rtlCol="0" anchor="ctr"/>
           <a:lstStyle/>
           <a:p>
-            <a:pPr indent="0" marL="0">
+            <a:pPr marL="0" indent="0">
               <a:buNone/>
             </a:pPr>
             <a:r>
@@ -26353,7 +27217,7 @@
           <a:bodyPr wrap="square" rtlCol="0" anchor="ctr"/>
           <a:lstStyle/>
           <a:p>
-            <a:pPr algn="r" indent="0" marL="0">
+            <a:pPr marL="0" indent="0" algn="r">
               <a:buNone/>
             </a:pPr>
             <a:r>
@@ -26387,6 +27251,7 @@
         <a:solidFill>
           <a:srgbClr val="1A237E"/>
         </a:solidFill>
+        <a:effectLst/>
       </p:bgPr>
     </p:bg>
     <p:spTree>
@@ -26427,6 +27292,13 @@
             <a:prstDash val="solid"/>
           </a:ln>
         </p:spPr>
+        <p:txBody>
+          <a:bodyPr/>
+          <a:lstStyle/>
+          <a:p>
+            <a:endParaRPr lang="es-CO"/>
+          </a:p>
+        </p:txBody>
       </p:sp>
       <p:sp>
         <p:nvSpPr>
@@ -26449,7 +27321,7 @@
           <a:bodyPr wrap="square" rtlCol="0" anchor="ctr"/>
           <a:lstStyle/>
           <a:p>
-            <a:pPr indent="0" marL="0">
+            <a:pPr marL="0" indent="0">
               <a:buNone/>
             </a:pPr>
             <a:r>
@@ -26491,6 +27363,13 @@
             <a:prstDash val="solid"/>
           </a:ln>
         </p:spPr>
+        <p:txBody>
+          <a:bodyPr/>
+          <a:lstStyle/>
+          <a:p>
+            <a:endParaRPr lang="es-CO"/>
+          </a:p>
+        </p:txBody>
       </p:sp>
       <p:sp>
         <p:nvSpPr>
@@ -26516,6 +27395,13 @@
             <a:prstDash val="solid"/>
           </a:ln>
         </p:spPr>
+        <p:txBody>
+          <a:bodyPr/>
+          <a:lstStyle/>
+          <a:p>
+            <a:endParaRPr lang="es-CO"/>
+          </a:p>
+        </p:txBody>
       </p:sp>
       <p:sp>
         <p:nvSpPr>
@@ -26538,7 +27424,7 @@
           <a:bodyPr wrap="square" lIns="0" tIns="0" rIns="0" bIns="0" rtlCol="0" anchor="ctr"/>
           <a:lstStyle/>
           <a:p>
-            <a:pPr algn="ctr" indent="0" marL="0">
+            <a:pPr marL="0" indent="0" algn="ctr">
               <a:buNone/>
             </a:pPr>
             <a:r>
@@ -26577,7 +27463,7 @@
           <a:bodyPr wrap="square" rtlCol="0" anchor="ctr"/>
           <a:lstStyle/>
           <a:p>
-            <a:pPr indent="0" marL="0">
+            <a:pPr marL="0" indent="0">
               <a:buNone/>
             </a:pPr>
             <a:r>
@@ -26619,6 +27505,13 @@
             <a:prstDash val="solid"/>
           </a:ln>
         </p:spPr>
+        <p:txBody>
+          <a:bodyPr/>
+          <a:lstStyle/>
+          <a:p>
+            <a:endParaRPr lang="es-CO"/>
+          </a:p>
+        </p:txBody>
       </p:sp>
       <p:sp>
         <p:nvSpPr>
@@ -26641,7 +27534,7 @@
           <a:bodyPr wrap="square" lIns="0" tIns="0" rIns="0" bIns="0" rtlCol="0" anchor="ctr"/>
           <a:lstStyle/>
           <a:p>
-            <a:pPr algn="ctr" indent="0" marL="0">
+            <a:pPr marL="0" indent="0" algn="ctr">
               <a:buNone/>
             </a:pPr>
             <a:r>
@@ -26680,7 +27573,7 @@
           <a:bodyPr wrap="square" rtlCol="0" anchor="ctr"/>
           <a:lstStyle/>
           <a:p>
-            <a:pPr indent="0" marL="0">
+            <a:pPr marL="0" indent="0">
               <a:buNone/>
             </a:pPr>
             <a:r>
@@ -26722,6 +27615,13 @@
             <a:prstDash val="solid"/>
           </a:ln>
         </p:spPr>
+        <p:txBody>
+          <a:bodyPr/>
+          <a:lstStyle/>
+          <a:p>
+            <a:endParaRPr lang="es-CO"/>
+          </a:p>
+        </p:txBody>
       </p:sp>
       <p:sp>
         <p:nvSpPr>
@@ -26744,7 +27644,7 @@
           <a:bodyPr wrap="square" lIns="0" tIns="0" rIns="0" bIns="0" rtlCol="0" anchor="ctr"/>
           <a:lstStyle/>
           <a:p>
-            <a:pPr algn="ctr" indent="0" marL="0">
+            <a:pPr marL="0" indent="0" algn="ctr">
               <a:buNone/>
             </a:pPr>
             <a:r>
@@ -26783,7 +27683,7 @@
           <a:bodyPr wrap="square" rtlCol="0" anchor="ctr"/>
           <a:lstStyle/>
           <a:p>
-            <a:pPr indent="0" marL="0">
+            <a:pPr marL="0" indent="0">
               <a:buNone/>
             </a:pPr>
             <a:r>
@@ -26825,6 +27725,13 @@
             <a:prstDash val="solid"/>
           </a:ln>
         </p:spPr>
+        <p:txBody>
+          <a:bodyPr/>
+          <a:lstStyle/>
+          <a:p>
+            <a:endParaRPr lang="es-CO"/>
+          </a:p>
+        </p:txBody>
       </p:sp>
       <p:sp>
         <p:nvSpPr>
@@ -26847,7 +27754,7 @@
           <a:bodyPr wrap="square" lIns="0" tIns="0" rIns="0" bIns="0" rtlCol="0" anchor="ctr"/>
           <a:lstStyle/>
           <a:p>
-            <a:pPr algn="ctr" indent="0" marL="0">
+            <a:pPr marL="0" indent="0" algn="ctr">
               <a:buNone/>
             </a:pPr>
             <a:r>
@@ -26886,7 +27793,7 @@
           <a:bodyPr wrap="square" rtlCol="0" anchor="ctr"/>
           <a:lstStyle/>
           <a:p>
-            <a:pPr indent="0" marL="0">
+            <a:pPr marL="0" indent="0">
               <a:buNone/>
             </a:pPr>
             <a:r>
@@ -26925,7 +27832,7 @@
           <a:bodyPr wrap="square" rtlCol="0" anchor="ctr"/>
           <a:lstStyle/>
           <a:p>
-            <a:pPr algn="r" indent="0" marL="0">
+            <a:pPr marL="0" indent="0" algn="r">
               <a:buNone/>
             </a:pPr>
             <a:r>
@@ -26959,6 +27866,7 @@
         <a:solidFill>
           <a:srgbClr val="0D1B2A"/>
         </a:solidFill>
+        <a:effectLst/>
       </p:bgPr>
     </p:bg>
     <p:spTree>
@@ -26999,6 +27907,13 @@
             <a:prstDash val="solid"/>
           </a:ln>
         </p:spPr>
+        <p:txBody>
+          <a:bodyPr/>
+          <a:lstStyle/>
+          <a:p>
+            <a:endParaRPr lang="es-CO"/>
+          </a:p>
+        </p:txBody>
       </p:sp>
       <p:sp>
         <p:nvSpPr>
@@ -27021,7 +27936,7 @@
           <a:bodyPr wrap="square" rtlCol="0" anchor="ctr"/>
           <a:lstStyle/>
           <a:p>
-            <a:pPr indent="0" marL="0">
+            <a:pPr marL="0" indent="0">
               <a:buNone/>
             </a:pPr>
             <a:r>
@@ -27063,6 +27978,13 @@
             <a:prstDash val="solid"/>
           </a:ln>
         </p:spPr>
+        <p:txBody>
+          <a:bodyPr/>
+          <a:lstStyle/>
+          <a:p>
+            <a:endParaRPr lang="es-CO"/>
+          </a:p>
+        </p:txBody>
       </p:sp>
       <p:sp>
         <p:nvSpPr>
@@ -27088,6 +28010,13 @@
             <a:prstDash val="solid"/>
           </a:ln>
         </p:spPr>
+        <p:txBody>
+          <a:bodyPr/>
+          <a:lstStyle/>
+          <a:p>
+            <a:endParaRPr lang="es-CO"/>
+          </a:p>
+        </p:txBody>
       </p:sp>
       <p:sp>
         <p:nvSpPr>
@@ -27110,7 +28039,7 @@
           <a:bodyPr wrap="square" rtlCol="0" anchor="ctr"/>
           <a:lstStyle/>
           <a:p>
-            <a:pPr indent="0" marL="0">
+            <a:pPr marL="0" indent="0">
               <a:buNone/>
             </a:pPr>
             <a:r>
@@ -27152,6 +28081,13 @@
             <a:prstDash val="solid"/>
           </a:ln>
         </p:spPr>
+        <p:txBody>
+          <a:bodyPr/>
+          <a:lstStyle/>
+          <a:p>
+            <a:endParaRPr lang="es-CO"/>
+          </a:p>
+        </p:txBody>
       </p:sp>
       <p:sp>
         <p:nvSpPr>
@@ -27177,6 +28113,13 @@
             <a:prstDash val="solid"/>
           </a:ln>
         </p:spPr>
+        <p:txBody>
+          <a:bodyPr/>
+          <a:lstStyle/>
+          <a:p>
+            <a:endParaRPr lang="es-CO"/>
+          </a:p>
+        </p:txBody>
       </p:sp>
       <p:sp>
         <p:nvSpPr>
@@ -27199,7 +28142,7 @@
           <a:bodyPr wrap="square" rtlCol="0" anchor="ctr"/>
           <a:lstStyle/>
           <a:p>
-            <a:pPr indent="0" marL="0">
+            <a:pPr marL="0" indent="0">
               <a:buNone/>
             </a:pPr>
             <a:r>
@@ -27241,6 +28184,13 @@
             <a:prstDash val="solid"/>
           </a:ln>
         </p:spPr>
+        <p:txBody>
+          <a:bodyPr/>
+          <a:lstStyle/>
+          <a:p>
+            <a:endParaRPr lang="es-CO"/>
+          </a:p>
+        </p:txBody>
       </p:sp>
       <p:sp>
         <p:nvSpPr>
@@ -27266,6 +28216,13 @@
             <a:prstDash val="solid"/>
           </a:ln>
         </p:spPr>
+        <p:txBody>
+          <a:bodyPr/>
+          <a:lstStyle/>
+          <a:p>
+            <a:endParaRPr lang="es-CO"/>
+          </a:p>
+        </p:txBody>
       </p:sp>
       <p:sp>
         <p:nvSpPr>
@@ -27288,7 +28245,7 @@
           <a:bodyPr wrap="square" rtlCol="0" anchor="ctr"/>
           <a:lstStyle/>
           <a:p>
-            <a:pPr indent="0" marL="0">
+            <a:pPr marL="0" indent="0">
               <a:buNone/>
             </a:pPr>
             <a:r>
@@ -27330,6 +28287,13 @@
             <a:prstDash val="solid"/>
           </a:ln>
         </p:spPr>
+        <p:txBody>
+          <a:bodyPr/>
+          <a:lstStyle/>
+          <a:p>
+            <a:endParaRPr lang="es-CO"/>
+          </a:p>
+        </p:txBody>
       </p:sp>
       <p:sp>
         <p:nvSpPr>
@@ -27355,6 +28319,13 @@
             <a:prstDash val="solid"/>
           </a:ln>
         </p:spPr>
+        <p:txBody>
+          <a:bodyPr/>
+          <a:lstStyle/>
+          <a:p>
+            <a:endParaRPr lang="es-CO"/>
+          </a:p>
+        </p:txBody>
       </p:sp>
       <p:sp>
         <p:nvSpPr>
@@ -27377,7 +28348,7 @@
           <a:bodyPr wrap="square" rtlCol="0" anchor="ctr"/>
           <a:lstStyle/>
           <a:p>
-            <a:pPr indent="0" marL="0">
+            <a:pPr marL="0" indent="0">
               <a:buNone/>
             </a:pPr>
             <a:r>
@@ -27419,6 +28390,13 @@
             <a:prstDash val="solid"/>
           </a:ln>
         </p:spPr>
+        <p:txBody>
+          <a:bodyPr/>
+          <a:lstStyle/>
+          <a:p>
+            <a:endParaRPr lang="es-CO"/>
+          </a:p>
+        </p:txBody>
       </p:sp>
       <p:sp>
         <p:nvSpPr>
@@ -27444,6 +28422,13 @@
             <a:prstDash val="solid"/>
           </a:ln>
         </p:spPr>
+        <p:txBody>
+          <a:bodyPr/>
+          <a:lstStyle/>
+          <a:p>
+            <a:endParaRPr lang="es-CO"/>
+          </a:p>
+        </p:txBody>
       </p:sp>
       <p:sp>
         <p:nvSpPr>
@@ -27466,7 +28451,7 @@
           <a:bodyPr wrap="square" rtlCol="0" anchor="ctr"/>
           <a:lstStyle/>
           <a:p>
-            <a:pPr indent="0" marL="0">
+            <a:pPr marL="0" indent="0">
               <a:buNone/>
             </a:pPr>
             <a:r>
@@ -27508,6 +28493,13 @@
             <a:prstDash val="solid"/>
           </a:ln>
         </p:spPr>
+        <p:txBody>
+          <a:bodyPr/>
+          <a:lstStyle/>
+          <a:p>
+            <a:endParaRPr lang="es-CO"/>
+          </a:p>
+        </p:txBody>
       </p:sp>
       <p:sp>
         <p:nvSpPr>
@@ -27533,6 +28525,13 @@
             <a:prstDash val="solid"/>
           </a:ln>
         </p:spPr>
+        <p:txBody>
+          <a:bodyPr/>
+          <a:lstStyle/>
+          <a:p>
+            <a:endParaRPr lang="es-CO"/>
+          </a:p>
+        </p:txBody>
       </p:sp>
       <p:sp>
         <p:nvSpPr>
@@ -27555,7 +28554,7 @@
           <a:bodyPr wrap="square" rtlCol="0" anchor="ctr"/>
           <a:lstStyle/>
           <a:p>
-            <a:pPr indent="0" marL="0">
+            <a:pPr marL="0" indent="0">
               <a:buNone/>
             </a:pPr>
             <a:r>
@@ -27594,7 +28593,7 @@
           <a:bodyPr wrap="square" rtlCol="0" anchor="ctr"/>
           <a:lstStyle/>
           <a:p>
-            <a:pPr algn="r" indent="0" marL="0">
+            <a:pPr marL="0" indent="0" algn="r">
               <a:buNone/>
             </a:pPr>
             <a:r>
@@ -27628,6 +28627,7 @@
         <a:solidFill>
           <a:srgbClr val="FFFFFF"/>
         </a:solidFill>
+        <a:effectLst/>
       </p:bgPr>
     </p:bg>
     <p:spTree>
@@ -27668,6 +28668,13 @@
             <a:prstDash val="solid"/>
           </a:ln>
         </p:spPr>
+        <p:txBody>
+          <a:bodyPr/>
+          <a:lstStyle/>
+          <a:p>
+            <a:endParaRPr lang="es-CO"/>
+          </a:p>
+        </p:txBody>
       </p:sp>
       <p:sp>
         <p:nvSpPr>
@@ -27690,7 +28697,7 @@
           <a:bodyPr wrap="square" rtlCol="0" anchor="ctr"/>
           <a:lstStyle/>
           <a:p>
-            <a:pPr indent="0" marL="0">
+            <a:pPr marL="0" indent="0">
               <a:buNone/>
             </a:pPr>
             <a:r>
@@ -27732,10 +28739,17 @@
             <a:prstDash val="solid"/>
           </a:ln>
         </p:spPr>
+        <p:txBody>
+          <a:bodyPr/>
+          <a:lstStyle/>
+          <a:p>
+            <a:endParaRPr lang="es-CO"/>
+          </a:p>
+        </p:txBody>
       </p:sp>
       <p:graphicFrame>
         <p:nvGraphicFramePr>
-          <p:cNvPr id="5" name="Chart 0" descr=""/>
+          <p:cNvPr id="5" name="Chart 0"/>
           <p:cNvGraphicFramePr/>
           <p:nvPr/>
         </p:nvGraphicFramePr>
@@ -27743,9 +28757,9 @@
           <a:off x="457200" y="1005840"/>
           <a:ext cx="8229600" cy="3840480"/>
         </p:xfrm>
-        <a:graphic xmlns:a="http://schemas.openxmlformats.org/drawingml/2006/main">
+        <a:graphic>
           <a:graphicData uri="http://schemas.openxmlformats.org/drawingml/2006/chart">
-            <c:chart xmlns:c="http://schemas.openxmlformats.org/drawingml/2006/chart" r:id="rId1"/>
+            <c:chart xmlns:c="http://schemas.openxmlformats.org/drawingml/2006/chart" xmlns:r="http://schemas.openxmlformats.org/officeDocument/2006/relationships" r:id="rId3"/>
           </a:graphicData>
         </a:graphic>
       </p:graphicFrame>
@@ -27770,7 +28784,7 @@
           <a:bodyPr wrap="square" rtlCol="0" anchor="ctr"/>
           <a:lstStyle/>
           <a:p>
-            <a:pPr algn="r" indent="0" marL="0">
+            <a:pPr marL="0" indent="0" algn="r">
               <a:buNone/>
             </a:pPr>
             <a:r>
@@ -27804,6 +28818,7 @@
         <a:solidFill>
           <a:srgbClr val="FFFFFF"/>
         </a:solidFill>
+        <a:effectLst/>
       </p:bgPr>
     </p:bg>
     <p:spTree>
@@ -27844,6 +28859,13 @@
             <a:prstDash val="solid"/>
           </a:ln>
         </p:spPr>
+        <p:txBody>
+          <a:bodyPr/>
+          <a:lstStyle/>
+          <a:p>
+            <a:endParaRPr lang="es-CO"/>
+          </a:p>
+        </p:txBody>
       </p:sp>
       <p:sp>
         <p:nvSpPr>
@@ -27866,7 +28888,7 @@
           <a:bodyPr wrap="square" rtlCol="0" anchor="ctr"/>
           <a:lstStyle/>
           <a:p>
-            <a:pPr indent="0" marL="0">
+            <a:pPr marL="0" indent="0">
               <a:buNone/>
             </a:pPr>
             <a:r>
@@ -27908,6 +28930,13 @@
             <a:prstDash val="solid"/>
           </a:ln>
         </p:spPr>
+        <p:txBody>
+          <a:bodyPr/>
+          <a:lstStyle/>
+          <a:p>
+            <a:endParaRPr lang="es-CO"/>
+          </a:p>
+        </p:txBody>
       </p:sp>
       <p:sp>
         <p:nvSpPr>
@@ -28162,7 +29191,7 @@
           <a:bodyPr wrap="square" rtlCol="0" anchor="ctr"/>
           <a:lstStyle/>
           <a:p>
-            <a:pPr algn="r" indent="0" marL="0">
+            <a:pPr marL="0" indent="0" algn="r">
               <a:buNone/>
             </a:pPr>
             <a:r>
@@ -28196,6 +29225,7 @@
         <a:solidFill>
           <a:srgbClr val="FFFFFF"/>
         </a:solidFill>
+        <a:effectLst/>
       </p:bgPr>
     </p:bg>
     <p:spTree>
@@ -28236,6 +29266,13 @@
             <a:prstDash val="solid"/>
           </a:ln>
         </p:spPr>
+        <p:txBody>
+          <a:bodyPr/>
+          <a:lstStyle/>
+          <a:p>
+            <a:endParaRPr lang="es-CO"/>
+          </a:p>
+        </p:txBody>
       </p:sp>
       <p:sp>
         <p:nvSpPr>
@@ -28258,7 +29295,7 @@
           <a:bodyPr wrap="square" rtlCol="0" anchor="ctr"/>
           <a:lstStyle/>
           <a:p>
-            <a:pPr indent="0" marL="0">
+            <a:pPr marL="0" indent="0">
               <a:buNone/>
             </a:pPr>
             <a:r>
@@ -28300,6 +29337,13 @@
             <a:prstDash val="solid"/>
           </a:ln>
         </p:spPr>
+        <p:txBody>
+          <a:bodyPr/>
+          <a:lstStyle/>
+          <a:p>
+            <a:endParaRPr lang="es-CO"/>
+          </a:p>
+        </p:txBody>
       </p:sp>
       <p:sp>
         <p:nvSpPr>
@@ -28554,7 +29598,7 @@
           <a:bodyPr wrap="square" rtlCol="0" anchor="ctr"/>
           <a:lstStyle/>
           <a:p>
-            <a:pPr algn="r" indent="0" marL="0">
+            <a:pPr marL="0" indent="0" algn="r">
               <a:buNone/>
             </a:pPr>
             <a:r>
@@ -28588,6 +29632,7 @@
         <a:solidFill>
           <a:srgbClr val="FFFFFF"/>
         </a:solidFill>
+        <a:effectLst/>
       </p:bgPr>
     </p:bg>
     <p:spTree>
@@ -28628,6 +29673,13 @@
             <a:prstDash val="solid"/>
           </a:ln>
         </p:spPr>
+        <p:txBody>
+          <a:bodyPr/>
+          <a:lstStyle/>
+          <a:p>
+            <a:endParaRPr lang="es-CO"/>
+          </a:p>
+        </p:txBody>
       </p:sp>
       <p:sp>
         <p:nvSpPr>
@@ -28650,7 +29702,7 @@
           <a:bodyPr wrap="square" rtlCol="0" anchor="ctr"/>
           <a:lstStyle/>
           <a:p>
-            <a:pPr indent="0" marL="0">
+            <a:pPr marL="0" indent="0">
               <a:buNone/>
             </a:pPr>
             <a:r>
@@ -28692,6 +29744,13 @@
             <a:prstDash val="solid"/>
           </a:ln>
         </p:spPr>
+        <p:txBody>
+          <a:bodyPr/>
+          <a:lstStyle/>
+          <a:p>
+            <a:endParaRPr lang="es-CO"/>
+          </a:p>
+        </p:txBody>
       </p:sp>
       <p:sp>
         <p:nvSpPr>
@@ -28946,7 +30005,7 @@
           <a:bodyPr wrap="square" rtlCol="0" anchor="ctr"/>
           <a:lstStyle/>
           <a:p>
-            <a:pPr algn="r" indent="0" marL="0">
+            <a:pPr marL="0" indent="0" algn="r">
               <a:buNone/>
             </a:pPr>
             <a:r>
@@ -29265,4 +30324,319 @@
     </a:ext>
   </a:extLst>
 </a:theme>
+</file>
+
+<file path=ppt/theme/theme2.xml><?xml version="1.0" encoding="utf-8"?>
+<a:theme xmlns:a="http://schemas.openxmlformats.org/drawingml/2006/main" name="Tema de Office">
+  <a:themeElements>
+    <a:clrScheme name="Office">
+      <a:dk1>
+        <a:sysClr val="windowText" lastClr="000000"/>
+      </a:dk1>
+      <a:lt1>
+        <a:sysClr val="window" lastClr="FFFFFF"/>
+      </a:lt1>
+      <a:dk2>
+        <a:srgbClr val="0E2841"/>
+      </a:dk2>
+      <a:lt2>
+        <a:srgbClr val="E8E8E8"/>
+      </a:lt2>
+      <a:accent1>
+        <a:srgbClr val="156082"/>
+      </a:accent1>
+      <a:accent2>
+        <a:srgbClr val="E97132"/>
+      </a:accent2>
+      <a:accent3>
+        <a:srgbClr val="196B24"/>
+      </a:accent3>
+      <a:accent4>
+        <a:srgbClr val="0F9ED5"/>
+      </a:accent4>
+      <a:accent5>
+        <a:srgbClr val="A02B93"/>
+      </a:accent5>
+      <a:accent6>
+        <a:srgbClr val="4EA72E"/>
+      </a:accent6>
+      <a:hlink>
+        <a:srgbClr val="467886"/>
+      </a:hlink>
+      <a:folHlink>
+        <a:srgbClr val="96607D"/>
+      </a:folHlink>
+    </a:clrScheme>
+    <a:fontScheme name="Office">
+      <a:majorFont>
+        <a:latin typeface="Aptos Display" panose="02110004020202020204"/>
+        <a:ea typeface=""/>
+        <a:cs typeface=""/>
+        <a:font script="Jpan" typeface="游ゴシック Light"/>
+        <a:font script="Hang" typeface="맑은 고딕"/>
+        <a:font script="Hans" typeface="等线 Light"/>
+        <a:font script="Hant" typeface="新細明體"/>
+        <a:font script="Arab" typeface="Times New Roman"/>
+        <a:font script="Hebr" typeface="Times New Roman"/>
+        <a:font script="Thai" typeface="Angsana New"/>
+        <a:font script="Ethi" typeface="Nyala"/>
+        <a:font script="Beng" typeface="Vrinda"/>
+        <a:font script="Gujr" typeface="Shruti"/>
+        <a:font script="Khmr" typeface="MoolBoran"/>
+        <a:font script="Knda" typeface="Tunga"/>
+        <a:font script="Guru" typeface="Raavi"/>
+        <a:font script="Cans" typeface="Euphemia"/>
+        <a:font script="Cher" typeface="Plantagenet Cherokee"/>
+        <a:font script="Yiii" typeface="Microsoft Yi Baiti"/>
+        <a:font script="Tibt" typeface="Microsoft Himalaya"/>
+        <a:font script="Thaa" typeface="MV Boli"/>
+        <a:font script="Deva" typeface="Mangal"/>
+        <a:font script="Telu" typeface="Gautami"/>
+        <a:font script="Taml" typeface="Latha"/>
+        <a:font script="Syrc" typeface="Estrangelo Edessa"/>
+        <a:font script="Orya" typeface="Kalinga"/>
+        <a:font script="Mlym" typeface="Kartika"/>
+        <a:font script="Laoo" typeface="DokChampa"/>
+        <a:font script="Sinh" typeface="Iskoola Pota"/>
+        <a:font script="Mong" typeface="Mongolian Baiti"/>
+        <a:font script="Viet" typeface="Times New Roman"/>
+        <a:font script="Uigh" typeface="Microsoft Uighur"/>
+        <a:font script="Geor" typeface="Sylfaen"/>
+        <a:font script="Armn" typeface="Arial"/>
+        <a:font script="Bugi" typeface="Leelawadee UI"/>
+        <a:font script="Bopo" typeface="Microsoft JhengHei"/>
+        <a:font script="Java" typeface="Javanese Text"/>
+        <a:font script="Lisu" typeface="Segoe UI"/>
+        <a:font script="Mymr" typeface="Myanmar Text"/>
+        <a:font script="Nkoo" typeface="Ebrima"/>
+        <a:font script="Olck" typeface="Nirmala UI"/>
+        <a:font script="Osma" typeface="Ebrima"/>
+        <a:font script="Phag" typeface="Phagspa"/>
+        <a:font script="Syrn" typeface="Estrangelo Edessa"/>
+        <a:font script="Syrj" typeface="Estrangelo Edessa"/>
+        <a:font script="Syre" typeface="Estrangelo Edessa"/>
+        <a:font script="Sora" typeface="Nirmala UI"/>
+        <a:font script="Tale" typeface="Microsoft Tai Le"/>
+        <a:font script="Talu" typeface="Microsoft New Tai Lue"/>
+        <a:font script="Tfng" typeface="Ebrima"/>
+      </a:majorFont>
+      <a:minorFont>
+        <a:latin typeface="Aptos" panose="02110004020202020204"/>
+        <a:ea typeface=""/>
+        <a:cs typeface=""/>
+        <a:font script="Jpan" typeface="游ゴシック"/>
+        <a:font script="Hang" typeface="맑은 고딕"/>
+        <a:font script="Hans" typeface="等线"/>
+        <a:font script="Hant" typeface="新細明體"/>
+        <a:font script="Arab" typeface="Arial"/>
+        <a:font script="Hebr" typeface="Arial"/>
+        <a:font script="Thai" typeface="Cordia New"/>
+        <a:font script="Ethi" typeface="Nyala"/>
+        <a:font script="Beng" typeface="Vrinda"/>
+        <a:font script="Gujr" typeface="Shruti"/>
+        <a:font script="Khmr" typeface="DaunPenh"/>
+        <a:font script="Knda" typeface="Tunga"/>
+        <a:font script="Guru" typeface="Raavi"/>
+        <a:font script="Cans" typeface="Euphemia"/>
+        <a:font script="Cher" typeface="Plantagenet Cherokee"/>
+        <a:font script="Yiii" typeface="Microsoft Yi Baiti"/>
+        <a:font script="Tibt" typeface="Microsoft Himalaya"/>
+        <a:font script="Thaa" typeface="MV Boli"/>
+        <a:font script="Deva" typeface="Mangal"/>
+        <a:font script="Telu" typeface="Gautami"/>
+        <a:font script="Taml" typeface="Latha"/>
+        <a:font script="Syrc" typeface="Estrangelo Edessa"/>
+        <a:font script="Orya" typeface="Kalinga"/>
+        <a:font script="Mlym" typeface="Kartika"/>
+        <a:font script="Laoo" typeface="DokChampa"/>
+        <a:font script="Sinh" typeface="Iskoola Pota"/>
+        <a:font script="Mong" typeface="Mongolian Baiti"/>
+        <a:font script="Viet" typeface="Arial"/>
+        <a:font script="Uigh" typeface="Microsoft Uighur"/>
+        <a:font script="Geor" typeface="Sylfaen"/>
+        <a:font script="Armn" typeface="Arial"/>
+        <a:font script="Bugi" typeface="Leelawadee UI"/>
+        <a:font script="Bopo" typeface="Microsoft JhengHei"/>
+        <a:font script="Java" typeface="Javanese Text"/>
+        <a:font script="Lisu" typeface="Segoe UI"/>
+        <a:font script="Mymr" typeface="Myanmar Text"/>
+        <a:font script="Nkoo" typeface="Ebrima"/>
+        <a:font script="Olck" typeface="Nirmala UI"/>
+        <a:font script="Osma" typeface="Ebrima"/>
+        <a:font script="Phag" typeface="Phagspa"/>
+        <a:font script="Syrn" typeface="Estrangelo Edessa"/>
+        <a:font script="Syrj" typeface="Estrangelo Edessa"/>
+        <a:font script="Syre" typeface="Estrangelo Edessa"/>
+        <a:font script="Sora" typeface="Nirmala UI"/>
+        <a:font script="Tale" typeface="Microsoft Tai Le"/>
+        <a:font script="Talu" typeface="Microsoft New Tai Lue"/>
+        <a:font script="Tfng" typeface="Ebrima"/>
+      </a:minorFont>
+    </a:fontScheme>
+    <a:fmtScheme name="Office">
+      <a:fillStyleLst>
+        <a:solidFill>
+          <a:schemeClr val="phClr"/>
+        </a:solidFill>
+        <a:gradFill rotWithShape="1">
+          <a:gsLst>
+            <a:gs pos="0">
+              <a:schemeClr val="phClr">
+                <a:lumMod val="110000"/>
+                <a:satMod val="105000"/>
+                <a:tint val="67000"/>
+              </a:schemeClr>
+            </a:gs>
+            <a:gs pos="50000">
+              <a:schemeClr val="phClr">
+                <a:lumMod val="105000"/>
+                <a:satMod val="103000"/>
+                <a:tint val="73000"/>
+              </a:schemeClr>
+            </a:gs>
+            <a:gs pos="100000">
+              <a:schemeClr val="phClr">
+                <a:lumMod val="105000"/>
+                <a:satMod val="109000"/>
+                <a:tint val="81000"/>
+              </a:schemeClr>
+            </a:gs>
+          </a:gsLst>
+          <a:lin ang="5400000" scaled="0"/>
+        </a:gradFill>
+        <a:gradFill rotWithShape="1">
+          <a:gsLst>
+            <a:gs pos="0">
+              <a:schemeClr val="phClr">
+                <a:satMod val="103000"/>
+                <a:lumMod val="102000"/>
+                <a:tint val="94000"/>
+              </a:schemeClr>
+            </a:gs>
+            <a:gs pos="50000">
+              <a:schemeClr val="phClr">
+                <a:satMod val="110000"/>
+                <a:lumMod val="100000"/>
+                <a:shade val="100000"/>
+              </a:schemeClr>
+            </a:gs>
+            <a:gs pos="100000">
+              <a:schemeClr val="phClr">
+                <a:lumMod val="99000"/>
+                <a:satMod val="120000"/>
+                <a:shade val="78000"/>
+              </a:schemeClr>
+            </a:gs>
+          </a:gsLst>
+          <a:lin ang="5400000" scaled="0"/>
+        </a:gradFill>
+      </a:fillStyleLst>
+      <a:lnStyleLst>
+        <a:ln w="12700" cap="flat" cmpd="sng" algn="ctr">
+          <a:solidFill>
+            <a:schemeClr val="phClr"/>
+          </a:solidFill>
+          <a:prstDash val="solid"/>
+          <a:miter lim="800000"/>
+        </a:ln>
+        <a:ln w="19050" cap="flat" cmpd="sng" algn="ctr">
+          <a:solidFill>
+            <a:schemeClr val="phClr"/>
+          </a:solidFill>
+          <a:prstDash val="solid"/>
+          <a:miter lim="800000"/>
+        </a:ln>
+        <a:ln w="25400" cap="flat" cmpd="sng" algn="ctr">
+          <a:solidFill>
+            <a:schemeClr val="phClr"/>
+          </a:solidFill>
+          <a:prstDash val="solid"/>
+          <a:miter lim="800000"/>
+        </a:ln>
+      </a:lnStyleLst>
+      <a:effectStyleLst>
+        <a:effectStyle>
+          <a:effectLst/>
+        </a:effectStyle>
+        <a:effectStyle>
+          <a:effectLst/>
+        </a:effectStyle>
+        <a:effectStyle>
+          <a:effectLst>
+            <a:outerShdw blurRad="57150" dist="19050" dir="5400000" algn="ctr" rotWithShape="0">
+              <a:srgbClr val="000000">
+                <a:alpha val="63000"/>
+              </a:srgbClr>
+            </a:outerShdw>
+          </a:effectLst>
+        </a:effectStyle>
+      </a:effectStyleLst>
+      <a:bgFillStyleLst>
+        <a:solidFill>
+          <a:schemeClr val="phClr"/>
+        </a:solidFill>
+        <a:solidFill>
+          <a:schemeClr val="phClr">
+            <a:tint val="95000"/>
+            <a:satMod val="170000"/>
+          </a:schemeClr>
+        </a:solidFill>
+        <a:gradFill rotWithShape="1">
+          <a:gsLst>
+            <a:gs pos="0">
+              <a:schemeClr val="phClr">
+                <a:tint val="93000"/>
+                <a:satMod val="150000"/>
+                <a:shade val="98000"/>
+                <a:lumMod val="102000"/>
+              </a:schemeClr>
+            </a:gs>
+            <a:gs pos="50000">
+              <a:schemeClr val="phClr">
+                <a:tint val="98000"/>
+                <a:satMod val="130000"/>
+                <a:shade val="90000"/>
+                <a:lumMod val="103000"/>
+              </a:schemeClr>
+            </a:gs>
+            <a:gs pos="100000">
+              <a:schemeClr val="phClr">
+                <a:shade val="63000"/>
+                <a:satMod val="120000"/>
+              </a:schemeClr>
+            </a:gs>
+          </a:gsLst>
+          <a:lin ang="5400000" scaled="0"/>
+        </a:gradFill>
+      </a:bgFillStyleLst>
+    </a:fmtScheme>
+  </a:themeElements>
+  <a:objectDefaults>
+    <a:lnDef>
+      <a:spPr/>
+      <a:bodyPr/>
+      <a:lstStyle/>
+      <a:style>
+        <a:lnRef idx="2">
+          <a:schemeClr val="accent1"/>
+        </a:lnRef>
+        <a:fillRef idx="0">
+          <a:schemeClr val="accent1"/>
+        </a:fillRef>
+        <a:effectRef idx="1">
+          <a:schemeClr val="accent1"/>
+        </a:effectRef>
+        <a:fontRef idx="minor">
+          <a:schemeClr val="tx1"/>
+        </a:fontRef>
+      </a:style>
+    </a:lnDef>
+  </a:objectDefaults>
+  <a:extraClrSchemeLst/>
+  <a:extLst>
+    <a:ext uri="{05A4C25C-085E-4340-85A3-A5531E510DB2}">
+      <thm15:themeFamily xmlns:thm15="http://schemas.microsoft.com/office/thememl/2012/main" name="Office Theme" id="{2E142A2C-CD16-42D6-873A-C26D2A0506FA}" vid="{1BDDFF52-6CD6-40A5-AB3C-68EB2F1E4D0A}"/>
+    </a:ext>
+  </a:extLst>
+</a:theme>
 </file>